--- a/datahub_new_project_guide.pptx
+++ b/datahub_new_project_guide.pptx
@@ -136,6 +136,9 @@
           </p14:sldIdLst>
         </p14:section>
       </p14:sectionLst>
+    </p:ext>
+    <p:ext uri="{EFAFB233-063F-42B5-8137-9DF3F51BA10A}">
+      <p15:sldGuideLst xmlns:p15="http://schemas.microsoft.com/office/powerpoint/2012/main"/>
     </p:ext>
   </p:extLst>
 </p:presentation>
@@ -2480,7 +2483,7 @@
         </p:spPr>
         <p:txBody>
           <a:bodyPr wrap="square" lIns="76200" tIns="76200" rIns="76200" bIns="76200" anchor="ctr">
-            <a:normAutofit fontScale="83333" lnSpcReduction="10000"/>
+            <a:normAutofit fontScale="90833" lnSpcReduction="20000"/>
           </a:bodyPr>
           <a:lstStyle/>
           <a:p>
@@ -2865,7 +2868,7 @@
         </p:spPr>
         <p:txBody>
           <a:bodyPr wrap="square" lIns="0" tIns="0" rIns="0" bIns="0" anchor="t">
-            <a:normAutofit fontScale="76234" lnSpcReduction="10000"/>
+            <a:normAutofit fontScale="83734" lnSpcReduction="20000"/>
           </a:bodyPr>
           <a:lstStyle/>
           <a:p>
@@ -3706,7 +3709,7 @@
         </p:spPr>
         <p:txBody>
           <a:bodyPr wrap="square" lIns="76200" tIns="76200" rIns="76200" bIns="76200" anchor="ctr">
-            <a:normAutofit fontScale="83333" lnSpcReduction="10000"/>
+            <a:normAutofit fontScale="90833" lnSpcReduction="20000"/>
           </a:bodyPr>
           <a:lstStyle/>
           <a:p>
@@ -12188,7 +12191,7 @@
         <p:spPr>
           <a:xfrm>
             <a:off x="742950" y="1666494"/>
-            <a:ext cx="4991100" cy="3486150"/>
+            <a:ext cx="4991100" cy="4811268"/>
           </a:xfrm>
           <a:prstGeom prst="rect">
             <a:avLst/>
@@ -12517,7 +12520,7 @@
                 </a:solidFill>
                 <a:latin typeface="Consolas" panose="020B0609020204030204" pitchFamily="49" charset="0"/>
               </a:rPr>
-              <a:t>ship_name</a:t>
+              <a:t>shipbuilder</a:t>
             </a:r>
             <a:r>
               <a:rPr lang="fr-FR" sz="1000" dirty="0">
@@ -12584,7 +12587,7 @@
                 </a:solidFill>
                 <a:latin typeface="Consolas" panose="020B0609020204030204" pitchFamily="49" charset="0"/>
               </a:rPr>
-              <a:t>": "/dnv-v2/vis-3-10a/000a/000/004/004.1",</a:t>
+              <a:t>": "/dnv-v2/vis-3-10a/800a/860/861/861.2/861.21/G52/G52.1",</a:t>
             </a:r>
           </a:p>
           <a:p>
@@ -12595,10 +12598,17 @@
                 </a:solidFill>
                 <a:latin typeface="Consolas" panose="020B0609020204030204" pitchFamily="49" charset="0"/>
               </a:rPr>
-              <a:t>      "Value": "ALMI ATLAS",</a:t>
-            </a:r>
-          </a:p>
-          <a:p>
+              <a:t>      "Value": "Hyundai </a:t>
+            </a:r>
+            <a:r>
+              <a:rPr lang="fr-FR" sz="1000" dirty="0" err="1">
+                <a:solidFill>
+                  <a:schemeClr val="bg1"/>
+                </a:solidFill>
+                <a:latin typeface="Consolas" panose="020B0609020204030204" pitchFamily="49" charset="0"/>
+              </a:rPr>
+              <a:t>Samho</a:t>
+            </a:r>
             <a:r>
               <a:rPr lang="fr-FR" sz="1000" dirty="0">
                 <a:solidFill>
@@ -12606,6 +12616,17 @@
                 </a:solidFill>
                 <a:latin typeface="Consolas" panose="020B0609020204030204" pitchFamily="49" charset="0"/>
               </a:rPr>
+              <a:t> Heavy Industries Co. Ltd",</a:t>
+            </a:r>
+          </a:p>
+          <a:p>
+            <a:r>
+              <a:rPr lang="fr-FR" sz="1000" dirty="0">
+                <a:solidFill>
+                  <a:schemeClr val="bg1"/>
+                </a:solidFill>
+                <a:latin typeface="Consolas" panose="020B0609020204030204" pitchFamily="49" charset="0"/>
+              </a:rPr>
               <a:t>      "</a:t>
             </a:r>
             <a:r>
@@ -12673,7 +12694,7 @@
                 </a:solidFill>
                 <a:latin typeface="Consolas" panose="020B0609020204030204" pitchFamily="49" charset="0"/>
               </a:rPr>
-              <a:t>general_information</a:t>
+              <a:t>shipbuilder</a:t>
             </a:r>
             <a:r>
               <a:rPr lang="fr-FR" sz="1000" dirty="0">
@@ -12711,10 +12732,17 @@
                 </a:solidFill>
                 <a:latin typeface="Consolas" panose="020B0609020204030204" pitchFamily="49" charset="0"/>
               </a:rPr>
-              <a:t>": "General Information",</a:t>
-            </a:r>
-          </a:p>
-          <a:p>
+              <a:t>": "</a:t>
+            </a:r>
+            <a:r>
+              <a:rPr lang="fr-FR" sz="1000" dirty="0" err="1">
+                <a:solidFill>
+                  <a:schemeClr val="bg1"/>
+                </a:solidFill>
+                <a:latin typeface="Consolas" panose="020B0609020204030204" pitchFamily="49" charset="0"/>
+              </a:rPr>
+              <a:t>Shipbuilder</a:t>
+            </a:r>
             <a:r>
               <a:rPr lang="fr-FR" sz="1000" dirty="0">
                 <a:solidFill>
@@ -12722,6 +12750,17 @@
                 </a:solidFill>
                 <a:latin typeface="Consolas" panose="020B0609020204030204" pitchFamily="49" charset="0"/>
               </a:rPr>
+              <a:t>",</a:t>
+            </a:r>
+          </a:p>
+          <a:p>
+            <a:r>
+              <a:rPr lang="fr-FR" sz="1000" dirty="0">
+                <a:solidFill>
+                  <a:schemeClr val="bg1"/>
+                </a:solidFill>
+                <a:latin typeface="Consolas" panose="020B0609020204030204" pitchFamily="49" charset="0"/>
+              </a:rPr>
               <a:t>          "</a:t>
             </a:r>
             <a:r>
@@ -12885,10 +12924,17 @@
                 </a:solidFill>
                 <a:latin typeface="Consolas" panose="020B0609020204030204" pitchFamily="49" charset="0"/>
               </a:rPr>
-              <a:t>": "Ship Name",</a:t>
-            </a:r>
-          </a:p>
-          <a:p>
+              <a:t>": "</a:t>
+            </a:r>
+            <a:r>
+              <a:rPr lang="fr-FR" sz="1000" dirty="0" err="1">
+                <a:solidFill>
+                  <a:schemeClr val="bg1"/>
+                </a:solidFill>
+                <a:latin typeface="Consolas" panose="020B0609020204030204" pitchFamily="49" charset="0"/>
+              </a:rPr>
+              <a:t>Shipbuilder</a:t>
+            </a:r>
             <a:r>
               <a:rPr lang="fr-FR" sz="1000" dirty="0">
                 <a:solidFill>
@@ -12896,6 +12942,17 @@
                 </a:solidFill>
                 <a:latin typeface="Consolas" panose="020B0609020204030204" pitchFamily="49" charset="0"/>
               </a:rPr>
+              <a:t>",</a:t>
+            </a:r>
+          </a:p>
+          <a:p>
+            <a:r>
+              <a:rPr lang="fr-FR" sz="1000" dirty="0">
+                <a:solidFill>
+                  <a:schemeClr val="bg1"/>
+                </a:solidFill>
+                <a:latin typeface="Consolas" panose="020B0609020204030204" pitchFamily="49" charset="0"/>
+              </a:rPr>
               <a:t>          "</a:t>
             </a:r>
             <a:r>
@@ -12981,7 +13038,7 @@
                 </a:solidFill>
                 <a:latin typeface="Consolas" panose="020B0609020204030204" pitchFamily="49" charset="0"/>
               </a:rPr>
-              <a:t>ship_name</a:t>
+              <a:t>shipbuilder</a:t>
             </a:r>
             <a:r>
               <a:rPr lang="fr-FR" sz="1000" dirty="0">
@@ -13019,7 +13076,7 @@
                 </a:solidFill>
                 <a:latin typeface="Consolas" panose="020B0609020204030204" pitchFamily="49" charset="0"/>
               </a:rPr>
-              <a:t>": "/dnv-v2/vis-3-10a/000a/000/004/004.1"</a:t>
+              <a:t>": "/dnv-v2/vis-3-10a/800a/860/861/861.2/861.21/G52/G52.1"</a:t>
             </a:r>
           </a:p>
           <a:p>
@@ -13070,122 +13127,38 @@
                 </a:solidFill>
                 <a:latin typeface="Consolas" panose="020B0609020204030204" pitchFamily="49" charset="0"/>
               </a:rPr>
-              <a:t>    },</a:t>
-            </a:r>
-          </a:p>
-          <a:p>
-            <a:pPr algn="l">
-              <a:defRPr sz="1275" b="0">
-                <a:solidFill>
-                  <a:srgbClr val="E2E8F0"/>
-                </a:solidFill>
-                <a:latin typeface="Consolas"/>
-                <a:ea typeface="Consolas"/>
-                <a:cs typeface="Consolas"/>
-              </a:defRPr>
-            </a:pPr>
-            <a:r>
-              <a:rPr lang="fr-FR" sz="1000" b="0" dirty="0">
+              <a:t>    }</a:t>
+            </a:r>
+          </a:p>
+          <a:p>
+            <a:r>
+              <a:rPr lang="fr-FR" sz="1000" dirty="0">
                 <a:solidFill>
                   <a:schemeClr val="bg1"/>
                 </a:solidFill>
                 <a:latin typeface="Consolas" panose="020B0609020204030204" pitchFamily="49" charset="0"/>
-                <a:ea typeface="Consolas"/>
-                <a:cs typeface="Consolas"/>
-              </a:rPr>
-              <a:t>      "location": "</a:t>
-            </a:r>
-            <a:r>
-              <a:rPr lang="fr-FR" sz="1000" b="0" dirty="0" err="1">
+              </a:rPr>
+              <a:t>  ]</a:t>
+            </a:r>
+          </a:p>
+          <a:p>
+            <a:r>
+              <a:rPr lang="fr-FR" sz="1000" dirty="0">
                 <a:solidFill>
                   <a:schemeClr val="bg1"/>
                 </a:solidFill>
                 <a:latin typeface="Consolas" panose="020B0609020204030204" pitchFamily="49" charset="0"/>
-                <a:ea typeface="Consolas"/>
-                <a:cs typeface="Consolas"/>
-              </a:rPr>
-              <a:t>hull</a:t>
-            </a:r>
-            <a:r>
-              <a:rPr lang="fr-FR" sz="1000" b="0" dirty="0">
-                <a:solidFill>
-                  <a:schemeClr val="bg1"/>
-                </a:solidFill>
-                <a:latin typeface="Consolas" panose="020B0609020204030204" pitchFamily="49" charset="0"/>
-                <a:ea typeface="Consolas"/>
-                <a:cs typeface="Consolas"/>
-              </a:rPr>
-              <a:t>"</a:t>
-            </a:r>
-          </a:p>
-          <a:p>
-            <a:pPr algn="l">
-              <a:defRPr sz="1275" b="0">
-                <a:solidFill>
-                  <a:srgbClr val="E2E8F0"/>
-                </a:solidFill>
-                <a:latin typeface="Consolas"/>
-                <a:ea typeface="Consolas"/>
-                <a:cs typeface="Consolas"/>
-              </a:defRPr>
-            </a:pPr>
-            <a:r>
-              <a:rPr lang="fr-FR" sz="1000" b="0" dirty="0">
-                <a:solidFill>
-                  <a:schemeClr val="bg1"/>
-                </a:solidFill>
-                <a:latin typeface="Consolas" panose="020B0609020204030204" pitchFamily="49" charset="0"/>
-                <a:ea typeface="Consolas"/>
-                <a:cs typeface="Consolas"/>
-              </a:rPr>
-              <a:t>    }</a:t>
-            </a:r>
-          </a:p>
-          <a:p>
-            <a:pPr algn="l">
-              <a:defRPr sz="1275" b="0">
-                <a:solidFill>
-                  <a:srgbClr val="E2E8F0"/>
-                </a:solidFill>
-                <a:latin typeface="Consolas"/>
-                <a:ea typeface="Consolas"/>
-                <a:cs typeface="Consolas"/>
-              </a:defRPr>
-            </a:pPr>
-            <a:r>
-              <a:rPr lang="fr-FR" sz="1000" b="0" dirty="0">
-                <a:solidFill>
-                  <a:schemeClr val="bg1"/>
-                </a:solidFill>
-                <a:latin typeface="Consolas" panose="020B0609020204030204" pitchFamily="49" charset="0"/>
-                <a:ea typeface="Consolas"/>
-                <a:cs typeface="Consolas"/>
-              </a:rPr>
-              <a:t>  ]</a:t>
-            </a:r>
-          </a:p>
-          <a:p>
-            <a:pPr algn="l">
-              <a:defRPr sz="1275" b="0">
-                <a:solidFill>
-                  <a:srgbClr val="E2E8F0"/>
-                </a:solidFill>
-                <a:latin typeface="Consolas"/>
-                <a:ea typeface="Consolas"/>
-                <a:cs typeface="Consolas"/>
-              </a:defRPr>
-            </a:pPr>
-            <a:r>
-              <a:rPr lang="fr-FR" sz="1000" b="0" dirty="0">
-                <a:solidFill>
-                  <a:schemeClr val="bg1"/>
-                </a:solidFill>
-                <a:latin typeface="Consolas" panose="020B0609020204030204" pitchFamily="49" charset="0"/>
-                <a:ea typeface="Consolas"/>
-                <a:cs typeface="Consolas"/>
               </a:rPr>
               <a:t>}</a:t>
             </a:r>
+            <a:endParaRPr lang="fr-FR" sz="1000" b="0" dirty="0">
+              <a:solidFill>
+                <a:schemeClr val="bg1"/>
+              </a:solidFill>
+              <a:latin typeface="Consolas" panose="020B0609020204030204" pitchFamily="49" charset="0"/>
+              <a:ea typeface="Consolas"/>
+              <a:cs typeface="Consolas"/>
+            </a:endParaRPr>
           </a:p>
         </p:txBody>
       </p:sp>
@@ -14497,7 +14470,7 @@
         </p:spPr>
         <p:txBody>
           <a:bodyPr wrap="square" lIns="76200" tIns="76200" rIns="76200" bIns="76200" anchor="ctr">
-            <a:normAutofit fontScale="83333" lnSpcReduction="10000"/>
+            <a:normAutofit fontScale="90833" lnSpcReduction="20000"/>
           </a:bodyPr>
           <a:lstStyle/>
           <a:p>
@@ -15022,7 +14995,7 @@
         </p:spPr>
         <p:txBody>
           <a:bodyPr wrap="square" lIns="76200" tIns="76200" rIns="76200" bIns="76200" anchor="ctr">
-            <a:normAutofit fontScale="67024" lnSpcReduction="10000"/>
+            <a:normAutofit fontScale="67024" lnSpcReduction="20000"/>
           </a:bodyPr>
           <a:lstStyle/>
           <a:p>
@@ -15222,7 +15195,7 @@
         </p:spPr>
         <p:txBody>
           <a:bodyPr wrap="square" lIns="76200" tIns="76200" rIns="76200" bIns="76200" anchor="ctr">
-            <a:normAutofit fontScale="67024" lnSpcReduction="10000"/>
+            <a:normAutofit fontScale="67024" lnSpcReduction="20000"/>
           </a:bodyPr>
           <a:lstStyle/>
           <a:p>
@@ -15422,7 +15395,7 @@
         </p:spPr>
         <p:txBody>
           <a:bodyPr wrap="square" lIns="76200" tIns="76200" rIns="76200" bIns="76200" anchor="ctr">
-            <a:normAutofit fontScale="67024" lnSpcReduction="10000"/>
+            <a:normAutofit fontScale="67024" lnSpcReduction="20000"/>
           </a:bodyPr>
           <a:lstStyle/>
           <a:p>
@@ -15622,7 +15595,7 @@
         </p:spPr>
         <p:txBody>
           <a:bodyPr wrap="square" lIns="76200" tIns="76200" rIns="76200" bIns="76200" anchor="ctr">
-            <a:normAutofit fontScale="67024" lnSpcReduction="10000"/>
+            <a:normAutofit fontScale="67024" lnSpcReduction="20000"/>
           </a:bodyPr>
           <a:lstStyle/>
           <a:p>
@@ -15822,7 +15795,7 @@
         </p:spPr>
         <p:txBody>
           <a:bodyPr wrap="square" lIns="76200" tIns="76200" rIns="76200" bIns="76200" anchor="ctr">
-            <a:normAutofit fontScale="67024" lnSpcReduction="10000"/>
+            <a:normAutofit fontScale="67024" lnSpcReduction="20000"/>
           </a:bodyPr>
           <a:lstStyle/>
           <a:p>
@@ -16022,7 +15995,7 @@
         </p:spPr>
         <p:txBody>
           <a:bodyPr wrap="square" lIns="76200" tIns="76200" rIns="76200" bIns="76200" anchor="ctr">
-            <a:normAutofit fontScale="67024" lnSpcReduction="10000"/>
+            <a:normAutofit fontScale="67024" lnSpcReduction="20000"/>
           </a:bodyPr>
           <a:lstStyle/>
           <a:p>
@@ -16310,7 +16283,7 @@
         </p:spPr>
         <p:txBody>
           <a:bodyPr wrap="square" lIns="76200" tIns="76200" rIns="76200" bIns="76200" anchor="ctr">
-            <a:normAutofit fontScale="83333" lnSpcReduction="10000"/>
+            <a:normAutofit fontScale="90833" lnSpcReduction="20000"/>
           </a:bodyPr>
           <a:lstStyle/>
           <a:p>
@@ -18305,7 +18278,7 @@
         </p:spPr>
         <p:txBody>
           <a:bodyPr wrap="square" lIns="76200" tIns="76200" rIns="76200" bIns="76200" anchor="ctr">
-            <a:normAutofit fontScale="83333" lnSpcReduction="10000"/>
+            <a:normAutofit fontScale="90833" lnSpcReduction="20000"/>
           </a:bodyPr>
           <a:lstStyle/>
           <a:p>

--- a/datahub_new_project_guide.pptx
+++ b/datahub_new_project_guide.pptx
@@ -11462,7 +11462,7 @@
               </a:defRPr>
             </a:pPr>
             <a:r>
-              <a:rPr lang="fr-FR" sz="1000" b="0" i="0" u="none" strike="noStrike" kern="1200" cap="none" spc="0" baseline="0">
+              <a:rPr lang="fr-FR" sz="1000" b="0" i="0" u="none" strike="noStrike" kern="1200" cap="none" spc="0" baseline="0" dirty="0">
                 <a:solidFill>
                   <a:srgbClr val="FFFFFF"/>
                 </a:solidFill>
@@ -11493,14 +11493,274 @@
               </a:defRPr>
             </a:pPr>
             <a:r>
-              <a:rPr lang="fr-FR" sz="1000" b="0" i="0" u="none" strike="noStrike" kern="1200" cap="none" spc="0" baseline="0">
+              <a:rPr lang="fr-FR" sz="1000" b="0" i="0" u="none" strike="noStrike" kern="1200" cap="none" spc="0" baseline="0" dirty="0">
                 <a:solidFill>
                   <a:srgbClr val="FFFFFF"/>
                 </a:solidFill>
                 <a:uFillTx/>
                 <a:latin typeface="Consolas" pitchFamily="49"/>
               </a:rPr>
-              <a:t>  "summary": "ALMI ATLAS is a RINA Significant Ship of 2018. The vessel is presented in the project with key ship data, mapped DNV information, and linked raw sources such as the source PDF and GPS route data.",</a:t>
+              <a:t>  "</a:t>
+            </a:r>
+            <a:r>
+              <a:rPr lang="fr-FR" sz="1000" b="0" i="0" u="none" strike="noStrike" kern="1200" cap="none" spc="0" baseline="0" dirty="0" err="1">
+                <a:solidFill>
+                  <a:srgbClr val="FFFFFF"/>
+                </a:solidFill>
+                <a:uFillTx/>
+                <a:latin typeface="Consolas" pitchFamily="49"/>
+              </a:rPr>
+              <a:t>summary</a:t>
+            </a:r>
+            <a:r>
+              <a:rPr lang="fr-FR" sz="1000" b="0" i="0" u="none" strike="noStrike" kern="1200" cap="none" spc="0" baseline="0" dirty="0">
+                <a:solidFill>
+                  <a:srgbClr val="FFFFFF"/>
+                </a:solidFill>
+                <a:uFillTx/>
+                <a:latin typeface="Consolas" pitchFamily="49"/>
+              </a:rPr>
+              <a:t>": "ALMI ATLAS </a:t>
+            </a:r>
+            <a:r>
+              <a:rPr lang="fr-FR" sz="1000" b="0" i="0" u="none" strike="noStrike" kern="1200" cap="none" spc="0" baseline="0" dirty="0" err="1">
+                <a:solidFill>
+                  <a:srgbClr val="FFFFFF"/>
+                </a:solidFill>
+                <a:uFillTx/>
+                <a:latin typeface="Consolas" pitchFamily="49"/>
+              </a:rPr>
+              <a:t>is</a:t>
+            </a:r>
+            <a:r>
+              <a:rPr lang="fr-FR" sz="1000" b="0" i="0" u="none" strike="noStrike" kern="1200" cap="none" spc="0" baseline="0" dirty="0">
+                <a:solidFill>
+                  <a:srgbClr val="FFFFFF"/>
+                </a:solidFill>
+                <a:uFillTx/>
+                <a:latin typeface="Consolas" pitchFamily="49"/>
+              </a:rPr>
+              <a:t> a RINA </a:t>
+            </a:r>
+            <a:r>
+              <a:rPr lang="fr-FR" sz="1000" b="0" i="0" u="none" strike="noStrike" kern="1200" cap="none" spc="0" baseline="0" dirty="0" err="1">
+                <a:solidFill>
+                  <a:srgbClr val="FFFFFF"/>
+                </a:solidFill>
+                <a:uFillTx/>
+                <a:latin typeface="Consolas" pitchFamily="49"/>
+              </a:rPr>
+              <a:t>Significant</a:t>
+            </a:r>
+            <a:r>
+              <a:rPr lang="fr-FR" sz="1000" b="0" i="0" u="none" strike="noStrike" kern="1200" cap="none" spc="0" baseline="0" dirty="0">
+                <a:solidFill>
+                  <a:srgbClr val="FFFFFF"/>
+                </a:solidFill>
+                <a:uFillTx/>
+                <a:latin typeface="Consolas" pitchFamily="49"/>
+              </a:rPr>
+              <a:t> Ship of 2018. The </a:t>
+            </a:r>
+            <a:r>
+              <a:rPr lang="fr-FR" sz="1000" b="0" i="0" u="none" strike="noStrike" kern="1200" cap="none" spc="0" baseline="0" dirty="0" err="1">
+                <a:solidFill>
+                  <a:srgbClr val="FFFFFF"/>
+                </a:solidFill>
+                <a:uFillTx/>
+                <a:latin typeface="Consolas" pitchFamily="49"/>
+              </a:rPr>
+              <a:t>vessel</a:t>
+            </a:r>
+            <a:r>
+              <a:rPr lang="fr-FR" sz="1000" b="0" i="0" u="none" strike="noStrike" kern="1200" cap="none" spc="0" baseline="0" dirty="0">
+                <a:solidFill>
+                  <a:srgbClr val="FFFFFF"/>
+                </a:solidFill>
+                <a:uFillTx/>
+                <a:latin typeface="Consolas" pitchFamily="49"/>
+              </a:rPr>
+              <a:t> </a:t>
+            </a:r>
+            <a:r>
+              <a:rPr lang="fr-FR" sz="1000" b="0" i="0" u="none" strike="noStrike" kern="1200" cap="none" spc="0" baseline="0" dirty="0" err="1">
+                <a:solidFill>
+                  <a:srgbClr val="FFFFFF"/>
+                </a:solidFill>
+                <a:uFillTx/>
+                <a:latin typeface="Consolas" pitchFamily="49"/>
+              </a:rPr>
+              <a:t>is</a:t>
+            </a:r>
+            <a:r>
+              <a:rPr lang="fr-FR" sz="1000" b="0" i="0" u="none" strike="noStrike" kern="1200" cap="none" spc="0" baseline="0" dirty="0">
+                <a:solidFill>
+                  <a:srgbClr val="FFFFFF"/>
+                </a:solidFill>
+                <a:uFillTx/>
+                <a:latin typeface="Consolas" pitchFamily="49"/>
+              </a:rPr>
+              <a:t> </a:t>
+            </a:r>
+            <a:r>
+              <a:rPr lang="fr-FR" sz="1000" b="0" i="0" u="none" strike="noStrike" kern="1200" cap="none" spc="0" baseline="0" dirty="0" err="1">
+                <a:solidFill>
+                  <a:srgbClr val="FFFFFF"/>
+                </a:solidFill>
+                <a:uFillTx/>
+                <a:latin typeface="Consolas" pitchFamily="49"/>
+              </a:rPr>
+              <a:t>presented</a:t>
+            </a:r>
+            <a:r>
+              <a:rPr lang="fr-FR" sz="1000" b="0" i="0" u="none" strike="noStrike" kern="1200" cap="none" spc="0" baseline="0" dirty="0">
+                <a:solidFill>
+                  <a:srgbClr val="FFFFFF"/>
+                </a:solidFill>
+                <a:uFillTx/>
+                <a:latin typeface="Consolas" pitchFamily="49"/>
+              </a:rPr>
+              <a:t> in the </a:t>
+            </a:r>
+            <a:r>
+              <a:rPr lang="fr-FR" sz="1000" b="0" i="0" u="none" strike="noStrike" kern="1200" cap="none" spc="0" baseline="0" dirty="0" err="1">
+                <a:solidFill>
+                  <a:srgbClr val="FFFFFF"/>
+                </a:solidFill>
+                <a:uFillTx/>
+                <a:latin typeface="Consolas" pitchFamily="49"/>
+              </a:rPr>
+              <a:t>project</a:t>
+            </a:r>
+            <a:r>
+              <a:rPr lang="fr-FR" sz="1000" b="0" i="0" u="none" strike="noStrike" kern="1200" cap="none" spc="0" baseline="0" dirty="0">
+                <a:solidFill>
+                  <a:srgbClr val="FFFFFF"/>
+                </a:solidFill>
+                <a:uFillTx/>
+                <a:latin typeface="Consolas" pitchFamily="49"/>
+              </a:rPr>
+              <a:t> </a:t>
+            </a:r>
+            <a:r>
+              <a:rPr lang="fr-FR" sz="1000" b="0" i="0" u="none" strike="noStrike" kern="1200" cap="none" spc="0" baseline="0" dirty="0" err="1">
+                <a:solidFill>
+                  <a:srgbClr val="FFFFFF"/>
+                </a:solidFill>
+                <a:uFillTx/>
+                <a:latin typeface="Consolas" pitchFamily="49"/>
+              </a:rPr>
+              <a:t>with</a:t>
+            </a:r>
+            <a:r>
+              <a:rPr lang="fr-FR" sz="1000" b="0" i="0" u="none" strike="noStrike" kern="1200" cap="none" spc="0" baseline="0" dirty="0">
+                <a:solidFill>
+                  <a:srgbClr val="FFFFFF"/>
+                </a:solidFill>
+                <a:uFillTx/>
+                <a:latin typeface="Consolas" pitchFamily="49"/>
+              </a:rPr>
+              <a:t> key </a:t>
+            </a:r>
+            <a:r>
+              <a:rPr lang="fr-FR" sz="1000" b="0" i="0" u="none" strike="noStrike" kern="1200" cap="none" spc="0" baseline="0" dirty="0" err="1">
+                <a:solidFill>
+                  <a:srgbClr val="FFFFFF"/>
+                </a:solidFill>
+                <a:uFillTx/>
+                <a:latin typeface="Consolas" pitchFamily="49"/>
+              </a:rPr>
+              <a:t>ship</a:t>
+            </a:r>
+            <a:r>
+              <a:rPr lang="fr-FR" sz="1000" b="0" i="0" u="none" strike="noStrike" kern="1200" cap="none" spc="0" baseline="0" dirty="0">
+                <a:solidFill>
+                  <a:srgbClr val="FFFFFF"/>
+                </a:solidFill>
+                <a:uFillTx/>
+                <a:latin typeface="Consolas" pitchFamily="49"/>
+              </a:rPr>
+              <a:t> data, </a:t>
+            </a:r>
+            <a:r>
+              <a:rPr lang="fr-FR" sz="1000" b="0" i="0" u="none" strike="noStrike" kern="1200" cap="none" spc="0" baseline="0" dirty="0" err="1">
+                <a:solidFill>
+                  <a:srgbClr val="FFFFFF"/>
+                </a:solidFill>
+                <a:uFillTx/>
+                <a:latin typeface="Consolas" pitchFamily="49"/>
+              </a:rPr>
+              <a:t>mapped</a:t>
+            </a:r>
+            <a:r>
+              <a:rPr lang="fr-FR" sz="1000" b="0" i="0" u="none" strike="noStrike" kern="1200" cap="none" spc="0" baseline="0" dirty="0">
+                <a:solidFill>
+                  <a:srgbClr val="FFFFFF"/>
+                </a:solidFill>
+                <a:uFillTx/>
+                <a:latin typeface="Consolas" pitchFamily="49"/>
+              </a:rPr>
+              <a:t> DNV information, and </a:t>
+            </a:r>
+            <a:r>
+              <a:rPr lang="fr-FR" sz="1000" b="0" i="0" u="none" strike="noStrike" kern="1200" cap="none" spc="0" baseline="0" dirty="0" err="1">
+                <a:solidFill>
+                  <a:srgbClr val="FFFFFF"/>
+                </a:solidFill>
+                <a:uFillTx/>
+                <a:latin typeface="Consolas" pitchFamily="49"/>
+              </a:rPr>
+              <a:t>linked</a:t>
+            </a:r>
+            <a:r>
+              <a:rPr lang="fr-FR" sz="1000" b="0" i="0" u="none" strike="noStrike" kern="1200" cap="none" spc="0" baseline="0" dirty="0">
+                <a:solidFill>
+                  <a:srgbClr val="FFFFFF"/>
+                </a:solidFill>
+                <a:uFillTx/>
+                <a:latin typeface="Consolas" pitchFamily="49"/>
+              </a:rPr>
+              <a:t> </a:t>
+            </a:r>
+            <a:r>
+              <a:rPr lang="fr-FR" sz="1000" b="0" i="0" u="none" strike="noStrike" kern="1200" cap="none" spc="0" baseline="0" dirty="0" err="1">
+                <a:solidFill>
+                  <a:srgbClr val="FFFFFF"/>
+                </a:solidFill>
+                <a:uFillTx/>
+                <a:latin typeface="Consolas" pitchFamily="49"/>
+              </a:rPr>
+              <a:t>raw</a:t>
+            </a:r>
+            <a:r>
+              <a:rPr lang="fr-FR" sz="1000" b="0" i="0" u="none" strike="noStrike" kern="1200" cap="none" spc="0" baseline="0" dirty="0">
+                <a:solidFill>
+                  <a:srgbClr val="FFFFFF"/>
+                </a:solidFill>
+                <a:uFillTx/>
+                <a:latin typeface="Consolas" pitchFamily="49"/>
+              </a:rPr>
+              <a:t> sources </a:t>
+            </a:r>
+            <a:r>
+              <a:rPr lang="fr-FR" sz="1000" b="0" i="0" u="none" strike="noStrike" kern="1200" cap="none" spc="0" baseline="0" dirty="0" err="1">
+                <a:solidFill>
+                  <a:srgbClr val="FFFFFF"/>
+                </a:solidFill>
+                <a:uFillTx/>
+                <a:latin typeface="Consolas" pitchFamily="49"/>
+              </a:rPr>
+              <a:t>such</a:t>
+            </a:r>
+            <a:r>
+              <a:rPr lang="fr-FR" sz="1000" b="0" i="0" u="none" strike="noStrike" kern="1200" cap="none" spc="0" baseline="0" dirty="0">
+                <a:solidFill>
+                  <a:srgbClr val="FFFFFF"/>
+                </a:solidFill>
+                <a:uFillTx/>
+                <a:latin typeface="Consolas" pitchFamily="49"/>
+              </a:rPr>
+              <a:t> as the source PDF and GPS route data.",</a:t>
             </a:r>
           </a:p>
           <a:p>
@@ -11524,14 +11784,34 @@
               </a:defRPr>
             </a:pPr>
             <a:r>
-              <a:rPr lang="fr-FR" sz="1000" b="0" i="0" u="none" strike="noStrike" kern="1200" cap="none" spc="0" baseline="0">
+              <a:rPr lang="fr-FR" sz="1000" b="0" i="0" u="none" strike="noStrike" kern="1200" cap="none" spc="0" baseline="0" dirty="0">
                 <a:solidFill>
                   <a:srgbClr val="FFFFFF"/>
                 </a:solidFill>
                 <a:uFillTx/>
                 <a:latin typeface="Consolas" pitchFamily="49"/>
               </a:rPr>
-              <a:t>  "vessel_info": [</a:t>
+              <a:t>  "</a:t>
+            </a:r>
+            <a:r>
+              <a:rPr lang="fr-FR" sz="1000" b="0" i="0" u="none" strike="noStrike" kern="1200" cap="none" spc="0" baseline="0" dirty="0" err="1">
+                <a:solidFill>
+                  <a:srgbClr val="FFFFFF"/>
+                </a:solidFill>
+                <a:uFillTx/>
+                <a:latin typeface="Consolas" pitchFamily="49"/>
+              </a:rPr>
+              <a:t>vessel_info</a:t>
+            </a:r>
+            <a:r>
+              <a:rPr lang="fr-FR" sz="1000" b="0" i="0" u="none" strike="noStrike" kern="1200" cap="none" spc="0" baseline="0" dirty="0">
+                <a:solidFill>
+                  <a:srgbClr val="FFFFFF"/>
+                </a:solidFill>
+                <a:uFillTx/>
+                <a:latin typeface="Consolas" pitchFamily="49"/>
+              </a:rPr>
+              <a:t>": [</a:t>
             </a:r>
           </a:p>
           <a:p>
@@ -11554,7 +11834,7 @@
                 <a:uFillTx/>
               </a:defRPr>
             </a:pPr>
-            <a:endParaRPr lang="fr-FR" sz="1000" b="0" i="0" u="none" strike="noStrike" kern="1200" cap="none" spc="0" baseline="0">
+            <a:endParaRPr lang="fr-FR" sz="1000" b="0" i="0" u="none" strike="noStrike" kern="1200" cap="none" spc="0" baseline="0" dirty="0">
               <a:solidFill>
                 <a:srgbClr val="FFFFFF"/>
               </a:solidFill>
@@ -11583,7 +11863,7 @@
               </a:defRPr>
             </a:pPr>
             <a:r>
-              <a:rPr lang="fr-FR" sz="1000" b="0" i="0" u="none" strike="noStrike" kern="1200" cap="none" spc="0" baseline="0">
+              <a:rPr lang="fr-FR" sz="1000" b="0" i="0" u="none" strike="noStrike" kern="1200" cap="none" spc="0" baseline="0" dirty="0">
                 <a:solidFill>
                   <a:srgbClr val="FFFFFF"/>
                 </a:solidFill>
@@ -11614,14 +11894,34 @@
               </a:defRPr>
             </a:pPr>
             <a:r>
-              <a:rPr lang="fr-FR" sz="1000" b="0" i="0" u="none" strike="noStrike" kern="1200" cap="none" spc="0" baseline="0">
+              <a:rPr lang="fr-FR" sz="1000" b="0" i="0" u="none" strike="noStrike" kern="1200" cap="none" spc="0" baseline="0" dirty="0">
                 <a:solidFill>
                   <a:srgbClr val="FFFFFF"/>
                 </a:solidFill>
                 <a:uFillTx/>
                 <a:latin typeface="Consolas" pitchFamily="49"/>
               </a:rPr>
-              <a:t>      "Name": "shipbuilder",</a:t>
+              <a:t>      "Name": "</a:t>
+            </a:r>
+            <a:r>
+              <a:rPr lang="fr-FR" sz="1000" b="0" i="0" u="none" strike="noStrike" kern="1200" cap="none" spc="0" baseline="0" dirty="0" err="1">
+                <a:solidFill>
+                  <a:srgbClr val="FFFFFF"/>
+                </a:solidFill>
+                <a:uFillTx/>
+                <a:latin typeface="Consolas" pitchFamily="49"/>
+              </a:rPr>
+              <a:t>shipbuilder</a:t>
+            </a:r>
+            <a:r>
+              <a:rPr lang="fr-FR" sz="1000" b="0" i="0" u="none" strike="noStrike" kern="1200" cap="none" spc="0" baseline="0" dirty="0">
+                <a:solidFill>
+                  <a:srgbClr val="FFFFFF"/>
+                </a:solidFill>
+                <a:uFillTx/>
+                <a:latin typeface="Consolas" pitchFamily="49"/>
+              </a:rPr>
+              <a:t>",</a:t>
             </a:r>
           </a:p>
           <a:p>
@@ -11645,14 +11945,34 @@
               </a:defRPr>
             </a:pPr>
             <a:r>
-              <a:rPr lang="fr-FR" sz="1000" b="0" i="0" u="none" strike="noStrike" kern="1200" cap="none" spc="0" baseline="0">
+              <a:rPr lang="fr-FR" sz="1000" b="0" i="0" u="none" strike="noStrike" kern="1200" cap="none" spc="0" baseline="0" dirty="0">
                 <a:solidFill>
                   <a:srgbClr val="FFFFFF"/>
                 </a:solidFill>
                 <a:uFillTx/>
                 <a:latin typeface="Consolas" pitchFamily="49"/>
               </a:rPr>
-              <a:t>      "Link": "../raw_DATA/ALMI ATLAS.pdf",</a:t>
+              <a:t>      "Link": "../</a:t>
+            </a:r>
+            <a:r>
+              <a:rPr lang="fr-FR" sz="1000" b="0" i="0" u="none" strike="noStrike" kern="1200" cap="none" spc="0" baseline="0" dirty="0" err="1">
+                <a:solidFill>
+                  <a:srgbClr val="FFFFFF"/>
+                </a:solidFill>
+                <a:uFillTx/>
+                <a:latin typeface="Consolas" pitchFamily="49"/>
+              </a:rPr>
+              <a:t>raw_DATA</a:t>
+            </a:r>
+            <a:r>
+              <a:rPr lang="fr-FR" sz="1000" b="0" i="0" u="none" strike="noStrike" kern="1200" cap="none" spc="0" baseline="0" dirty="0">
+                <a:solidFill>
+                  <a:srgbClr val="FFFFFF"/>
+                </a:solidFill>
+                <a:uFillTx/>
+                <a:latin typeface="Consolas" pitchFamily="49"/>
+              </a:rPr>
+              <a:t>/ALMI ATLAS.pdf",</a:t>
             </a:r>
           </a:p>
           <a:p>
@@ -11676,14 +11996,34 @@
               </a:defRPr>
             </a:pPr>
             <a:r>
-              <a:rPr lang="fr-FR" sz="1000" b="0" i="0" u="none" strike="noStrike" kern="1200" cap="none" spc="0" baseline="0">
+              <a:rPr lang="fr-FR" sz="1000" b="0" i="0" u="none" strike="noStrike" kern="1200" cap="none" spc="0" baseline="0" dirty="0">
                 <a:solidFill>
                   <a:srgbClr val="FFFFFF"/>
                 </a:solidFill>
                 <a:uFillTx/>
                 <a:latin typeface="Consolas" pitchFamily="49"/>
               </a:rPr>
-              <a:t>      "DNV_path": "/dnv-v2/vis-3-10a/800a/860/861/861.2/861.21/G52/G52.1",</a:t>
+              <a:t>      "</a:t>
+            </a:r>
+            <a:r>
+              <a:rPr lang="fr-FR" sz="1000" b="0" i="0" u="none" strike="noStrike" kern="1200" cap="none" spc="0" baseline="0" dirty="0" err="1">
+                <a:solidFill>
+                  <a:srgbClr val="FFFFFF"/>
+                </a:solidFill>
+                <a:uFillTx/>
+                <a:latin typeface="Consolas" pitchFamily="49"/>
+              </a:rPr>
+              <a:t>DNV_path</a:t>
+            </a:r>
+            <a:r>
+              <a:rPr lang="fr-FR" sz="1000" b="0" i="0" u="none" strike="noStrike" kern="1200" cap="none" spc="0" baseline="0" dirty="0">
+                <a:solidFill>
+                  <a:srgbClr val="FFFFFF"/>
+                </a:solidFill>
+                <a:uFillTx/>
+                <a:latin typeface="Consolas" pitchFamily="49"/>
+              </a:rPr>
+              <a:t>": "/dnv-v2/vis-3-10a/800a/860/861/861.2/861.21/G52/G52.1",</a:t>
             </a:r>
           </a:p>
           <a:p>
@@ -11707,6 +12047,36 @@
               </a:defRPr>
             </a:pPr>
             <a:r>
+              <a:rPr lang="fr-FR" sz="1000" b="0" i="0" u="none" strike="noStrike" kern="1200" cap="none" spc="0" baseline="0" dirty="0">
+                <a:solidFill>
+                  <a:srgbClr val="FFFFFF"/>
+                </a:solidFill>
+                <a:uFillTx/>
+                <a:latin typeface="Consolas" pitchFamily="49"/>
+              </a:rPr>
+              <a:t>      "Value": "Hyundai </a:t>
+            </a:r>
+            <a:r>
+              <a:rPr lang="fr-FR" sz="1000" b="0" i="0" u="none" strike="noStrike" kern="1200" cap="none" spc="0" baseline="0" dirty="0" err="1">
+                <a:solidFill>
+                  <a:srgbClr val="FFFFFF"/>
+                </a:solidFill>
+                <a:uFillTx/>
+                <a:latin typeface="Consolas" pitchFamily="49"/>
+              </a:rPr>
+              <a:t>Samho</a:t>
+            </a:r>
+            <a:r>
+              <a:rPr lang="fr-FR" sz="1000" b="0" i="0" u="none" strike="noStrike" kern="1200" cap="none" spc="0" baseline="0" dirty="0">
+                <a:solidFill>
+                  <a:srgbClr val="FFFFFF"/>
+                </a:solidFill>
+                <a:uFillTx/>
+                <a:latin typeface="Consolas" pitchFamily="49"/>
+              </a:rPr>
+              <a:t> Heavy Industries Co. </a:t>
+            </a:r>
+            <a:r>
               <a:rPr lang="fr-FR" sz="1000" b="0" i="0" u="none" strike="noStrike" kern="1200" cap="none" spc="0" baseline="0">
                 <a:solidFill>
                   <a:srgbClr val="FFFFFF"/>
@@ -11714,92 +12084,9 @@
                 <a:uFillTx/>
                 <a:latin typeface="Consolas" pitchFamily="49"/>
               </a:rPr>
-              <a:t>      "Value": "Hyundai Samho Heavy Industries Co. Ltd";</a:t>
-            </a:r>
-          </a:p>
-          <a:p>
-            <a:pPr marL="0" marR="0" lvl="0" indent="0" algn="l" defTabSz="914400" rtl="0" fontAlgn="auto" hangingPunct="1">
-              <a:lnSpc>
-                <a:spcPct val="100000"/>
-              </a:lnSpc>
-              <a:spcBef>
-                <a:spcPts val="0"/>
-              </a:spcBef>
-              <a:spcAft>
-                <a:spcPts val="0"/>
-              </a:spcAft>
-              <a:buNone/>
-              <a:tabLst/>
-              <a:defRPr sz="1800" b="0" i="0" u="none" strike="noStrike" kern="0" cap="none" spc="0" baseline="0">
-                <a:solidFill>
-                  <a:srgbClr val="000000"/>
-                </a:solidFill>
-                <a:uFillTx/>
-              </a:defRPr>
-            </a:pPr>
-            <a:r>
-              <a:rPr lang="fr-FR" sz="1000" b="0" i="0" u="none" strike="noStrike" kern="1200" cap="none" spc="0" baseline="0">
-                <a:solidFill>
-                  <a:srgbClr val="FFFFFF"/>
-                </a:solidFill>
-                <a:uFillTx/>
-                <a:latin typeface="Consolas" pitchFamily="49"/>
-              </a:rPr>
-              <a:t>      "location": "hull"</a:t>
-            </a:r>
-          </a:p>
-          <a:p>
-            <a:pPr marL="0" marR="0" lvl="0" indent="0" algn="l" defTabSz="914400" rtl="0" fontAlgn="auto" hangingPunct="1">
-              <a:lnSpc>
-                <a:spcPct val="100000"/>
-              </a:lnSpc>
-              <a:spcBef>
-                <a:spcPts val="0"/>
-              </a:spcBef>
-              <a:spcAft>
-                <a:spcPts val="0"/>
-              </a:spcAft>
-              <a:buNone/>
-              <a:tabLst/>
-              <a:defRPr sz="1800" b="0" i="0" u="none" strike="noStrike" kern="0" cap="none" spc="0" baseline="0">
-                <a:solidFill>
-                  <a:srgbClr val="000000"/>
-                </a:solidFill>
-                <a:uFillTx/>
-              </a:defRPr>
-            </a:pPr>
-            <a:r>
-              <a:rPr lang="fr-FR" sz="1000" b="0" i="0" u="none" strike="noStrike" kern="1200" cap="none" spc="0" baseline="0">
-                <a:solidFill>
-                  <a:srgbClr val="FFFFFF"/>
-                </a:solidFill>
-                <a:uFillTx/>
-                <a:latin typeface="Consolas" pitchFamily="49"/>
-              </a:rPr>
-              <a:t>    },</a:t>
-            </a:r>
-          </a:p>
-          <a:p>
-            <a:pPr marL="0" marR="0" lvl="0" indent="0" algn="l" defTabSz="914400" rtl="0" fontAlgn="auto" hangingPunct="1">
-              <a:lnSpc>
-                <a:spcPct val="100000"/>
-              </a:lnSpc>
-              <a:spcBef>
-                <a:spcPts val="0"/>
-              </a:spcBef>
-              <a:spcAft>
-                <a:spcPts val="0"/>
-              </a:spcAft>
-              <a:buNone/>
-              <a:tabLst/>
-              <a:defRPr sz="1800" b="0" i="0" u="none" strike="noStrike" kern="0" cap="none" spc="0" baseline="0">
-                <a:solidFill>
-                  <a:srgbClr val="000000"/>
-                </a:solidFill>
-                <a:uFillTx/>
-              </a:defRPr>
-            </a:pPr>
-            <a:endParaRPr lang="fr-FR" sz="1000" b="0" i="0" u="none" strike="noStrike" kern="1200" cap="none" spc="0" baseline="0">
+              <a:t>Ltd« ,</a:t>
+            </a:r>
+            <a:endParaRPr lang="fr-FR" sz="1000" b="0" i="0" u="none" strike="noStrike" kern="1200" cap="none" spc="0" baseline="0" dirty="0">
               <a:solidFill>
                 <a:srgbClr val="FFFFFF"/>
               </a:solidFill>
@@ -11828,14 +12115,34 @@
               </a:defRPr>
             </a:pPr>
             <a:r>
-              <a:rPr lang="fr-FR" sz="1000" b="0" i="0" u="none" strike="noStrike" kern="0" cap="none" spc="0" baseline="0">
+              <a:rPr lang="fr-FR" sz="1000" b="0" i="0" u="none" strike="noStrike" kern="1200" cap="none" spc="0" baseline="0" dirty="0">
                 <a:solidFill>
                   <a:srgbClr val="FFFFFF"/>
                 </a:solidFill>
                 <a:uFillTx/>
                 <a:latin typeface="Consolas" pitchFamily="49"/>
               </a:rPr>
-              <a:t>    {</a:t>
+              <a:t>      "location": "</a:t>
+            </a:r>
+            <a:r>
+              <a:rPr lang="fr-FR" sz="1000" b="0" i="0" u="none" strike="noStrike" kern="1200" cap="none" spc="0" baseline="0" dirty="0" err="1">
+                <a:solidFill>
+                  <a:srgbClr val="FFFFFF"/>
+                </a:solidFill>
+                <a:uFillTx/>
+                <a:latin typeface="Consolas" pitchFamily="49"/>
+              </a:rPr>
+              <a:t>hull</a:t>
+            </a:r>
+            <a:r>
+              <a:rPr lang="fr-FR" sz="1000" b="0" i="0" u="none" strike="noStrike" kern="1200" cap="none" spc="0" baseline="0" dirty="0">
+                <a:solidFill>
+                  <a:srgbClr val="FFFFFF"/>
+                </a:solidFill>
+                <a:uFillTx/>
+                <a:latin typeface="Consolas" pitchFamily="49"/>
+              </a:rPr>
+              <a:t>"</a:t>
             </a:r>
           </a:p>
           <a:p>
@@ -11859,14 +12166,14 @@
               </a:defRPr>
             </a:pPr>
             <a:r>
-              <a:rPr lang="fr-FR" sz="1000" b="0" i="0" u="none" strike="noStrike" kern="0" cap="none" spc="0" baseline="0">
+              <a:rPr lang="fr-FR" sz="1000" b="0" i="0" u="none" strike="noStrike" kern="1200" cap="none" spc="0" baseline="0" dirty="0">
                 <a:solidFill>
                   <a:srgbClr val="FFFFFF"/>
                 </a:solidFill>
                 <a:uFillTx/>
                 <a:latin typeface="Consolas" pitchFamily="49"/>
               </a:rPr>
-              <a:t>      "Name": "hull_no",</a:t>
+              <a:t>    },</a:t>
             </a:r>
           </a:p>
           <a:p>
@@ -11889,141 +12196,7 @@
                 <a:uFillTx/>
               </a:defRPr>
             </a:pPr>
-            <a:r>
-              <a:rPr lang="fr-FR" sz="1000" b="0" i="0" u="none" strike="noStrike" kern="0" cap="none" spc="0" baseline="0">
-                <a:solidFill>
-                  <a:srgbClr val="FFFFFF"/>
-                </a:solidFill>
-                <a:uFillTx/>
-                <a:latin typeface="Consolas" pitchFamily="49"/>
-              </a:rPr>
-              <a:t>      "Link": "../raw_DATA/ALMI ATLAS.pdf",</a:t>
-            </a:r>
-          </a:p>
-          <a:p>
-            <a:pPr marL="0" marR="0" lvl="0" indent="0" algn="l" defTabSz="914400" rtl="0" fontAlgn="auto" hangingPunct="1">
-              <a:lnSpc>
-                <a:spcPct val="100000"/>
-              </a:lnSpc>
-              <a:spcBef>
-                <a:spcPts val="0"/>
-              </a:spcBef>
-              <a:spcAft>
-                <a:spcPts val="0"/>
-              </a:spcAft>
-              <a:buNone/>
-              <a:tabLst/>
-              <a:defRPr sz="1800" b="0" i="0" u="none" strike="noStrike" kern="0" cap="none" spc="0" baseline="0">
-                <a:solidFill>
-                  <a:srgbClr val="000000"/>
-                </a:solidFill>
-                <a:uFillTx/>
-              </a:defRPr>
-            </a:pPr>
-            <a:r>
-              <a:rPr lang="fr-FR" sz="1000" b="0" i="0" u="none" strike="noStrike" kern="0" cap="none" spc="0" baseline="0">
-                <a:solidFill>
-                  <a:srgbClr val="FFFFFF"/>
-                </a:solidFill>
-                <a:uFillTx/>
-                <a:latin typeface="Consolas" pitchFamily="49"/>
-              </a:rPr>
-              <a:t>      "DNV_path": "/dnv-v2/vis-3-10a/800a/860/861/861.1/861.11/G51/G51.1",</a:t>
-            </a:r>
-          </a:p>
-          <a:p>
-            <a:pPr marL="0" marR="0" lvl="0" indent="0" algn="l" defTabSz="914400" rtl="0" fontAlgn="auto" hangingPunct="1">
-              <a:lnSpc>
-                <a:spcPct val="100000"/>
-              </a:lnSpc>
-              <a:spcBef>
-                <a:spcPts val="0"/>
-              </a:spcBef>
-              <a:spcAft>
-                <a:spcPts val="0"/>
-              </a:spcAft>
-              <a:buNone/>
-              <a:tabLst/>
-              <a:defRPr sz="1800" b="0" i="0" u="none" strike="noStrike" kern="0" cap="none" spc="0" baseline="0">
-                <a:solidFill>
-                  <a:srgbClr val="000000"/>
-                </a:solidFill>
-                <a:uFillTx/>
-              </a:defRPr>
-            </a:pPr>
-            <a:r>
-              <a:rPr lang="fr-FR" sz="1000" b="0" i="0" u="none" strike="noStrike" kern="0" cap="none" spc="0" baseline="0">
-                <a:solidFill>
-                  <a:srgbClr val="FFFFFF"/>
-                </a:solidFill>
-                <a:uFillTx/>
-                <a:latin typeface="Consolas" pitchFamily="49"/>
-              </a:rPr>
-              <a:t>      "Value": "S913",</a:t>
-            </a:r>
-          </a:p>
-          <a:p>
-            <a:pPr marL="0" marR="0" lvl="0" indent="0" algn="l" defTabSz="914400" rtl="0" fontAlgn="auto" hangingPunct="1">
-              <a:lnSpc>
-                <a:spcPct val="100000"/>
-              </a:lnSpc>
-              <a:spcBef>
-                <a:spcPts val="0"/>
-              </a:spcBef>
-              <a:spcAft>
-                <a:spcPts val="0"/>
-              </a:spcAft>
-              <a:buNone/>
-              <a:tabLst/>
-              <a:defRPr sz="1800" b="0" i="0" u="none" strike="noStrike" kern="0" cap="none" spc="0" baseline="0">
-                <a:solidFill>
-                  <a:srgbClr val="000000"/>
-                </a:solidFill>
-                <a:uFillTx/>
-              </a:defRPr>
-            </a:pPr>
-            <a:r>
-              <a:rPr lang="fr-FR" sz="1000" b="0" i="0" u="none" strike="noStrike" kern="0" cap="none" spc="0" baseline="0">
-                <a:solidFill>
-                  <a:srgbClr val="FFFFFF"/>
-                </a:solidFill>
-                <a:uFillTx/>
-                <a:latin typeface="Consolas" pitchFamily="49"/>
-              </a:rPr>
-              <a:t>      "location": "hull"    </a:t>
-            </a:r>
-          </a:p>
-          <a:p>
-            <a:pPr marL="0" marR="0" lvl="0" indent="0" algn="l" defTabSz="914400" rtl="0" fontAlgn="auto" hangingPunct="1">
-              <a:lnSpc>
-                <a:spcPct val="100000"/>
-              </a:lnSpc>
-              <a:spcBef>
-                <a:spcPts val="0"/>
-              </a:spcBef>
-              <a:spcAft>
-                <a:spcPts val="0"/>
-              </a:spcAft>
-              <a:buNone/>
-              <a:tabLst/>
-              <a:defRPr sz="1800" b="0" i="0" u="none" strike="noStrike" kern="0" cap="none" spc="0" baseline="0">
-                <a:solidFill>
-                  <a:srgbClr val="000000"/>
-                </a:solidFill>
-                <a:uFillTx/>
-              </a:defRPr>
-            </a:pPr>
-            <a:r>
-              <a:rPr lang="fr-FR" sz="1000" b="0" i="0" u="none" strike="noStrike" kern="0" cap="none" spc="0" baseline="0">
-                <a:solidFill>
-                  <a:srgbClr val="FFFFFF"/>
-                </a:solidFill>
-                <a:uFillTx/>
-                <a:latin typeface="Consolas" pitchFamily="49"/>
-              </a:rPr>
-              <a:t>    }</a:t>
-            </a:r>
-            <a:endParaRPr lang="fr-FR" sz="1000" b="0" i="0" u="none" strike="noStrike" kern="1200" cap="none" spc="0" baseline="0">
+            <a:endParaRPr lang="fr-FR" sz="1000" b="0" i="0" u="none" strike="noStrike" kern="1200" cap="none" spc="0" baseline="0" dirty="0">
               <a:solidFill>
                 <a:srgbClr val="FFFFFF"/>
               </a:solidFill>
@@ -12052,14 +12225,14 @@
               </a:defRPr>
             </a:pPr>
             <a:r>
-              <a:rPr lang="fr-FR" sz="1000" b="0" i="0" u="none" strike="noStrike" kern="1200" cap="none" spc="0" baseline="0">
+              <a:rPr lang="fr-FR" sz="1000" b="0" i="0" u="none" strike="noStrike" kern="0" cap="none" spc="0" baseline="0" dirty="0">
                 <a:solidFill>
                   <a:srgbClr val="FFFFFF"/>
                 </a:solidFill>
                 <a:uFillTx/>
                 <a:latin typeface="Consolas" pitchFamily="49"/>
               </a:rPr>
-              <a:t>  ]</a:t>
+              <a:t>    {</a:t>
             </a:r>
           </a:p>
           <a:p>
@@ -12083,16 +12256,320 @@
               </a:defRPr>
             </a:pPr>
             <a:r>
-              <a:rPr lang="fr-FR" sz="1000" b="0" i="0" u="none" strike="noStrike" kern="1200" cap="none" spc="0" baseline="0">
+              <a:rPr lang="fr-FR" sz="1000" b="0" i="0" u="none" strike="noStrike" kern="0" cap="none" spc="0" baseline="0" dirty="0">
                 <a:solidFill>
                   <a:srgbClr val="FFFFFF"/>
                 </a:solidFill>
                 <a:uFillTx/>
                 <a:latin typeface="Consolas" pitchFamily="49"/>
               </a:rPr>
+              <a:t>      "Name": "</a:t>
+            </a:r>
+            <a:r>
+              <a:rPr lang="fr-FR" sz="1000" b="0" i="0" u="none" strike="noStrike" kern="0" cap="none" spc="0" baseline="0" dirty="0" err="1">
+                <a:solidFill>
+                  <a:srgbClr val="FFFFFF"/>
+                </a:solidFill>
+                <a:uFillTx/>
+                <a:latin typeface="Consolas" pitchFamily="49"/>
+              </a:rPr>
+              <a:t>hull_no</a:t>
+            </a:r>
+            <a:r>
+              <a:rPr lang="fr-FR" sz="1000" b="0" i="0" u="none" strike="noStrike" kern="0" cap="none" spc="0" baseline="0" dirty="0">
+                <a:solidFill>
+                  <a:srgbClr val="FFFFFF"/>
+                </a:solidFill>
+                <a:uFillTx/>
+                <a:latin typeface="Consolas" pitchFamily="49"/>
+              </a:rPr>
+              <a:t>",</a:t>
+            </a:r>
+          </a:p>
+          <a:p>
+            <a:pPr marL="0" marR="0" lvl="0" indent="0" algn="l" defTabSz="914400" rtl="0" fontAlgn="auto" hangingPunct="1">
+              <a:lnSpc>
+                <a:spcPct val="100000"/>
+              </a:lnSpc>
+              <a:spcBef>
+                <a:spcPts val="0"/>
+              </a:spcBef>
+              <a:spcAft>
+                <a:spcPts val="0"/>
+              </a:spcAft>
+              <a:buNone/>
+              <a:tabLst/>
+              <a:defRPr sz="1800" b="0" i="0" u="none" strike="noStrike" kern="0" cap="none" spc="0" baseline="0">
+                <a:solidFill>
+                  <a:srgbClr val="000000"/>
+                </a:solidFill>
+                <a:uFillTx/>
+              </a:defRPr>
+            </a:pPr>
+            <a:r>
+              <a:rPr lang="fr-FR" sz="1000" b="0" i="0" u="none" strike="noStrike" kern="0" cap="none" spc="0" baseline="0" dirty="0">
+                <a:solidFill>
+                  <a:srgbClr val="FFFFFF"/>
+                </a:solidFill>
+                <a:uFillTx/>
+                <a:latin typeface="Consolas" pitchFamily="49"/>
+              </a:rPr>
+              <a:t>      "Link": "../</a:t>
+            </a:r>
+            <a:r>
+              <a:rPr lang="fr-FR" sz="1000" b="0" i="0" u="none" strike="noStrike" kern="0" cap="none" spc="0" baseline="0" dirty="0" err="1">
+                <a:solidFill>
+                  <a:srgbClr val="FFFFFF"/>
+                </a:solidFill>
+                <a:uFillTx/>
+                <a:latin typeface="Consolas" pitchFamily="49"/>
+              </a:rPr>
+              <a:t>raw_DATA</a:t>
+            </a:r>
+            <a:r>
+              <a:rPr lang="fr-FR" sz="1000" b="0" i="0" u="none" strike="noStrike" kern="0" cap="none" spc="0" baseline="0" dirty="0">
+                <a:solidFill>
+                  <a:srgbClr val="FFFFFF"/>
+                </a:solidFill>
+                <a:uFillTx/>
+                <a:latin typeface="Consolas" pitchFamily="49"/>
+              </a:rPr>
+              <a:t>/ALMI ATLAS.pdf",</a:t>
+            </a:r>
+          </a:p>
+          <a:p>
+            <a:pPr marL="0" marR="0" lvl="0" indent="0" algn="l" defTabSz="914400" rtl="0" fontAlgn="auto" hangingPunct="1">
+              <a:lnSpc>
+                <a:spcPct val="100000"/>
+              </a:lnSpc>
+              <a:spcBef>
+                <a:spcPts val="0"/>
+              </a:spcBef>
+              <a:spcAft>
+                <a:spcPts val="0"/>
+              </a:spcAft>
+              <a:buNone/>
+              <a:tabLst/>
+              <a:defRPr sz="1800" b="0" i="0" u="none" strike="noStrike" kern="0" cap="none" spc="0" baseline="0">
+                <a:solidFill>
+                  <a:srgbClr val="000000"/>
+                </a:solidFill>
+                <a:uFillTx/>
+              </a:defRPr>
+            </a:pPr>
+            <a:r>
+              <a:rPr lang="fr-FR" sz="1000" b="0" i="0" u="none" strike="noStrike" kern="0" cap="none" spc="0" baseline="0" dirty="0">
+                <a:solidFill>
+                  <a:srgbClr val="FFFFFF"/>
+                </a:solidFill>
+                <a:uFillTx/>
+                <a:latin typeface="Consolas" pitchFamily="49"/>
+              </a:rPr>
+              <a:t>      "</a:t>
+            </a:r>
+            <a:r>
+              <a:rPr lang="fr-FR" sz="1000" b="0" i="0" u="none" strike="noStrike" kern="0" cap="none" spc="0" baseline="0" dirty="0" err="1">
+                <a:solidFill>
+                  <a:srgbClr val="FFFFFF"/>
+                </a:solidFill>
+                <a:uFillTx/>
+                <a:latin typeface="Consolas" pitchFamily="49"/>
+              </a:rPr>
+              <a:t>DNV_path</a:t>
+            </a:r>
+            <a:r>
+              <a:rPr lang="fr-FR" sz="1000" b="0" i="0" u="none" strike="noStrike" kern="0" cap="none" spc="0" baseline="0" dirty="0">
+                <a:solidFill>
+                  <a:srgbClr val="FFFFFF"/>
+                </a:solidFill>
+                <a:uFillTx/>
+                <a:latin typeface="Consolas" pitchFamily="49"/>
+              </a:rPr>
+              <a:t>": "/dnv-v2/vis-3-10a/800a/860/861/861.1/861.11/G51/G51.1",</a:t>
+            </a:r>
+          </a:p>
+          <a:p>
+            <a:pPr marL="0" marR="0" lvl="0" indent="0" algn="l" defTabSz="914400" rtl="0" fontAlgn="auto" hangingPunct="1">
+              <a:lnSpc>
+                <a:spcPct val="100000"/>
+              </a:lnSpc>
+              <a:spcBef>
+                <a:spcPts val="0"/>
+              </a:spcBef>
+              <a:spcAft>
+                <a:spcPts val="0"/>
+              </a:spcAft>
+              <a:buNone/>
+              <a:tabLst/>
+              <a:defRPr sz="1800" b="0" i="0" u="none" strike="noStrike" kern="0" cap="none" spc="0" baseline="0">
+                <a:solidFill>
+                  <a:srgbClr val="000000"/>
+                </a:solidFill>
+                <a:uFillTx/>
+              </a:defRPr>
+            </a:pPr>
+            <a:r>
+              <a:rPr lang="fr-FR" sz="1000" b="0" i="0" u="none" strike="noStrike" kern="0" cap="none" spc="0" baseline="0" dirty="0">
+                <a:solidFill>
+                  <a:srgbClr val="FFFFFF"/>
+                </a:solidFill>
+                <a:uFillTx/>
+                <a:latin typeface="Consolas" pitchFamily="49"/>
+              </a:rPr>
+              <a:t>      "Value": "S913",</a:t>
+            </a:r>
+          </a:p>
+          <a:p>
+            <a:pPr marL="0" marR="0" lvl="0" indent="0" algn="l" defTabSz="914400" rtl="0" fontAlgn="auto" hangingPunct="1">
+              <a:lnSpc>
+                <a:spcPct val="100000"/>
+              </a:lnSpc>
+              <a:spcBef>
+                <a:spcPts val="0"/>
+              </a:spcBef>
+              <a:spcAft>
+                <a:spcPts val="0"/>
+              </a:spcAft>
+              <a:buNone/>
+              <a:tabLst/>
+              <a:defRPr sz="1800" b="0" i="0" u="none" strike="noStrike" kern="0" cap="none" spc="0" baseline="0">
+                <a:solidFill>
+                  <a:srgbClr val="000000"/>
+                </a:solidFill>
+                <a:uFillTx/>
+              </a:defRPr>
+            </a:pPr>
+            <a:r>
+              <a:rPr lang="fr-FR" sz="1000" b="0" i="0" u="none" strike="noStrike" kern="0" cap="none" spc="0" baseline="0" dirty="0">
+                <a:solidFill>
+                  <a:srgbClr val="FFFFFF"/>
+                </a:solidFill>
+                <a:uFillTx/>
+                <a:latin typeface="Consolas" pitchFamily="49"/>
+              </a:rPr>
+              <a:t>      "location": "</a:t>
+            </a:r>
+            <a:r>
+              <a:rPr lang="fr-FR" sz="1000" b="0" i="0" u="none" strike="noStrike" kern="0" cap="none" spc="0" baseline="0" dirty="0" err="1">
+                <a:solidFill>
+                  <a:srgbClr val="FFFFFF"/>
+                </a:solidFill>
+                <a:uFillTx/>
+                <a:latin typeface="Consolas" pitchFamily="49"/>
+              </a:rPr>
+              <a:t>hull</a:t>
+            </a:r>
+            <a:r>
+              <a:rPr lang="fr-FR" sz="1000" b="0" i="0" u="none" strike="noStrike" kern="0" cap="none" spc="0" baseline="0" dirty="0">
+                <a:solidFill>
+                  <a:srgbClr val="FFFFFF"/>
+                </a:solidFill>
+                <a:uFillTx/>
+                <a:latin typeface="Consolas" pitchFamily="49"/>
+              </a:rPr>
+              <a:t>"    </a:t>
+            </a:r>
+          </a:p>
+          <a:p>
+            <a:pPr marL="0" marR="0" lvl="0" indent="0" algn="l" defTabSz="914400" rtl="0" fontAlgn="auto" hangingPunct="1">
+              <a:lnSpc>
+                <a:spcPct val="100000"/>
+              </a:lnSpc>
+              <a:spcBef>
+                <a:spcPts val="0"/>
+              </a:spcBef>
+              <a:spcAft>
+                <a:spcPts val="0"/>
+              </a:spcAft>
+              <a:buNone/>
+              <a:tabLst/>
+              <a:defRPr sz="1800" b="0" i="0" u="none" strike="noStrike" kern="0" cap="none" spc="0" baseline="0">
+                <a:solidFill>
+                  <a:srgbClr val="000000"/>
+                </a:solidFill>
+                <a:uFillTx/>
+              </a:defRPr>
+            </a:pPr>
+            <a:r>
+              <a:rPr lang="fr-FR" sz="1000" b="0" i="0" u="none" strike="noStrike" kern="0" cap="none" spc="0" baseline="0" dirty="0">
+                <a:solidFill>
+                  <a:srgbClr val="FFFFFF"/>
+                </a:solidFill>
+                <a:uFillTx/>
+                <a:latin typeface="Consolas" pitchFamily="49"/>
+              </a:rPr>
+              <a:t>    }</a:t>
+            </a:r>
+            <a:endParaRPr lang="fr-FR" sz="1000" b="0" i="0" u="none" strike="noStrike" kern="1200" cap="none" spc="0" baseline="0" dirty="0">
+              <a:solidFill>
+                <a:srgbClr val="FFFFFF"/>
+              </a:solidFill>
+              <a:uFillTx/>
+              <a:latin typeface="Consolas" pitchFamily="49"/>
+            </a:endParaRPr>
+          </a:p>
+          <a:p>
+            <a:pPr marL="0" marR="0" lvl="0" indent="0" algn="l" defTabSz="914400" rtl="0" fontAlgn="auto" hangingPunct="1">
+              <a:lnSpc>
+                <a:spcPct val="100000"/>
+              </a:lnSpc>
+              <a:spcBef>
+                <a:spcPts val="0"/>
+              </a:spcBef>
+              <a:spcAft>
+                <a:spcPts val="0"/>
+              </a:spcAft>
+              <a:buNone/>
+              <a:tabLst/>
+              <a:defRPr sz="1800" b="0" i="0" u="none" strike="noStrike" kern="0" cap="none" spc="0" baseline="0">
+                <a:solidFill>
+                  <a:srgbClr val="000000"/>
+                </a:solidFill>
+                <a:uFillTx/>
+              </a:defRPr>
+            </a:pPr>
+            <a:r>
+              <a:rPr lang="fr-FR" sz="1000" b="0" i="0" u="none" strike="noStrike" kern="1200" cap="none" spc="0" baseline="0" dirty="0">
+                <a:solidFill>
+                  <a:srgbClr val="FFFFFF"/>
+                </a:solidFill>
+                <a:uFillTx/>
+                <a:latin typeface="Consolas" pitchFamily="49"/>
+              </a:rPr>
+              <a:t>  ]</a:t>
+            </a:r>
+          </a:p>
+          <a:p>
+            <a:pPr marL="0" marR="0" lvl="0" indent="0" algn="l" defTabSz="914400" rtl="0" fontAlgn="auto" hangingPunct="1">
+              <a:lnSpc>
+                <a:spcPct val="100000"/>
+              </a:lnSpc>
+              <a:spcBef>
+                <a:spcPts val="0"/>
+              </a:spcBef>
+              <a:spcAft>
+                <a:spcPts val="0"/>
+              </a:spcAft>
+              <a:buNone/>
+              <a:tabLst/>
+              <a:defRPr sz="1800" b="0" i="0" u="none" strike="noStrike" kern="0" cap="none" spc="0" baseline="0">
+                <a:solidFill>
+                  <a:srgbClr val="000000"/>
+                </a:solidFill>
+                <a:uFillTx/>
+              </a:defRPr>
+            </a:pPr>
+            <a:r>
+              <a:rPr lang="fr-FR" sz="1000" b="0" i="0" u="none" strike="noStrike" kern="1200" cap="none" spc="0" baseline="0" dirty="0">
+                <a:solidFill>
+                  <a:srgbClr val="FFFFFF"/>
+                </a:solidFill>
+                <a:uFillTx/>
+                <a:latin typeface="Consolas" pitchFamily="49"/>
+              </a:rPr>
               <a:t>}</a:t>
             </a:r>
-            <a:endParaRPr lang="fr-FR" sz="1000" b="0" i="0" u="none" strike="noStrike" kern="1200" cap="none" spc="0" baseline="0">
+            <a:endParaRPr lang="fr-FR" sz="1000" b="0" i="0" u="none" strike="noStrike" kern="1200" cap="none" spc="0" baseline="0" dirty="0">
               <a:solidFill>
                 <a:srgbClr val="FFFFFF"/>
               </a:solidFill>

--- a/datahub_new_project_guide.pptx
+++ b/datahub_new_project_guide.pptx
@@ -5,19 +5,20 @@
     <p:sldMasterId id="2147483648" r:id="rId1"/>
   </p:sldMasterIdLst>
   <p:notesMasterIdLst>
-    <p:notesMasterId r:id="rId12"/>
+    <p:notesMasterId r:id="rId13"/>
   </p:notesMasterIdLst>
   <p:sldIdLst>
     <p:sldId id="256" r:id="rId2"/>
     <p:sldId id="257" r:id="rId3"/>
     <p:sldId id="258" r:id="rId4"/>
     <p:sldId id="259" r:id="rId5"/>
-    <p:sldId id="260" r:id="rId6"/>
-    <p:sldId id="269" r:id="rId7"/>
-    <p:sldId id="272" r:id="rId8"/>
-    <p:sldId id="270" r:id="rId9"/>
-    <p:sldId id="265" r:id="rId10"/>
-    <p:sldId id="266" r:id="rId11"/>
+    <p:sldId id="269" r:id="rId6"/>
+    <p:sldId id="272" r:id="rId7"/>
+    <p:sldId id="270" r:id="rId8"/>
+    <p:sldId id="260" r:id="rId9"/>
+    <p:sldId id="273" r:id="rId10"/>
+    <p:sldId id="265" r:id="rId11"/>
+    <p:sldId id="266" r:id="rId12"/>
   </p:sldIdLst>
   <p:sldSz cx="12192000" cy="6858000"/>
   <p:notesSz cx="6858000" cy="9144000"/>
@@ -125,10 +126,11 @@
             <p14:sldId id="257"/>
             <p14:sldId id="258"/>
             <p14:sldId id="259"/>
-            <p14:sldId id="260"/>
             <p14:sldId id="269"/>
             <p14:sldId id="272"/>
             <p14:sldId id="270"/>
+            <p14:sldId id="260"/>
+            <p14:sldId id="273"/>
             <p14:sldId id="265"/>
             <p14:sldId id="266"/>
           </p14:sldIdLst>
@@ -463,6 +465,81 @@
 </p:notes>
 </file>
 
+<file path=ppt/notesSlides/notesSlide11.xml><?xml version="1.0" encoding="utf-8"?>
+<p:notes xmlns:a="http://schemas.openxmlformats.org/drawingml/2006/main" xmlns:r="http://schemas.openxmlformats.org/officeDocument/2006/relationships" xmlns:p="http://schemas.openxmlformats.org/presentationml/2006/main">
+  <p:cSld>
+    <p:spTree>
+      <p:nvGrpSpPr>
+        <p:cNvPr id="1" name=""/>
+        <p:cNvGrpSpPr/>
+        <p:nvPr/>
+      </p:nvGrpSpPr>
+      <p:grpSpPr>
+        <a:xfrm>
+          <a:off x="0" y="0"/>
+          <a:ext cx="0" cy="0"/>
+          <a:chOff x="0" y="0"/>
+          <a:chExt cx="0" cy="0"/>
+        </a:xfrm>
+      </p:grpSpPr>
+      <p:sp>
+        <p:nvSpPr>
+          <p:cNvPr id="2" name="Slide Image Placeholder 1"/>
+          <p:cNvSpPr>
+            <a:spLocks noGrp="1" noRot="1" noChangeAspect="1"/>
+          </p:cNvSpPr>
+          <p:nvPr>
+            <p:ph type="sldImg"/>
+          </p:nvPr>
+        </p:nvSpPr>
+        <p:spPr/>
+      </p:sp>
+      <p:sp>
+        <p:nvSpPr>
+          <p:cNvPr id="3" name="Notes Placeholder 2"/>
+          <p:cNvSpPr>
+            <a:spLocks noGrp="1"/>
+          </p:cNvSpPr>
+          <p:nvPr>
+            <p:ph type="body" idx="1"/>
+          </p:nvPr>
+        </p:nvSpPr>
+        <p:spPr/>
+        <p:txBody>
+          <a:bodyPr/>
+          <a:lstStyle/>
+          <a:p>
+            <a:endParaRPr/>
+          </a:p>
+        </p:txBody>
+      </p:sp>
+      <p:sp>
+        <p:nvSpPr>
+          <p:cNvPr id="4" name="Slide Number Placeholder 3"/>
+          <p:cNvSpPr>
+            <a:spLocks noGrp="1"/>
+          </p:cNvSpPr>
+          <p:nvPr>
+            <p:ph type="sldNum" idx="5"/>
+          </p:nvPr>
+        </p:nvSpPr>
+        <p:spPr/>
+        <p:txBody>
+          <a:bodyPr/>
+          <a:lstStyle/>
+          <a:p>
+            <a:endParaRPr/>
+          </a:p>
+        </p:txBody>
+      </p:sp>
+    </p:spTree>
+  </p:cSld>
+  <p:clrMapOvr>
+    <a:masterClrMapping/>
+  </p:clrMapOvr>
+</p:notes>
+</file>
+
 <file path=ppt/notesSlides/notesSlide2.xml><?xml version="1.0" encoding="utf-8"?>
 <p:notes xmlns:a="http://schemas.openxmlformats.org/drawingml/2006/main" xmlns:r="http://schemas.openxmlformats.org/officeDocument/2006/relationships" xmlns:p="http://schemas.openxmlformats.org/presentationml/2006/main">
   <p:cSld>
@@ -707,7 +784,13 @@
       </p:grpSpPr>
       <p:sp>
         <p:nvSpPr>
-          <p:cNvPr id="2" name="Slide Image Placeholder 1"/>
+          <p:cNvPr id="2" name="Slide Image Placeholder 1">
+            <a:extLst>
+              <a:ext uri="{FF2B5EF4-FFF2-40B4-BE49-F238E27FC236}">
+                <a16:creationId xmlns:a16="http://schemas.microsoft.com/office/drawing/2014/main" id="{6DBE6949-0591-BC9C-60AA-B26630070458}"/>
+              </a:ext>
+            </a:extLst>
+          </p:cNvPr>
           <p:cNvSpPr>
             <a:spLocks noGrp="1" noRot="1" noChangeAspect="1"/>
           </p:cNvSpPr>
@@ -719,12 +802,18 @@
       </p:sp>
       <p:sp>
         <p:nvSpPr>
-          <p:cNvPr id="3" name="Notes Placeholder 2"/>
-          <p:cNvSpPr>
+          <p:cNvPr id="3" name="Notes Placeholder 2">
+            <a:extLst>
+              <a:ext uri="{FF2B5EF4-FFF2-40B4-BE49-F238E27FC236}">
+                <a16:creationId xmlns:a16="http://schemas.microsoft.com/office/drawing/2014/main" id="{0D9BA3C3-6B9E-B4A8-6C51-5F0925CE147F}"/>
+              </a:ext>
+            </a:extLst>
+          </p:cNvPr>
+          <p:cNvSpPr txBox="1">
             <a:spLocks noGrp="1"/>
           </p:cNvSpPr>
           <p:nvPr>
-            <p:ph type="body" idx="1"/>
+            <p:ph type="body" sz="quarter" idx="1"/>
           </p:nvPr>
         </p:nvSpPr>
         <p:spPr/>
@@ -732,26 +821,67 @@
           <a:bodyPr/>
           <a:lstStyle/>
           <a:p>
-            <a:endParaRPr/>
-          </a:p>
-        </p:txBody>
-      </p:sp>
-      <p:sp>
-        <p:nvSpPr>
-          <p:cNvPr id="4" name="Slide Number Placeholder 3"/>
-          <p:cNvSpPr>
-            <a:spLocks noGrp="1"/>
-          </p:cNvSpPr>
-          <p:nvPr>
-            <p:ph type="sldNum" idx="5"/>
-          </p:nvPr>
-        </p:nvSpPr>
-        <p:spPr/>
-        <p:txBody>
-          <a:bodyPr/>
-          <a:lstStyle/>
-          <a:p>
-            <a:endParaRPr/>
+            <a:endParaRPr lang="fr-FR"/>
+          </a:p>
+        </p:txBody>
+      </p:sp>
+      <p:sp>
+        <p:nvSpPr>
+          <p:cNvPr id="4" name="Slide Number Placeholder 3">
+            <a:extLst>
+              <a:ext uri="{FF2B5EF4-FFF2-40B4-BE49-F238E27FC236}">
+                <a16:creationId xmlns:a16="http://schemas.microsoft.com/office/drawing/2014/main" id="{34228035-1159-18BF-C49E-814510CF7FFB}"/>
+              </a:ext>
+            </a:extLst>
+          </p:cNvPr>
+          <p:cNvSpPr txBox="1"/>
+          <p:nvPr/>
+        </p:nvSpPr>
+        <p:spPr>
+          <a:xfrm>
+            <a:off x="3884608" y="8685208"/>
+            <a:ext cx="2971800" cy="458791"/>
+          </a:xfrm>
+          <a:prstGeom prst="rect">
+            <a:avLst/>
+          </a:prstGeom>
+          <a:noFill/>
+          <a:ln cap="flat">
+            <a:noFill/>
+          </a:ln>
+        </p:spPr>
+        <p:txBody>
+          <a:bodyPr vert="horz" wrap="square" lIns="91440" tIns="45720" rIns="91440" bIns="45720" anchor="b" anchorCtr="0" compatLnSpc="1">
+            <a:noAutofit/>
+          </a:bodyPr>
+          <a:lstStyle/>
+          <a:p>
+            <a:pPr marL="0" marR="0" lvl="0" indent="0" algn="r" defTabSz="914400" rtl="0" fontAlgn="auto" hangingPunct="1">
+              <a:lnSpc>
+                <a:spcPct val="100000"/>
+              </a:lnSpc>
+              <a:spcBef>
+                <a:spcPts val="0"/>
+              </a:spcBef>
+              <a:spcAft>
+                <a:spcPts val="0"/>
+              </a:spcAft>
+              <a:buNone/>
+              <a:tabLst/>
+              <a:defRPr sz="1800" b="0" i="0" u="none" strike="noStrike" kern="0" cap="none" spc="0" baseline="0">
+                <a:solidFill>
+                  <a:srgbClr val="000000"/>
+                </a:solidFill>
+                <a:uFillTx/>
+              </a:defRPr>
+            </a:pPr>
+            <a:endParaRPr lang="fr-FR" sz="1200" b="0" i="0" u="none" strike="noStrike" kern="1200" cap="none" spc="0" baseline="0">
+              <a:solidFill>
+                <a:srgbClr val="000000"/>
+              </a:solidFill>
+              <a:uFillTx/>
+              <a:latin typeface="Aptos"/>
+            </a:endParaRPr>
           </a:p>
         </p:txBody>
       </p:sp>
@@ -785,7 +915,7 @@
           <p:cNvPr id="2" name="Slide Image Placeholder 1">
             <a:extLst>
               <a:ext uri="{FF2B5EF4-FFF2-40B4-BE49-F238E27FC236}">
-                <a16:creationId xmlns:a16="http://schemas.microsoft.com/office/drawing/2014/main" id="{6DBE6949-0591-BC9C-60AA-B26630070458}"/>
+                <a16:creationId xmlns:a16="http://schemas.microsoft.com/office/drawing/2014/main" id="{48BEA97D-0E38-DEDE-55EE-1ABBAD75C43B}"/>
               </a:ext>
             </a:extLst>
           </p:cNvPr>
@@ -803,7 +933,7 @@
           <p:cNvPr id="3" name="Notes Placeholder 2">
             <a:extLst>
               <a:ext uri="{FF2B5EF4-FFF2-40B4-BE49-F238E27FC236}">
-                <a16:creationId xmlns:a16="http://schemas.microsoft.com/office/drawing/2014/main" id="{0D9BA3C3-6B9E-B4A8-6C51-5F0925CE147F}"/>
+                <a16:creationId xmlns:a16="http://schemas.microsoft.com/office/drawing/2014/main" id="{4880F731-70BB-6F75-9A36-79339673F1E2}"/>
               </a:ext>
             </a:extLst>
           </p:cNvPr>
@@ -828,7 +958,7 @@
           <p:cNvPr id="4" name="Slide Number Placeholder 3">
             <a:extLst>
               <a:ext uri="{FF2B5EF4-FFF2-40B4-BE49-F238E27FC236}">
-                <a16:creationId xmlns:a16="http://schemas.microsoft.com/office/drawing/2014/main" id="{34228035-1159-18BF-C49E-814510CF7FFB}"/>
+                <a16:creationId xmlns:a16="http://schemas.microsoft.com/office/drawing/2014/main" id="{27610471-CAB9-44EE-7344-038B3423E978}"/>
               </a:ext>
             </a:extLst>
           </p:cNvPr>
@@ -913,7 +1043,7 @@
           <p:cNvPr id="2" name="Slide Image Placeholder 1">
             <a:extLst>
               <a:ext uri="{FF2B5EF4-FFF2-40B4-BE49-F238E27FC236}">
-                <a16:creationId xmlns:a16="http://schemas.microsoft.com/office/drawing/2014/main" id="{48BEA97D-0E38-DEDE-55EE-1ABBAD75C43B}"/>
+                <a16:creationId xmlns:a16="http://schemas.microsoft.com/office/drawing/2014/main" id="{4223E8C3-2CDE-3FC2-7063-9B89B5A4CFCE}"/>
               </a:ext>
             </a:extLst>
           </p:cNvPr>
@@ -931,7 +1061,7 @@
           <p:cNvPr id="3" name="Notes Placeholder 2">
             <a:extLst>
               <a:ext uri="{FF2B5EF4-FFF2-40B4-BE49-F238E27FC236}">
-                <a16:creationId xmlns:a16="http://schemas.microsoft.com/office/drawing/2014/main" id="{4880F731-70BB-6F75-9A36-79339673F1E2}"/>
+                <a16:creationId xmlns:a16="http://schemas.microsoft.com/office/drawing/2014/main" id="{6979E5A7-6464-7258-FB5A-CDDD01F3D2D9}"/>
               </a:ext>
             </a:extLst>
           </p:cNvPr>
@@ -956,7 +1086,7 @@
           <p:cNvPr id="4" name="Slide Number Placeholder 3">
             <a:extLst>
               <a:ext uri="{FF2B5EF4-FFF2-40B4-BE49-F238E27FC236}">
-                <a16:creationId xmlns:a16="http://schemas.microsoft.com/office/drawing/2014/main" id="{27610471-CAB9-44EE-7344-038B3423E978}"/>
+                <a16:creationId xmlns:a16="http://schemas.microsoft.com/office/drawing/2014/main" id="{FFADC267-DB2B-CD49-439E-BB9B4774B878}"/>
               </a:ext>
             </a:extLst>
           </p:cNvPr>
@@ -1038,13 +1168,7 @@
       </p:grpSpPr>
       <p:sp>
         <p:nvSpPr>
-          <p:cNvPr id="2" name="Slide Image Placeholder 1">
-            <a:extLst>
-              <a:ext uri="{FF2B5EF4-FFF2-40B4-BE49-F238E27FC236}">
-                <a16:creationId xmlns:a16="http://schemas.microsoft.com/office/drawing/2014/main" id="{4223E8C3-2CDE-3FC2-7063-9B89B5A4CFCE}"/>
-              </a:ext>
-            </a:extLst>
-          </p:cNvPr>
+          <p:cNvPr id="2" name="Slide Image Placeholder 1"/>
           <p:cNvSpPr>
             <a:spLocks noGrp="1" noRot="1" noChangeAspect="1"/>
           </p:cNvSpPr>
@@ -1056,18 +1180,12 @@
       </p:sp>
       <p:sp>
         <p:nvSpPr>
-          <p:cNvPr id="3" name="Notes Placeholder 2">
-            <a:extLst>
-              <a:ext uri="{FF2B5EF4-FFF2-40B4-BE49-F238E27FC236}">
-                <a16:creationId xmlns:a16="http://schemas.microsoft.com/office/drawing/2014/main" id="{6979E5A7-6464-7258-FB5A-CDDD01F3D2D9}"/>
-              </a:ext>
-            </a:extLst>
-          </p:cNvPr>
-          <p:cNvSpPr txBox="1">
+          <p:cNvPr id="3" name="Notes Placeholder 2"/>
+          <p:cNvSpPr>
             <a:spLocks noGrp="1"/>
           </p:cNvSpPr>
           <p:nvPr>
-            <p:ph type="body" sz="quarter" idx="1"/>
+            <p:ph type="body" idx="1"/>
           </p:nvPr>
         </p:nvSpPr>
         <p:spPr/>
@@ -1075,67 +1193,26 @@
           <a:bodyPr/>
           <a:lstStyle/>
           <a:p>
-            <a:endParaRPr lang="fr-FR"/>
-          </a:p>
-        </p:txBody>
-      </p:sp>
-      <p:sp>
-        <p:nvSpPr>
-          <p:cNvPr id="4" name="Slide Number Placeholder 3">
-            <a:extLst>
-              <a:ext uri="{FF2B5EF4-FFF2-40B4-BE49-F238E27FC236}">
-                <a16:creationId xmlns:a16="http://schemas.microsoft.com/office/drawing/2014/main" id="{FFADC267-DB2B-CD49-439E-BB9B4774B878}"/>
-              </a:ext>
-            </a:extLst>
-          </p:cNvPr>
-          <p:cNvSpPr txBox="1"/>
-          <p:nvPr/>
-        </p:nvSpPr>
-        <p:spPr>
-          <a:xfrm>
-            <a:off x="3884608" y="8685208"/>
-            <a:ext cx="2971800" cy="458791"/>
-          </a:xfrm>
-          <a:prstGeom prst="rect">
-            <a:avLst/>
-          </a:prstGeom>
-          <a:noFill/>
-          <a:ln cap="flat">
-            <a:noFill/>
-          </a:ln>
-        </p:spPr>
-        <p:txBody>
-          <a:bodyPr vert="horz" wrap="square" lIns="91440" tIns="45720" rIns="91440" bIns="45720" anchor="b" anchorCtr="0" compatLnSpc="1">
-            <a:noAutofit/>
-          </a:bodyPr>
-          <a:lstStyle/>
-          <a:p>
-            <a:pPr marL="0" marR="0" lvl="0" indent="0" algn="r" defTabSz="914400" rtl="0" fontAlgn="auto" hangingPunct="1">
-              <a:lnSpc>
-                <a:spcPct val="100000"/>
-              </a:lnSpc>
-              <a:spcBef>
-                <a:spcPts val="0"/>
-              </a:spcBef>
-              <a:spcAft>
-                <a:spcPts val="0"/>
-              </a:spcAft>
-              <a:buNone/>
-              <a:tabLst/>
-              <a:defRPr sz="1800" b="0" i="0" u="none" strike="noStrike" kern="0" cap="none" spc="0" baseline="0">
-                <a:solidFill>
-                  <a:srgbClr val="000000"/>
-                </a:solidFill>
-                <a:uFillTx/>
-              </a:defRPr>
-            </a:pPr>
-            <a:endParaRPr lang="fr-FR" sz="1200" b="0" i="0" u="none" strike="noStrike" kern="1200" cap="none" spc="0" baseline="0">
-              <a:solidFill>
-                <a:srgbClr val="000000"/>
-              </a:solidFill>
-              <a:uFillTx/>
-              <a:latin typeface="Aptos"/>
-            </a:endParaRPr>
+            <a:endParaRPr/>
+          </a:p>
+        </p:txBody>
+      </p:sp>
+      <p:sp>
+        <p:nvSpPr>
+          <p:cNvPr id="4" name="Slide Number Placeholder 3"/>
+          <p:cNvSpPr>
+            <a:spLocks noGrp="1"/>
+          </p:cNvSpPr>
+          <p:nvPr>
+            <p:ph type="sldNum" idx="5"/>
+          </p:nvPr>
+        </p:nvSpPr>
+        <p:spPr/>
+        <p:txBody>
+          <a:bodyPr/>
+          <a:lstStyle/>
+          <a:p>
+            <a:endParaRPr/>
           </a:p>
         </p:txBody>
       </p:sp>
@@ -1152,7 +1229,13 @@
   <p:cSld>
     <p:spTree>
       <p:nvGrpSpPr>
-        <p:cNvPr id="1" name=""/>
+        <p:cNvPr id="1" name="">
+          <a:extLst>
+            <a:ext uri="{FF2B5EF4-FFF2-40B4-BE49-F238E27FC236}">
+              <a16:creationId xmlns:a16="http://schemas.microsoft.com/office/drawing/2014/main" id="{EEC3C250-B3A9-42B8-31C5-34187B83B2E6}"/>
+            </a:ext>
+          </a:extLst>
+        </p:cNvPr>
         <p:cNvGrpSpPr/>
         <p:nvPr/>
       </p:nvGrpSpPr>
@@ -1166,7 +1249,13 @@
       </p:grpSpPr>
       <p:sp>
         <p:nvSpPr>
-          <p:cNvPr id="2" name="Slide Image Placeholder 1"/>
+          <p:cNvPr id="2" name="Slide Image Placeholder 1">
+            <a:extLst>
+              <a:ext uri="{FF2B5EF4-FFF2-40B4-BE49-F238E27FC236}">
+                <a16:creationId xmlns:a16="http://schemas.microsoft.com/office/drawing/2014/main" id="{CC460962-5E6B-154E-8CD6-4C000CF1944F}"/>
+              </a:ext>
+            </a:extLst>
+          </p:cNvPr>
           <p:cNvSpPr>
             <a:spLocks noGrp="1" noRot="1" noChangeAspect="1"/>
           </p:cNvSpPr>
@@ -1178,7 +1267,13 @@
       </p:sp>
       <p:sp>
         <p:nvSpPr>
-          <p:cNvPr id="3" name="Notes Placeholder 2"/>
+          <p:cNvPr id="3" name="Notes Placeholder 2">
+            <a:extLst>
+              <a:ext uri="{FF2B5EF4-FFF2-40B4-BE49-F238E27FC236}">
+                <a16:creationId xmlns:a16="http://schemas.microsoft.com/office/drawing/2014/main" id="{33F79935-550B-A58C-2573-7667C5244BE3}"/>
+              </a:ext>
+            </a:extLst>
+          </p:cNvPr>
           <p:cNvSpPr>
             <a:spLocks noGrp="1"/>
           </p:cNvSpPr>
@@ -1197,7 +1292,13 @@
       </p:sp>
       <p:sp>
         <p:nvSpPr>
-          <p:cNvPr id="4" name="Slide Number Placeholder 3"/>
+          <p:cNvPr id="4" name="Slide Number Placeholder 3">
+            <a:extLst>
+              <a:ext uri="{FF2B5EF4-FFF2-40B4-BE49-F238E27FC236}">
+                <a16:creationId xmlns:a16="http://schemas.microsoft.com/office/drawing/2014/main" id="{C3748E50-DD69-C42E-8142-92407C038E7B}"/>
+              </a:ext>
+            </a:extLst>
+          </p:cNvPr>
           <p:cNvSpPr>
             <a:spLocks noGrp="1"/>
           </p:cNvSpPr>
@@ -1215,6 +1316,11 @@
         </p:txBody>
       </p:sp>
     </p:spTree>
+    <p:extLst>
+      <p:ext uri="{BB962C8B-B14F-4D97-AF65-F5344CB8AC3E}">
+        <p14:creationId xmlns:p14="http://schemas.microsoft.com/office/powerpoint/2010/main" val="1300567022"/>
+      </p:ext>
+    </p:extLst>
   </p:cSld>
   <p:clrMapOvr>
     <a:masterClrMapping/>
@@ -2498,6 +2604,1237 @@
           <p:cNvPr id="6" name="Rectangle : coins arrondis 5">
             <a:extLst>
               <a:ext uri="{FF2B5EF4-FFF2-40B4-BE49-F238E27FC236}">
+                <a16:creationId xmlns:a16="http://schemas.microsoft.com/office/drawing/2014/main" id="{8632CCF5-8DD9-45C1-B944-8E9FB7AF9785}"/>
+              </a:ext>
+            </a:extLst>
+          </p:cNvPr>
+          <p:cNvSpPr>
+            <a:spLocks noGrp="1"/>
+          </p:cNvSpPr>
+          <p:nvPr/>
+        </p:nvSpPr>
+        <p:spPr>
+          <a:xfrm>
+            <a:off x="571500" y="361950"/>
+            <a:ext cx="1619250" cy="285750"/>
+          </a:xfrm>
+          <a:prstGeom prst="roundRect">
+            <a:avLst>
+              <a:gd name="adj" fmla="val 50000"/>
+            </a:avLst>
+          </a:prstGeom>
+          <a:solidFill>
+            <a:srgbClr val="16803C"/>
+          </a:solidFill>
+          <a:ln w="0">
+            <a:solidFill>
+              <a:srgbClr val="16803C"/>
+            </a:solidFill>
+            <a:prstDash val="solid"/>
+          </a:ln>
+        </p:spPr>
+        <p:txBody>
+          <a:bodyPr/>
+          <a:lstStyle/>
+          <a:p>
+            <a:endParaRPr lang="fr-FR"/>
+          </a:p>
+        </p:txBody>
+      </p:sp>
+      <p:sp>
+        <p:nvSpPr>
+          <p:cNvPr id="2" name="Rectangle 1">
+            <a:extLst>
+              <a:ext uri="{FF2B5EF4-FFF2-40B4-BE49-F238E27FC236}">
+                <a16:creationId xmlns:a16="http://schemas.microsoft.com/office/drawing/2014/main" id="{45596445-8715-4F87-BAA7-753D327F4124}"/>
+              </a:ext>
+            </a:extLst>
+          </p:cNvPr>
+          <p:cNvSpPr>
+            <a:spLocks noGrp="1"/>
+          </p:cNvSpPr>
+          <p:nvPr/>
+        </p:nvSpPr>
+        <p:spPr>
+          <a:xfrm>
+            <a:off x="571500" y="361950"/>
+            <a:ext cx="1619250" cy="285750"/>
+          </a:xfrm>
+          <a:prstGeom prst="rect">
+            <a:avLst/>
+          </a:prstGeom>
+          <a:noFill/>
+          <a:ln w="0">
+            <a:noFill/>
+            <a:prstDash val="solid"/>
+          </a:ln>
+        </p:spPr>
+        <p:txBody>
+          <a:bodyPr wrap="square" lIns="76200" tIns="76200" rIns="76200" bIns="76200" anchor="ctr">
+            <a:normAutofit fontScale="90833" lnSpcReduction="20000"/>
+          </a:bodyPr>
+          <a:lstStyle/>
+          <a:p>
+            <a:pPr algn="ctr">
+              <a:defRPr sz="1050" b="1">
+                <a:solidFill>
+                  <a:srgbClr val="FFFFFF"/>
+                </a:solidFill>
+              </a:defRPr>
+            </a:pPr>
+            <a:r>
+              <a:rPr sz="1050" b="1">
+                <a:solidFill>
+                  <a:srgbClr val="FFFFFF"/>
+                </a:solidFill>
+              </a:rPr>
+              <a:t>REFERENCE</a:t>
+            </a:r>
+          </a:p>
+        </p:txBody>
+      </p:sp>
+      <p:sp>
+        <p:nvSpPr>
+          <p:cNvPr id="3" name="Rectangle 2">
+            <a:extLst>
+              <a:ext uri="{FF2B5EF4-FFF2-40B4-BE49-F238E27FC236}">
+                <a16:creationId xmlns:a16="http://schemas.microsoft.com/office/drawing/2014/main" id="{B49B2C93-F1A3-4330-93DD-98A1F4870E1C}"/>
+              </a:ext>
+            </a:extLst>
+          </p:cNvPr>
+          <p:cNvSpPr>
+            <a:spLocks noGrp="1"/>
+          </p:cNvSpPr>
+          <p:nvPr/>
+        </p:nvSpPr>
+        <p:spPr>
+          <a:xfrm>
+            <a:off x="571500" y="762000"/>
+            <a:ext cx="11049000" cy="476250"/>
+          </a:xfrm>
+          <a:prstGeom prst="rect">
+            <a:avLst/>
+          </a:prstGeom>
+          <a:noFill/>
+          <a:ln w="0">
+            <a:noFill/>
+            <a:prstDash val="solid"/>
+          </a:ln>
+        </p:spPr>
+        <p:txBody>
+          <a:bodyPr wrap="square" lIns="0" tIns="0" rIns="0" bIns="0" anchor="t">
+            <a:normAutofit/>
+          </a:bodyPr>
+          <a:lstStyle/>
+          <a:p>
+            <a:pPr algn="l">
+              <a:defRPr sz="3000" b="1">
+                <a:solidFill>
+                  <a:srgbClr val="0F172A"/>
+                </a:solidFill>
+              </a:defRPr>
+            </a:pPr>
+            <a:r>
+              <a:rPr sz="3000" b="1">
+                <a:solidFill>
+                  <a:srgbClr val="0F172A"/>
+                </a:solidFill>
+              </a:rPr>
+              <a:t>DNV_path controls the right side and location controls the left side</a:t>
+            </a:r>
+          </a:p>
+        </p:txBody>
+      </p:sp>
+      <p:sp>
+        <p:nvSpPr>
+          <p:cNvPr id="4" name="Rectangle 3">
+            <a:extLst>
+              <a:ext uri="{FF2B5EF4-FFF2-40B4-BE49-F238E27FC236}">
+                <a16:creationId xmlns:a16="http://schemas.microsoft.com/office/drawing/2014/main" id="{B67EAF97-FA5C-47B0-87FC-DCB7A037B1D4}"/>
+              </a:ext>
+            </a:extLst>
+          </p:cNvPr>
+          <p:cNvSpPr>
+            <a:spLocks noGrp="1"/>
+          </p:cNvSpPr>
+          <p:nvPr/>
+        </p:nvSpPr>
+        <p:spPr>
+          <a:xfrm>
+            <a:off x="571500" y="1235964"/>
+            <a:ext cx="11049000" cy="323850"/>
+          </a:xfrm>
+          <a:prstGeom prst="rect">
+            <a:avLst/>
+          </a:prstGeom>
+          <a:noFill/>
+          <a:ln w="0">
+            <a:noFill/>
+            <a:prstDash val="solid"/>
+          </a:ln>
+        </p:spPr>
+        <p:txBody>
+          <a:bodyPr wrap="square" lIns="0" tIns="0" rIns="0" bIns="0" anchor="t">
+            <a:normAutofit/>
+          </a:bodyPr>
+          <a:lstStyle/>
+          <a:p>
+            <a:pPr algn="l">
+              <a:defRPr sz="1350" b="0">
+                <a:solidFill>
+                  <a:srgbClr val="475569"/>
+                </a:solidFill>
+              </a:defRPr>
+            </a:pPr>
+            <a:r>
+              <a:rPr sz="1350" b="0" dirty="0">
+                <a:solidFill>
+                  <a:srgbClr val="475569"/>
+                </a:solidFill>
+              </a:rPr>
+              <a:t>These two fields connect one JSON object to both parts of the page.</a:t>
+            </a:r>
+          </a:p>
+        </p:txBody>
+      </p:sp>
+      <p:sp>
+        <p:nvSpPr>
+          <p:cNvPr id="5" name="Rectangle : coins arrondis 4">
+            <a:extLst>
+              <a:ext uri="{FF2B5EF4-FFF2-40B4-BE49-F238E27FC236}">
+                <a16:creationId xmlns:a16="http://schemas.microsoft.com/office/drawing/2014/main" id="{EA819926-948A-4865-8E6F-6DFBAD5E4688}"/>
+              </a:ext>
+            </a:extLst>
+          </p:cNvPr>
+          <p:cNvSpPr>
+            <a:spLocks noGrp="1"/>
+          </p:cNvSpPr>
+          <p:nvPr/>
+        </p:nvSpPr>
+        <p:spPr>
+          <a:xfrm>
+            <a:off x="571500" y="1973580"/>
+            <a:ext cx="7239000" cy="3733800"/>
+          </a:xfrm>
+          <a:prstGeom prst="roundRect">
+            <a:avLst>
+              <a:gd name="adj" fmla="val 4082"/>
+            </a:avLst>
+          </a:prstGeom>
+          <a:solidFill>
+            <a:srgbClr val="FFFFFF"/>
+          </a:solidFill>
+          <a:ln w="9525">
+            <a:solidFill>
+              <a:srgbClr val="E2E8F0"/>
+            </a:solidFill>
+            <a:prstDash val="solid"/>
+          </a:ln>
+        </p:spPr>
+        <p:style>
+          <a:lnRef idx="0">
+            <a:scrgbClr r="0" g="0" b="0"/>
+          </a:lnRef>
+          <a:fillRef idx="0">
+            <a:scrgbClr r="0" g="0" b="0"/>
+          </a:fillRef>
+          <a:effectRef idx="4">
+            <a:scrgbClr r="0" g="0" b="0"/>
+          </a:effectRef>
+          <a:fontRef idx="major"/>
+        </p:style>
+        <p:txBody>
+          <a:bodyPr/>
+          <a:lstStyle/>
+          <a:p>
+            <a:endParaRPr lang="fr-FR"/>
+          </a:p>
+        </p:txBody>
+      </p:sp>
+      <p:pic>
+        <p:nvPicPr>
+          <p:cNvPr id="30" name="Image 29"/>
+          <p:cNvPicPr>
+            <a:picLocks noChangeAspect="1"/>
+          </p:cNvPicPr>
+          <p:nvPr/>
+        </p:nvPicPr>
+        <p:blipFill>
+          <a:blip r:embed="rId3"/>
+          <a:srcRect t="6292" b="6292"/>
+          <a:stretch>
+            <a:fillRect/>
+          </a:stretch>
+        </p:blipFill>
+        <p:spPr>
+          <a:xfrm>
+            <a:off x="742950" y="2145030"/>
+            <a:ext cx="6896100" cy="3390900"/>
+          </a:xfrm>
+          <a:prstGeom prst="roundRect">
+            <a:avLst>
+              <a:gd name="adj" fmla="val 4494"/>
+            </a:avLst>
+          </a:prstGeom>
+        </p:spPr>
+      </p:pic>
+      <p:sp>
+        <p:nvSpPr>
+          <p:cNvPr id="7" name="Rectangle : coins arrondis 6">
+            <a:extLst>
+              <a:ext uri="{FF2B5EF4-FFF2-40B4-BE49-F238E27FC236}">
+                <a16:creationId xmlns:a16="http://schemas.microsoft.com/office/drawing/2014/main" id="{97F68AD6-2AAE-4526-BDB9-7FB6824AB04A}"/>
+              </a:ext>
+            </a:extLst>
+          </p:cNvPr>
+          <p:cNvSpPr>
+            <a:spLocks noGrp="1"/>
+          </p:cNvSpPr>
+          <p:nvPr/>
+        </p:nvSpPr>
+        <p:spPr>
+          <a:xfrm>
+            <a:off x="8096250" y="1790700"/>
+            <a:ext cx="3429000" cy="895350"/>
+          </a:xfrm>
+          <a:prstGeom prst="roundRect">
+            <a:avLst>
+              <a:gd name="adj" fmla="val 17021"/>
+            </a:avLst>
+          </a:prstGeom>
+          <a:solidFill>
+            <a:srgbClr val="FFFFFF"/>
+          </a:solidFill>
+          <a:ln w="9525">
+            <a:solidFill>
+              <a:srgbClr val="E2E8F0"/>
+            </a:solidFill>
+            <a:prstDash val="solid"/>
+          </a:ln>
+        </p:spPr>
+        <p:style>
+          <a:lnRef idx="0">
+            <a:scrgbClr r="0" g="0" b="0"/>
+          </a:lnRef>
+          <a:fillRef idx="0">
+            <a:scrgbClr r="0" g="0" b="0"/>
+          </a:fillRef>
+          <a:effectRef idx="4">
+            <a:scrgbClr r="0" g="0" b="0"/>
+          </a:effectRef>
+          <a:fontRef idx="major"/>
+        </p:style>
+        <p:txBody>
+          <a:bodyPr/>
+          <a:lstStyle/>
+          <a:p>
+            <a:endParaRPr lang="fr-FR"/>
+          </a:p>
+        </p:txBody>
+      </p:sp>
+      <p:sp>
+        <p:nvSpPr>
+          <p:cNvPr id="8" name="Rectangle : coins arrondis 7">
+            <a:extLst>
+              <a:ext uri="{FF2B5EF4-FFF2-40B4-BE49-F238E27FC236}">
+                <a16:creationId xmlns:a16="http://schemas.microsoft.com/office/drawing/2014/main" id="{0E21E4F4-12E6-47C4-98DC-CEB6BEB7D4BF}"/>
+              </a:ext>
+            </a:extLst>
+          </p:cNvPr>
+          <p:cNvSpPr>
+            <a:spLocks noGrp="1"/>
+          </p:cNvSpPr>
+          <p:nvPr/>
+        </p:nvSpPr>
+        <p:spPr>
+          <a:xfrm>
+            <a:off x="8248650" y="1943100"/>
+            <a:ext cx="1162050" cy="247650"/>
+          </a:xfrm>
+          <a:prstGeom prst="roundRect">
+            <a:avLst>
+              <a:gd name="adj" fmla="val 50000"/>
+            </a:avLst>
+          </a:prstGeom>
+          <a:solidFill>
+            <a:srgbClr val="2553D6"/>
+          </a:solidFill>
+          <a:ln w="0">
+            <a:solidFill>
+              <a:srgbClr val="2553D6"/>
+            </a:solidFill>
+            <a:prstDash val="solid"/>
+          </a:ln>
+        </p:spPr>
+        <p:txBody>
+          <a:bodyPr/>
+          <a:lstStyle/>
+          <a:p>
+            <a:endParaRPr lang="fr-FR"/>
+          </a:p>
+        </p:txBody>
+      </p:sp>
+      <p:sp>
+        <p:nvSpPr>
+          <p:cNvPr id="9" name="Rectangle 8">
+            <a:extLst>
+              <a:ext uri="{FF2B5EF4-FFF2-40B4-BE49-F238E27FC236}">
+                <a16:creationId xmlns:a16="http://schemas.microsoft.com/office/drawing/2014/main" id="{7FE76EDB-78DB-4BA2-894B-A21024DCBF12}"/>
+              </a:ext>
+            </a:extLst>
+          </p:cNvPr>
+          <p:cNvSpPr>
+            <a:spLocks noGrp="1"/>
+          </p:cNvSpPr>
+          <p:nvPr/>
+        </p:nvSpPr>
+        <p:spPr>
+          <a:xfrm>
+            <a:off x="8248650" y="1943100"/>
+            <a:ext cx="1162050" cy="247650"/>
+          </a:xfrm>
+          <a:prstGeom prst="rect">
+            <a:avLst/>
+          </a:prstGeom>
+          <a:noFill/>
+          <a:ln w="0">
+            <a:noFill/>
+            <a:prstDash val="solid"/>
+          </a:ln>
+        </p:spPr>
+        <p:txBody>
+          <a:bodyPr wrap="square" lIns="76200" tIns="76200" rIns="76200" bIns="76200" anchor="ctr">
+            <a:noAutofit/>
+          </a:bodyPr>
+          <a:lstStyle/>
+          <a:p>
+            <a:pPr algn="ctr">
+              <a:defRPr sz="1050" b="1">
+                <a:solidFill>
+                  <a:srgbClr val="FFFFFF"/>
+                </a:solidFill>
+              </a:defRPr>
+            </a:pPr>
+            <a:r>
+              <a:rPr sz="1000" b="1" dirty="0">
+                <a:solidFill>
+                  <a:srgbClr val="FFFFFF"/>
+                </a:solidFill>
+              </a:rPr>
+              <a:t>location</a:t>
+            </a:r>
+          </a:p>
+        </p:txBody>
+      </p:sp>
+      <p:sp>
+        <p:nvSpPr>
+          <p:cNvPr id="10" name="Rectangle 9">
+            <a:extLst>
+              <a:ext uri="{FF2B5EF4-FFF2-40B4-BE49-F238E27FC236}">
+                <a16:creationId xmlns:a16="http://schemas.microsoft.com/office/drawing/2014/main" id="{4EBCBCCD-C76D-4EEF-86BE-DFC1AC4331E3}"/>
+              </a:ext>
+            </a:extLst>
+          </p:cNvPr>
+          <p:cNvSpPr>
+            <a:spLocks noGrp="1"/>
+          </p:cNvSpPr>
+          <p:nvPr/>
+        </p:nvSpPr>
+        <p:spPr>
+          <a:xfrm>
+            <a:off x="8248650" y="2305050"/>
+            <a:ext cx="3124200" cy="247650"/>
+          </a:xfrm>
+          <a:prstGeom prst="rect">
+            <a:avLst/>
+          </a:prstGeom>
+          <a:noFill/>
+          <a:ln w="0">
+            <a:noFill/>
+            <a:prstDash val="solid"/>
+          </a:ln>
+        </p:spPr>
+        <p:txBody>
+          <a:bodyPr wrap="square" lIns="0" tIns="0" rIns="0" bIns="0" anchor="t">
+            <a:normAutofit fontScale="83734" lnSpcReduction="20000"/>
+          </a:bodyPr>
+          <a:lstStyle/>
+          <a:p>
+            <a:pPr algn="l">
+              <a:defRPr sz="1200" b="0">
+                <a:solidFill>
+                  <a:srgbClr val="334155"/>
+                </a:solidFill>
+              </a:defRPr>
+            </a:pPr>
+            <a:r>
+              <a:rPr sz="1200" b="0">
+                <a:solidFill>
+                  <a:srgbClr val="334155"/>
+                </a:solidFill>
+              </a:rPr>
+              <a:t>Groups the entry in the left accordion. Example: hull, engine, crane, wind.</a:t>
+            </a:r>
+          </a:p>
+        </p:txBody>
+      </p:sp>
+      <p:sp>
+        <p:nvSpPr>
+          <p:cNvPr id="11" name="Rectangle : coins arrondis 10">
+            <a:extLst>
+              <a:ext uri="{FF2B5EF4-FFF2-40B4-BE49-F238E27FC236}">
+                <a16:creationId xmlns:a16="http://schemas.microsoft.com/office/drawing/2014/main" id="{E96E2973-D54E-428A-8F3F-237384BD90C9}"/>
+              </a:ext>
+            </a:extLst>
+          </p:cNvPr>
+          <p:cNvSpPr>
+            <a:spLocks noGrp="1"/>
+          </p:cNvSpPr>
+          <p:nvPr/>
+        </p:nvSpPr>
+        <p:spPr>
+          <a:xfrm>
+            <a:off x="8096250" y="2857500"/>
+            <a:ext cx="3429000" cy="895350"/>
+          </a:xfrm>
+          <a:prstGeom prst="roundRect">
+            <a:avLst>
+              <a:gd name="adj" fmla="val 17021"/>
+            </a:avLst>
+          </a:prstGeom>
+          <a:solidFill>
+            <a:srgbClr val="FFFFFF"/>
+          </a:solidFill>
+          <a:ln w="9525">
+            <a:solidFill>
+              <a:srgbClr val="E2E8F0"/>
+            </a:solidFill>
+            <a:prstDash val="solid"/>
+          </a:ln>
+        </p:spPr>
+        <p:style>
+          <a:lnRef idx="0">
+            <a:scrgbClr r="0" g="0" b="0"/>
+          </a:lnRef>
+          <a:fillRef idx="0">
+            <a:scrgbClr r="0" g="0" b="0"/>
+          </a:fillRef>
+          <a:effectRef idx="4">
+            <a:scrgbClr r="0" g="0" b="0"/>
+          </a:effectRef>
+          <a:fontRef idx="major"/>
+        </p:style>
+        <p:txBody>
+          <a:bodyPr/>
+          <a:lstStyle/>
+          <a:p>
+            <a:endParaRPr lang="fr-FR"/>
+          </a:p>
+        </p:txBody>
+      </p:sp>
+      <p:sp>
+        <p:nvSpPr>
+          <p:cNvPr id="12" name="Rectangle : coins arrondis 11">
+            <a:extLst>
+              <a:ext uri="{FF2B5EF4-FFF2-40B4-BE49-F238E27FC236}">
+                <a16:creationId xmlns:a16="http://schemas.microsoft.com/office/drawing/2014/main" id="{AFC47360-E945-4433-99B0-6F953EF34E30}"/>
+              </a:ext>
+            </a:extLst>
+          </p:cNvPr>
+          <p:cNvSpPr>
+            <a:spLocks noGrp="1"/>
+          </p:cNvSpPr>
+          <p:nvPr/>
+        </p:nvSpPr>
+        <p:spPr>
+          <a:xfrm>
+            <a:off x="8248650" y="3009900"/>
+            <a:ext cx="1162050" cy="247650"/>
+          </a:xfrm>
+          <a:prstGeom prst="roundRect">
+            <a:avLst>
+              <a:gd name="adj" fmla="val 50000"/>
+            </a:avLst>
+          </a:prstGeom>
+          <a:solidFill>
+            <a:srgbClr val="16803C"/>
+          </a:solidFill>
+          <a:ln w="0">
+            <a:solidFill>
+              <a:srgbClr val="16803C"/>
+            </a:solidFill>
+            <a:prstDash val="solid"/>
+          </a:ln>
+        </p:spPr>
+        <p:txBody>
+          <a:bodyPr/>
+          <a:lstStyle/>
+          <a:p>
+            <a:endParaRPr lang="fr-FR"/>
+          </a:p>
+        </p:txBody>
+      </p:sp>
+      <p:sp>
+        <p:nvSpPr>
+          <p:cNvPr id="13" name="Rectangle 12">
+            <a:extLst>
+              <a:ext uri="{FF2B5EF4-FFF2-40B4-BE49-F238E27FC236}">
+                <a16:creationId xmlns:a16="http://schemas.microsoft.com/office/drawing/2014/main" id="{22FC4ED7-8786-415D-91A6-09E5C235F7A2}"/>
+              </a:ext>
+            </a:extLst>
+          </p:cNvPr>
+          <p:cNvSpPr>
+            <a:spLocks noGrp="1"/>
+          </p:cNvSpPr>
+          <p:nvPr/>
+        </p:nvSpPr>
+        <p:spPr>
+          <a:xfrm>
+            <a:off x="8248650" y="3009900"/>
+            <a:ext cx="1162050" cy="247650"/>
+          </a:xfrm>
+          <a:prstGeom prst="rect">
+            <a:avLst/>
+          </a:prstGeom>
+          <a:noFill/>
+          <a:ln w="0">
+            <a:noFill/>
+            <a:prstDash val="solid"/>
+          </a:ln>
+        </p:spPr>
+        <p:txBody>
+          <a:bodyPr wrap="square" lIns="76200" tIns="76200" rIns="76200" bIns="76200" anchor="ctr">
+            <a:noAutofit/>
+          </a:bodyPr>
+          <a:lstStyle/>
+          <a:p>
+            <a:pPr algn="ctr">
+              <a:defRPr sz="1050" b="1">
+                <a:solidFill>
+                  <a:srgbClr val="FFFFFF"/>
+                </a:solidFill>
+              </a:defRPr>
+            </a:pPr>
+            <a:r>
+              <a:rPr sz="1000" b="1" dirty="0" err="1">
+                <a:solidFill>
+                  <a:srgbClr val="FFFFFF"/>
+                </a:solidFill>
+              </a:rPr>
+              <a:t>DNV_path</a:t>
+            </a:r>
+            <a:endParaRPr sz="1000" b="1" dirty="0">
+              <a:solidFill>
+                <a:srgbClr val="FFFFFF"/>
+              </a:solidFill>
+            </a:endParaRPr>
+          </a:p>
+        </p:txBody>
+      </p:sp>
+      <p:sp>
+        <p:nvSpPr>
+          <p:cNvPr id="14" name="Rectangle 13">
+            <a:extLst>
+              <a:ext uri="{FF2B5EF4-FFF2-40B4-BE49-F238E27FC236}">
+                <a16:creationId xmlns:a16="http://schemas.microsoft.com/office/drawing/2014/main" id="{87C1F6F8-CDAF-46E6-92BE-933D43972144}"/>
+              </a:ext>
+            </a:extLst>
+          </p:cNvPr>
+          <p:cNvSpPr>
+            <a:spLocks noGrp="1"/>
+          </p:cNvSpPr>
+          <p:nvPr/>
+        </p:nvSpPr>
+        <p:spPr>
+          <a:xfrm>
+            <a:off x="8248650" y="3371850"/>
+            <a:ext cx="3124200" cy="247650"/>
+          </a:xfrm>
+          <a:prstGeom prst="rect">
+            <a:avLst/>
+          </a:prstGeom>
+          <a:noFill/>
+          <a:ln w="0">
+            <a:noFill/>
+            <a:prstDash val="solid"/>
+          </a:ln>
+        </p:spPr>
+        <p:txBody>
+          <a:bodyPr wrap="square" lIns="0" tIns="0" rIns="0" bIns="0" anchor="t">
+            <a:normAutofit fontScale="95216"/>
+          </a:bodyPr>
+          <a:lstStyle/>
+          <a:p>
+            <a:pPr algn="l">
+              <a:defRPr sz="1200" b="0">
+                <a:solidFill>
+                  <a:srgbClr val="334155"/>
+                </a:solidFill>
+              </a:defRPr>
+            </a:pPr>
+            <a:r>
+              <a:rPr sz="1200" b="0">
+                <a:solidFill>
+                  <a:srgbClr val="334155"/>
+                </a:solidFill>
+              </a:rPr>
+              <a:t>Places the same entry on the right if the path is valid.</a:t>
+            </a:r>
+          </a:p>
+        </p:txBody>
+      </p:sp>
+      <p:sp>
+        <p:nvSpPr>
+          <p:cNvPr id="15" name="Rectangle : coins arrondis 14">
+            <a:extLst>
+              <a:ext uri="{FF2B5EF4-FFF2-40B4-BE49-F238E27FC236}">
+                <a16:creationId xmlns:a16="http://schemas.microsoft.com/office/drawing/2014/main" id="{C14AA3B5-5657-46B5-AC8A-E16B4DB67649}"/>
+              </a:ext>
+            </a:extLst>
+          </p:cNvPr>
+          <p:cNvSpPr>
+            <a:spLocks noGrp="1"/>
+          </p:cNvSpPr>
+          <p:nvPr/>
+        </p:nvSpPr>
+        <p:spPr>
+          <a:xfrm>
+            <a:off x="8096250" y="3924300"/>
+            <a:ext cx="3429000" cy="895350"/>
+          </a:xfrm>
+          <a:prstGeom prst="roundRect">
+            <a:avLst>
+              <a:gd name="adj" fmla="val 17021"/>
+            </a:avLst>
+          </a:prstGeom>
+          <a:solidFill>
+            <a:srgbClr val="FFFFFF"/>
+          </a:solidFill>
+          <a:ln w="9525">
+            <a:solidFill>
+              <a:srgbClr val="E2E8F0"/>
+            </a:solidFill>
+            <a:prstDash val="solid"/>
+          </a:ln>
+        </p:spPr>
+        <p:style>
+          <a:lnRef idx="0">
+            <a:scrgbClr r="0" g="0" b="0"/>
+          </a:lnRef>
+          <a:fillRef idx="0">
+            <a:scrgbClr r="0" g="0" b="0"/>
+          </a:fillRef>
+          <a:effectRef idx="4">
+            <a:scrgbClr r="0" g="0" b="0"/>
+          </a:effectRef>
+          <a:fontRef idx="major"/>
+        </p:style>
+        <p:txBody>
+          <a:bodyPr/>
+          <a:lstStyle/>
+          <a:p>
+            <a:endParaRPr lang="fr-FR"/>
+          </a:p>
+        </p:txBody>
+      </p:sp>
+      <p:sp>
+        <p:nvSpPr>
+          <p:cNvPr id="16" name="Rectangle : coins arrondis 15">
+            <a:extLst>
+              <a:ext uri="{FF2B5EF4-FFF2-40B4-BE49-F238E27FC236}">
+                <a16:creationId xmlns:a16="http://schemas.microsoft.com/office/drawing/2014/main" id="{E2DC61A9-1E1D-447B-88D0-C6011616ECCC}"/>
+              </a:ext>
+            </a:extLst>
+          </p:cNvPr>
+          <p:cNvSpPr>
+            <a:spLocks noGrp="1"/>
+          </p:cNvSpPr>
+          <p:nvPr/>
+        </p:nvSpPr>
+        <p:spPr>
+          <a:xfrm>
+            <a:off x="8248650" y="4076700"/>
+            <a:ext cx="1162050" cy="247650"/>
+          </a:xfrm>
+          <a:prstGeom prst="roundRect">
+            <a:avLst>
+              <a:gd name="adj" fmla="val 50000"/>
+            </a:avLst>
+          </a:prstGeom>
+          <a:solidFill>
+            <a:srgbClr val="0F766E"/>
+          </a:solidFill>
+          <a:ln w="0">
+            <a:solidFill>
+              <a:srgbClr val="0F766E"/>
+            </a:solidFill>
+            <a:prstDash val="solid"/>
+          </a:ln>
+        </p:spPr>
+        <p:txBody>
+          <a:bodyPr/>
+          <a:lstStyle/>
+          <a:p>
+            <a:endParaRPr lang="fr-FR"/>
+          </a:p>
+        </p:txBody>
+      </p:sp>
+      <p:sp>
+        <p:nvSpPr>
+          <p:cNvPr id="17" name="Rectangle 16">
+            <a:extLst>
+              <a:ext uri="{FF2B5EF4-FFF2-40B4-BE49-F238E27FC236}">
+                <a16:creationId xmlns:a16="http://schemas.microsoft.com/office/drawing/2014/main" id="{5F165BF1-D566-4079-BDAC-43DA080AB27E}"/>
+              </a:ext>
+            </a:extLst>
+          </p:cNvPr>
+          <p:cNvSpPr>
+            <a:spLocks noGrp="1"/>
+          </p:cNvSpPr>
+          <p:nvPr/>
+        </p:nvSpPr>
+        <p:spPr>
+          <a:xfrm>
+            <a:off x="8248650" y="4076700"/>
+            <a:ext cx="1162050" cy="247650"/>
+          </a:xfrm>
+          <a:prstGeom prst="rect">
+            <a:avLst/>
+          </a:prstGeom>
+          <a:noFill/>
+          <a:ln w="0">
+            <a:noFill/>
+            <a:prstDash val="solid"/>
+          </a:ln>
+        </p:spPr>
+        <p:txBody>
+          <a:bodyPr wrap="square" lIns="76200" tIns="76200" rIns="76200" bIns="76200" anchor="ctr">
+            <a:noAutofit/>
+          </a:bodyPr>
+          <a:lstStyle/>
+          <a:p>
+            <a:pPr algn="ctr">
+              <a:defRPr sz="1050" b="1">
+                <a:solidFill>
+                  <a:srgbClr val="FFFFFF"/>
+                </a:solidFill>
+              </a:defRPr>
+            </a:pPr>
+            <a:r>
+              <a:rPr sz="1000" b="1" dirty="0">
+                <a:solidFill>
+                  <a:srgbClr val="FFFFFF"/>
+                </a:solidFill>
+              </a:rPr>
+              <a:t>Green tag</a:t>
+            </a:r>
+          </a:p>
+        </p:txBody>
+      </p:sp>
+      <p:sp>
+        <p:nvSpPr>
+          <p:cNvPr id="18" name="Rectangle 17">
+            <a:extLst>
+              <a:ext uri="{FF2B5EF4-FFF2-40B4-BE49-F238E27FC236}">
+                <a16:creationId xmlns:a16="http://schemas.microsoft.com/office/drawing/2014/main" id="{C2DA188F-C095-4062-8E05-A1B5452A0091}"/>
+              </a:ext>
+            </a:extLst>
+          </p:cNvPr>
+          <p:cNvSpPr>
+            <a:spLocks noGrp="1"/>
+          </p:cNvSpPr>
+          <p:nvPr/>
+        </p:nvSpPr>
+        <p:spPr>
+          <a:xfrm>
+            <a:off x="8248650" y="4438650"/>
+            <a:ext cx="3124200" cy="247650"/>
+          </a:xfrm>
+          <a:prstGeom prst="rect">
+            <a:avLst/>
+          </a:prstGeom>
+          <a:noFill/>
+          <a:ln w="0">
+            <a:noFill/>
+            <a:prstDash val="solid"/>
+          </a:ln>
+        </p:spPr>
+        <p:txBody>
+          <a:bodyPr wrap="square" lIns="0" tIns="0" rIns="0" bIns="0" anchor="t">
+            <a:normAutofit fontScale="81897" lnSpcReduction="10000"/>
+          </a:bodyPr>
+          <a:lstStyle/>
+          <a:p>
+            <a:pPr algn="l">
+              <a:defRPr sz="1200" b="0">
+                <a:solidFill>
+                  <a:srgbClr val="334155"/>
+                </a:solidFill>
+              </a:defRPr>
+            </a:pPr>
+            <a:r>
+              <a:rPr sz="1200" b="0">
+                <a:solidFill>
+                  <a:srgbClr val="334155"/>
+                </a:solidFill>
+              </a:rPr>
+              <a:t>Shows the mapped value and keeps the source clickable.</a:t>
+            </a:r>
+          </a:p>
+        </p:txBody>
+      </p:sp>
+      <p:sp>
+        <p:nvSpPr>
+          <p:cNvPr id="19" name="Rectangle : coins arrondis 18">
+            <a:extLst>
+              <a:ext uri="{FF2B5EF4-FFF2-40B4-BE49-F238E27FC236}">
+                <a16:creationId xmlns:a16="http://schemas.microsoft.com/office/drawing/2014/main" id="{CD093144-676C-4EE4-A7D5-C0E64958D416}"/>
+              </a:ext>
+            </a:extLst>
+          </p:cNvPr>
+          <p:cNvSpPr>
+            <a:spLocks noGrp="1"/>
+          </p:cNvSpPr>
+          <p:nvPr/>
+        </p:nvSpPr>
+        <p:spPr>
+          <a:xfrm>
+            <a:off x="8096250" y="4991100"/>
+            <a:ext cx="3429000" cy="895350"/>
+          </a:xfrm>
+          <a:prstGeom prst="roundRect">
+            <a:avLst>
+              <a:gd name="adj" fmla="val 17021"/>
+            </a:avLst>
+          </a:prstGeom>
+          <a:solidFill>
+            <a:srgbClr val="FFFFFF"/>
+          </a:solidFill>
+          <a:ln w="9525">
+            <a:solidFill>
+              <a:srgbClr val="E2E8F0"/>
+            </a:solidFill>
+            <a:prstDash val="solid"/>
+          </a:ln>
+        </p:spPr>
+        <p:style>
+          <a:lnRef idx="0">
+            <a:scrgbClr r="0" g="0" b="0"/>
+          </a:lnRef>
+          <a:fillRef idx="0">
+            <a:scrgbClr r="0" g="0" b="0"/>
+          </a:fillRef>
+          <a:effectRef idx="4">
+            <a:scrgbClr r="0" g="0" b="0"/>
+          </a:effectRef>
+          <a:fontRef idx="major"/>
+        </p:style>
+        <p:txBody>
+          <a:bodyPr/>
+          <a:lstStyle/>
+          <a:p>
+            <a:endParaRPr lang="fr-FR"/>
+          </a:p>
+        </p:txBody>
+      </p:sp>
+      <p:sp>
+        <p:nvSpPr>
+          <p:cNvPr id="20" name="Rectangle : coins arrondis 19">
+            <a:extLst>
+              <a:ext uri="{FF2B5EF4-FFF2-40B4-BE49-F238E27FC236}">
+                <a16:creationId xmlns:a16="http://schemas.microsoft.com/office/drawing/2014/main" id="{8668711C-3D66-4D32-8181-97BA72184FFA}"/>
+              </a:ext>
+            </a:extLst>
+          </p:cNvPr>
+          <p:cNvSpPr>
+            <a:spLocks noGrp="1"/>
+          </p:cNvSpPr>
+          <p:nvPr/>
+        </p:nvSpPr>
+        <p:spPr>
+          <a:xfrm>
+            <a:off x="8248650" y="5143500"/>
+            <a:ext cx="1162050" cy="247650"/>
+          </a:xfrm>
+          <a:prstGeom prst="roundRect">
+            <a:avLst>
+              <a:gd name="adj" fmla="val 50000"/>
+            </a:avLst>
+          </a:prstGeom>
+          <a:solidFill>
+            <a:srgbClr val="D97706"/>
+          </a:solidFill>
+          <a:ln w="0">
+            <a:solidFill>
+              <a:srgbClr val="D97706"/>
+            </a:solidFill>
+            <a:prstDash val="solid"/>
+          </a:ln>
+        </p:spPr>
+        <p:txBody>
+          <a:bodyPr/>
+          <a:lstStyle/>
+          <a:p>
+            <a:endParaRPr lang="fr-FR"/>
+          </a:p>
+        </p:txBody>
+      </p:sp>
+      <p:sp>
+        <p:nvSpPr>
+          <p:cNvPr id="21" name="Rectangle 20">
+            <a:extLst>
+              <a:ext uri="{FF2B5EF4-FFF2-40B4-BE49-F238E27FC236}">
+                <a16:creationId xmlns:a16="http://schemas.microsoft.com/office/drawing/2014/main" id="{D2BD0899-5269-4BCD-8D32-1A719A8CC67A}"/>
+              </a:ext>
+            </a:extLst>
+          </p:cNvPr>
+          <p:cNvSpPr>
+            <a:spLocks noGrp="1"/>
+          </p:cNvSpPr>
+          <p:nvPr/>
+        </p:nvSpPr>
+        <p:spPr>
+          <a:xfrm>
+            <a:off x="8248650" y="5143500"/>
+            <a:ext cx="1162050" cy="247650"/>
+          </a:xfrm>
+          <a:prstGeom prst="rect">
+            <a:avLst/>
+          </a:prstGeom>
+          <a:noFill/>
+          <a:ln w="0">
+            <a:noFill/>
+            <a:prstDash val="solid"/>
+          </a:ln>
+        </p:spPr>
+        <p:txBody>
+          <a:bodyPr wrap="square" lIns="76200" tIns="76200" rIns="76200" bIns="76200" anchor="ctr">
+            <a:noAutofit/>
+          </a:bodyPr>
+          <a:lstStyle/>
+          <a:p>
+            <a:pPr algn="ctr">
+              <a:defRPr sz="1050" b="1">
+                <a:solidFill>
+                  <a:srgbClr val="FFFFFF"/>
+                </a:solidFill>
+              </a:defRPr>
+            </a:pPr>
+            <a:r>
+              <a:rPr sz="1000" b="1" dirty="0">
+                <a:solidFill>
+                  <a:srgbClr val="FFFFFF"/>
+                </a:solidFill>
+              </a:rPr>
+              <a:t>Show in DNV</a:t>
+            </a:r>
+          </a:p>
+        </p:txBody>
+      </p:sp>
+      <p:sp>
+        <p:nvSpPr>
+          <p:cNvPr id="22" name="Rectangle 21">
+            <a:extLst>
+              <a:ext uri="{FF2B5EF4-FFF2-40B4-BE49-F238E27FC236}">
+                <a16:creationId xmlns:a16="http://schemas.microsoft.com/office/drawing/2014/main" id="{FD5E09B8-D770-464D-ADED-A068C0093D7D}"/>
+              </a:ext>
+            </a:extLst>
+          </p:cNvPr>
+          <p:cNvSpPr>
+            <a:spLocks noGrp="1"/>
+          </p:cNvSpPr>
+          <p:nvPr/>
+        </p:nvSpPr>
+        <p:spPr>
+          <a:xfrm>
+            <a:off x="8248650" y="5505450"/>
+            <a:ext cx="3124200" cy="247650"/>
+          </a:xfrm>
+          <a:prstGeom prst="rect">
+            <a:avLst/>
+          </a:prstGeom>
+          <a:noFill/>
+          <a:ln w="0">
+            <a:noFill/>
+            <a:prstDash val="solid"/>
+          </a:ln>
+        </p:spPr>
+        <p:txBody>
+          <a:bodyPr wrap="square" lIns="0" tIns="0" rIns="0" bIns="0" anchor="t">
+            <a:normAutofit fontScale="81122" lnSpcReduction="20000"/>
+          </a:bodyPr>
+          <a:lstStyle/>
+          <a:p>
+            <a:pPr algn="l">
+              <a:defRPr sz="1200" b="0">
+                <a:solidFill>
+                  <a:srgbClr val="334155"/>
+                </a:solidFill>
+              </a:defRPr>
+            </a:pPr>
+            <a:r>
+              <a:rPr sz="1200" b="0">
+                <a:solidFill>
+                  <a:srgbClr val="334155"/>
+                </a:solidFill>
+              </a:rPr>
+              <a:t>Scrolls the user to the correct mapped node from the left side.</a:t>
+            </a:r>
+          </a:p>
+        </p:txBody>
+      </p:sp>
+      <p:sp>
+        <p:nvSpPr>
+          <p:cNvPr id="23" name="Rectangle 22">
+            <a:extLst>
+              <a:ext uri="{FF2B5EF4-FFF2-40B4-BE49-F238E27FC236}">
+                <a16:creationId xmlns:a16="http://schemas.microsoft.com/office/drawing/2014/main" id="{11C2A300-0428-49F0-975D-71FB989F8603}"/>
+              </a:ext>
+            </a:extLst>
+          </p:cNvPr>
+          <p:cNvSpPr>
+            <a:spLocks noGrp="1"/>
+          </p:cNvSpPr>
+          <p:nvPr/>
+        </p:nvSpPr>
+        <p:spPr>
+          <a:xfrm>
+            <a:off x="571500" y="6534150"/>
+            <a:ext cx="3048000" cy="190500"/>
+          </a:xfrm>
+          <a:prstGeom prst="rect">
+            <a:avLst/>
+          </a:prstGeom>
+          <a:noFill/>
+          <a:ln w="0">
+            <a:noFill/>
+            <a:prstDash val="solid"/>
+          </a:ln>
+        </p:spPr>
+        <p:txBody>
+          <a:bodyPr wrap="square" lIns="0" tIns="0" rIns="0" bIns="0" anchor="t">
+            <a:normAutofit/>
+          </a:bodyPr>
+          <a:lstStyle/>
+          <a:p>
+            <a:pPr algn="l">
+              <a:defRPr sz="825" b="0">
+                <a:solidFill>
+                  <a:srgbClr val="64748B"/>
+                </a:solidFill>
+              </a:defRPr>
+            </a:pPr>
+            <a:r>
+              <a:rPr sz="825" b="0">
+                <a:solidFill>
+                  <a:srgbClr val="64748B"/>
+                </a:solidFill>
+              </a:rPr>
+              <a:t>Data Hub guide - new vessel workflow</a:t>
+            </a:r>
+          </a:p>
+        </p:txBody>
+      </p:sp>
+      <p:sp>
+        <p:nvSpPr>
+          <p:cNvPr id="24" name="Rectangle 23">
+            <a:extLst>
+              <a:ext uri="{FF2B5EF4-FFF2-40B4-BE49-F238E27FC236}">
+                <a16:creationId xmlns:a16="http://schemas.microsoft.com/office/drawing/2014/main" id="{DB659BFC-BABA-42A4-ACF0-05A0112D3DBC}"/>
+              </a:ext>
+            </a:extLst>
+          </p:cNvPr>
+          <p:cNvSpPr>
+            <a:spLocks noGrp="1"/>
+          </p:cNvSpPr>
+          <p:nvPr/>
+        </p:nvSpPr>
+        <p:spPr>
+          <a:xfrm>
+            <a:off x="11144250" y="6496050"/>
+            <a:ext cx="381000" cy="228600"/>
+          </a:xfrm>
+          <a:prstGeom prst="rect">
+            <a:avLst/>
+          </a:prstGeom>
+          <a:noFill/>
+          <a:ln w="0">
+            <a:noFill/>
+            <a:prstDash val="solid"/>
+          </a:ln>
+        </p:spPr>
+        <p:txBody>
+          <a:bodyPr wrap="square" lIns="0" tIns="0" rIns="0" bIns="0" anchor="t">
+            <a:normAutofit/>
+          </a:bodyPr>
+          <a:lstStyle/>
+          <a:p>
+            <a:pPr algn="r">
+              <a:defRPr sz="900" b="1">
+                <a:solidFill>
+                  <a:srgbClr val="64748B"/>
+                </a:solidFill>
+              </a:defRPr>
+            </a:pPr>
+            <a:r>
+              <a:rPr lang="fr-FR" sz="900" b="1" dirty="0">
+                <a:solidFill>
+                  <a:srgbClr val="64748B"/>
+                </a:solidFill>
+              </a:rPr>
+              <a:t>9</a:t>
+            </a:r>
+            <a:endParaRPr sz="900" b="1" dirty="0">
+              <a:solidFill>
+                <a:srgbClr val="64748B"/>
+              </a:solidFill>
+            </a:endParaRPr>
+          </a:p>
+        </p:txBody>
+      </p:sp>
+    </p:spTree>
+    <p:extLst>
+      <p:ext uri="{BB962C8B-B14F-4D97-AF65-F5344CB8AC3E}">
+        <p14:creationId xmlns:p14="http://schemas.microsoft.com/office/powerpoint/2010/main" val="429278651"/>
+      </p:ext>
+    </p:extLst>
+  </p:cSld>
+  <p:clrMapOvr>
+    <a:masterClrMapping/>
+  </p:clrMapOvr>
+</p:sld>
+</file>
+
+<file path=ppt/slides/slide11.xml><?xml version="1.0" encoding="utf-8"?>
+<p:sld xmlns:a="http://schemas.openxmlformats.org/drawingml/2006/main" xmlns:r="http://schemas.openxmlformats.org/officeDocument/2006/relationships" xmlns:p="http://schemas.openxmlformats.org/presentationml/2006/main">
+  <p:cSld>
+    <p:bg>
+      <p:bgPr>
+        <a:solidFill>
+          <a:srgbClr val="F4F8FB"/>
+        </a:solidFill>
+        <a:effectLst/>
+      </p:bgPr>
+    </p:bg>
+    <p:spTree>
+      <p:nvGrpSpPr>
+        <p:cNvPr id="1" name=""/>
+        <p:cNvGrpSpPr/>
+        <p:nvPr/>
+      </p:nvGrpSpPr>
+      <p:grpSpPr>
+        <a:xfrm>
+          <a:off x="0" y="0"/>
+          <a:ext cx="0" cy="0"/>
+          <a:chOff x="0" y="0"/>
+          <a:chExt cx="0" cy="0"/>
+        </a:xfrm>
+      </p:grpSpPr>
+      <p:sp>
+        <p:nvSpPr>
+          <p:cNvPr id="6" name="Rectangle : coins arrondis 5">
+            <a:extLst>
+              <a:ext uri="{FF2B5EF4-FFF2-40B4-BE49-F238E27FC236}">
                 <a16:creationId xmlns:a16="http://schemas.microsoft.com/office/drawing/2014/main" id="{4759DB67-BE25-472F-9758-E1330E6754B2}"/>
               </a:ext>
             </a:extLst>
@@ -6485,7 +7822,7 @@
               <a:t>-</a:t>
             </a:r>
             <a:r>
-              <a:rPr sz="1575" b="0" dirty="0">
+              <a:rPr lang="fr-FR" sz="1575" b="0" dirty="0" err="1">
                 <a:solidFill>
                   <a:srgbClr val="E2E8F0"/>
                 </a:solidFill>
@@ -6493,33 +7830,41 @@
                 <a:ea typeface="Consolas"/>
                 <a:cs typeface="Consolas"/>
               </a:rPr>
-              <a:t>RINA Sig. Ships/</a:t>
-            </a:r>
-          </a:p>
-          <a:p>
-            <a:pPr algn="l">
-              <a:defRPr sz="1575" b="0">
+              <a:t>Example_projects</a:t>
+            </a:r>
+            <a:r>
+              <a:rPr sz="1575" b="0" dirty="0">
                 <a:solidFill>
                   <a:srgbClr val="E2E8F0"/>
                 </a:solidFill>
                 <a:latin typeface="Consolas"/>
                 <a:ea typeface="Consolas"/>
                 <a:cs typeface="Consolas"/>
-              </a:defRPr>
-            </a:pPr>
-            <a:r>
-              <a:rPr sz="1575" b="0" dirty="0">
+              </a:rPr>
+              <a:t>/</a:t>
+            </a:r>
+            <a:endParaRPr lang="fr-FR" sz="1575" dirty="0">
+              <a:solidFill>
+                <a:srgbClr val="E2E8F0"/>
+              </a:solidFill>
+              <a:latin typeface="Consolas"/>
+              <a:ea typeface="Consolas"/>
+              <a:cs typeface="Consolas"/>
+            </a:endParaRPr>
+          </a:p>
+          <a:p>
+            <a:pPr algn="l">
+              <a:defRPr sz="1575" b="0">
                 <a:solidFill>
                   <a:srgbClr val="E2E8F0"/>
                 </a:solidFill>
                 <a:latin typeface="Consolas"/>
                 <a:ea typeface="Consolas"/>
                 <a:cs typeface="Consolas"/>
-              </a:rPr>
-              <a:t>    </a:t>
-            </a:r>
-            <a:r>
-              <a:rPr lang="fr-FR" sz="1575" b="0" dirty="0">
+              </a:defRPr>
+            </a:pPr>
+            <a:r>
+              <a:rPr sz="1575" b="0" dirty="0">
                 <a:solidFill>
                   <a:srgbClr val="E2E8F0"/>
                 </a:solidFill>
@@ -6527,10 +7872,10 @@
                 <a:ea typeface="Consolas"/>
                 <a:cs typeface="Consolas"/>
               </a:rPr>
-              <a:t>-</a:t>
-            </a:r>
-            <a:r>
-              <a:rPr sz="1575" b="0" dirty="0">
+              <a:t>      </a:t>
+            </a:r>
+            <a:r>
+              <a:rPr lang="fr-FR" sz="1575" b="0" dirty="0">
                 <a:solidFill>
                   <a:srgbClr val="E2E8F0"/>
                 </a:solidFill>
@@ -6538,20 +7883,19 @@
                 <a:ea typeface="Consolas"/>
                 <a:cs typeface="Consolas"/>
               </a:rPr>
-              <a:t>Vol.2018/</a:t>
-            </a:r>
-          </a:p>
-          <a:p>
-            <a:pPr algn="l">
-              <a:defRPr sz="1575" b="0">
+              <a:t>-</a:t>
+            </a:r>
+            <a:r>
+              <a:rPr lang="fr-FR" sz="1575" dirty="0" err="1">
                 <a:solidFill>
                   <a:srgbClr val="E2E8F0"/>
                 </a:solidFill>
                 <a:latin typeface="Consolas"/>
                 <a:ea typeface="Consolas"/>
                 <a:cs typeface="Consolas"/>
-              </a:defRPr>
-            </a:pPr>
+              </a:rPr>
+              <a:t>Vessel_name</a:t>
+            </a:r>
             <a:r>
               <a:rPr sz="1575" b="0" dirty="0">
                 <a:solidFill>
@@ -6561,19 +7905,20 @@
                 <a:ea typeface="Consolas"/>
                 <a:cs typeface="Consolas"/>
               </a:rPr>
-              <a:t>      </a:t>
-            </a:r>
-            <a:r>
-              <a:rPr lang="fr-FR" sz="1575" b="0" dirty="0">
+              <a:t>/</a:t>
+            </a:r>
+          </a:p>
+          <a:p>
+            <a:pPr algn="l">
+              <a:defRPr sz="1575" b="0">
                 <a:solidFill>
                   <a:srgbClr val="E2E8F0"/>
                 </a:solidFill>
                 <a:latin typeface="Consolas"/>
                 <a:ea typeface="Consolas"/>
                 <a:cs typeface="Consolas"/>
-              </a:rPr>
-              <a:t>-</a:t>
-            </a:r>
+              </a:defRPr>
+            </a:pPr>
             <a:r>
               <a:rPr sz="1575" b="0" dirty="0">
                 <a:solidFill>
@@ -6583,20 +7928,19 @@
                 <a:ea typeface="Consolas"/>
                 <a:cs typeface="Consolas"/>
               </a:rPr>
-              <a:t>ALMI ATLAS/</a:t>
-            </a:r>
-          </a:p>
-          <a:p>
-            <a:pPr algn="l">
-              <a:defRPr sz="1575" b="0">
+              <a:t>        </a:t>
+            </a:r>
+            <a:r>
+              <a:rPr lang="fr-FR" sz="1575" b="0" dirty="0">
                 <a:solidFill>
                   <a:srgbClr val="E2E8F0"/>
                 </a:solidFill>
                 <a:latin typeface="Consolas"/>
                 <a:ea typeface="Consolas"/>
                 <a:cs typeface="Consolas"/>
-              </a:defRPr>
-            </a:pPr>
+              </a:rPr>
+              <a:t>-</a:t>
+            </a:r>
             <a:r>
               <a:rPr sz="1575" b="0" dirty="0">
                 <a:solidFill>
@@ -6606,19 +7950,20 @@
                 <a:ea typeface="Consolas"/>
                 <a:cs typeface="Consolas"/>
               </a:rPr>
-              <a:t>        </a:t>
-            </a:r>
-            <a:r>
-              <a:rPr lang="fr-FR" sz="1575" b="0" dirty="0">
+              <a:t>JSON/</a:t>
+            </a:r>
+          </a:p>
+          <a:p>
+            <a:pPr algn="l">
+              <a:defRPr sz="1575" b="0">
                 <a:solidFill>
                   <a:srgbClr val="E2E8F0"/>
                 </a:solidFill>
                 <a:latin typeface="Consolas"/>
                 <a:ea typeface="Consolas"/>
                 <a:cs typeface="Consolas"/>
-              </a:rPr>
-              <a:t>-</a:t>
-            </a:r>
+              </a:defRPr>
+            </a:pPr>
             <a:r>
               <a:rPr sz="1575" b="0" dirty="0">
                 <a:solidFill>
@@ -6628,22 +7973,21 @@
                 <a:ea typeface="Consolas"/>
                 <a:cs typeface="Consolas"/>
               </a:rPr>
-              <a:t>JSON/</a:t>
-            </a:r>
-          </a:p>
-          <a:p>
-            <a:pPr algn="l">
-              <a:defRPr sz="1575" b="0">
+              <a:t>          </a:t>
+            </a:r>
+            <a:r>
+              <a:rPr lang="fr-FR" sz="1575" b="0" dirty="0">
                 <a:solidFill>
                   <a:srgbClr val="E2E8F0"/>
                 </a:solidFill>
                 <a:latin typeface="Consolas"/>
                 <a:ea typeface="Consolas"/>
                 <a:cs typeface="Consolas"/>
-              </a:defRPr>
-            </a:pPr>
-            <a:r>
-              <a:rPr sz="1575" b="0" dirty="0">
+              </a:rPr>
+              <a:t>  </a:t>
+            </a:r>
+            <a:r>
+              <a:rPr lang="fr-FR" sz="1575" dirty="0">
                 <a:solidFill>
                   <a:srgbClr val="E2E8F0"/>
                 </a:solidFill>
@@ -6651,10 +7995,10 @@
                 <a:ea typeface="Consolas"/>
                 <a:cs typeface="Consolas"/>
               </a:rPr>
-              <a:t>          </a:t>
-            </a:r>
-            <a:r>
-              <a:rPr lang="fr-FR" sz="1575" dirty="0">
+              <a:t>&gt;</a:t>
+            </a:r>
+            <a:r>
+              <a:rPr lang="fr-FR" sz="1575" b="0" dirty="0">
                 <a:solidFill>
                   <a:srgbClr val="E2E8F0"/>
                 </a:solidFill>
@@ -6662,10 +8006,10 @@
                 <a:ea typeface="Consolas"/>
                 <a:cs typeface="Consolas"/>
               </a:rPr>
-              <a:t>&gt;</a:t>
-            </a:r>
-            <a:r>
-              <a:rPr sz="1575" b="0" dirty="0" err="1">
+              <a:t>Example</a:t>
+            </a:r>
+            <a:r>
+              <a:rPr sz="1575" b="0" dirty="0">
                 <a:solidFill>
                   <a:srgbClr val="E2E8F0"/>
                 </a:solidFill>
@@ -6673,7 +8017,18 @@
                 <a:ea typeface="Consolas"/>
                 <a:cs typeface="Consolas"/>
               </a:rPr>
-              <a:t>ALMI_ATLAS.json</a:t>
+              <a:t>.</a:t>
+            </a:r>
+            <a:r>
+              <a:rPr sz="1575" b="0" dirty="0" err="1">
+                <a:solidFill>
+                  <a:srgbClr val="E2E8F0"/>
+                </a:solidFill>
+                <a:latin typeface="Consolas"/>
+                <a:ea typeface="Consolas"/>
+                <a:cs typeface="Consolas"/>
+              </a:rPr>
+              <a:t>json</a:t>
             </a:r>
             <a:endParaRPr sz="1575" b="0" dirty="0">
               <a:solidFill>
@@ -6704,7 +8059,7 @@
                 <a:ea typeface="Consolas"/>
                 <a:cs typeface="Consolas"/>
               </a:rPr>
-              <a:t>        </a:t>
+              <a:t>       </a:t>
             </a:r>
             <a:r>
               <a:rPr lang="fr-FR" sz="1575" b="0" dirty="0">
@@ -6715,7 +8070,7 @@
                 <a:ea typeface="Consolas"/>
                 <a:cs typeface="Consolas"/>
               </a:rPr>
-              <a:t>-</a:t>
+              <a:t> -</a:t>
             </a:r>
             <a:r>
               <a:rPr sz="1575" b="0" dirty="0" err="1">
@@ -6771,10 +8126,10 @@
                 <a:ea typeface="Consolas"/>
                 <a:cs typeface="Consolas"/>
               </a:rPr>
-              <a:t> &gt;</a:t>
-            </a:r>
-            <a:r>
-              <a:rPr sz="1575" b="0" dirty="0">
+              <a:t>   &gt;</a:t>
+            </a:r>
+            <a:r>
+              <a:rPr lang="fr-FR" sz="1575" b="0" dirty="0" err="1">
                 <a:solidFill>
                   <a:srgbClr val="E2E8F0"/>
                 </a:solidFill>
@@ -6782,33 +8137,33 @@
                 <a:ea typeface="Consolas"/>
                 <a:cs typeface="Consolas"/>
               </a:rPr>
-              <a:t>ALMI ATLAS.pdf</a:t>
-            </a:r>
-          </a:p>
-          <a:p>
-            <a:pPr algn="l">
-              <a:defRPr sz="1575" b="0">
+              <a:t>example</a:t>
+            </a:r>
+            <a:r>
+              <a:rPr sz="1575" b="0" dirty="0">
                 <a:solidFill>
                   <a:srgbClr val="E2E8F0"/>
                 </a:solidFill>
                 <a:latin typeface="Consolas"/>
                 <a:ea typeface="Consolas"/>
                 <a:cs typeface="Consolas"/>
-              </a:defRPr>
-            </a:pPr>
-            <a:r>
-              <a:rPr sz="1575" b="0" dirty="0">
+              </a:rPr>
+              <a:t>.pdf</a:t>
+            </a:r>
+          </a:p>
+          <a:p>
+            <a:pPr algn="l">
+              <a:defRPr sz="1575" b="0">
                 <a:solidFill>
                   <a:srgbClr val="E2E8F0"/>
                 </a:solidFill>
                 <a:latin typeface="Consolas"/>
                 <a:ea typeface="Consolas"/>
                 <a:cs typeface="Consolas"/>
-              </a:rPr>
-              <a:t>         </a:t>
-            </a:r>
-            <a:r>
-              <a:rPr lang="fr-FR" sz="1575" b="0" dirty="0">
+              </a:defRPr>
+            </a:pPr>
+            <a:r>
+              <a:rPr sz="1575" b="0" dirty="0">
                 <a:solidFill>
                   <a:srgbClr val="E2E8F0"/>
                 </a:solidFill>
@@ -6816,10 +8171,10 @@
                 <a:ea typeface="Consolas"/>
                 <a:cs typeface="Consolas"/>
               </a:rPr>
-              <a:t> &gt;</a:t>
-            </a:r>
-            <a:r>
-              <a:rPr sz="1575" b="0" dirty="0" err="1">
+              <a:t>         </a:t>
+            </a:r>
+            <a:r>
+              <a:rPr lang="fr-FR" sz="1575" b="0" dirty="0">
                 <a:solidFill>
                   <a:srgbClr val="E2E8F0"/>
                 </a:solidFill>
@@ -6827,7 +8182,51 @@
                 <a:ea typeface="Consolas"/>
                 <a:cs typeface="Consolas"/>
               </a:rPr>
-              <a:t>raw_GPS_data_ALMI_ATLAS.json</a:t>
+              <a:t>   &gt;</a:t>
+            </a:r>
+            <a:r>
+              <a:rPr sz="1575" b="0" dirty="0">
+                <a:solidFill>
+                  <a:srgbClr val="E2E8F0"/>
+                </a:solidFill>
+                <a:latin typeface="Consolas"/>
+                <a:ea typeface="Consolas"/>
+                <a:cs typeface="Consolas"/>
+              </a:rPr>
+              <a:t>raw_</a:t>
+            </a:r>
+            <a:r>
+              <a:rPr lang="fr-FR" sz="1575" b="0" dirty="0" err="1">
+                <a:solidFill>
+                  <a:srgbClr val="E2E8F0"/>
+                </a:solidFill>
+                <a:latin typeface="Consolas"/>
+                <a:ea typeface="Consolas"/>
+                <a:cs typeface="Consolas"/>
+              </a:rPr>
+              <a:t>json_example</a:t>
+            </a:r>
+            <a:r>
+              <a:rPr sz="1575" b="0" dirty="0">
+                <a:solidFill>
+                  <a:srgbClr val="E2E8F0"/>
+                </a:solidFill>
+                <a:latin typeface="Consolas"/>
+                <a:ea typeface="Consolas"/>
+                <a:cs typeface="Consolas"/>
+              </a:rPr>
+              <a:t>.</a:t>
+            </a:r>
+            <a:r>
+              <a:rPr sz="1575" b="0" dirty="0" err="1">
+                <a:solidFill>
+                  <a:srgbClr val="E2E8F0"/>
+                </a:solidFill>
+                <a:latin typeface="Consolas"/>
+                <a:ea typeface="Consolas"/>
+                <a:cs typeface="Consolas"/>
+              </a:rPr>
+              <a:t>json</a:t>
             </a:r>
             <a:endParaRPr sz="1575" b="0" dirty="0">
               <a:solidFill>
@@ -7886,7 +9285,7 @@
                   <a:srgbClr val="0F172A"/>
                 </a:solidFill>
               </a:rPr>
-              <a:t> – Rina_blocs.html</a:t>
+              <a:t> – /Blocs</a:t>
             </a:r>
             <a:endParaRPr sz="3000" b="1" dirty="0">
               <a:solidFill>
@@ -7938,13 +9337,58 @@
               </a:defRPr>
             </a:pPr>
             <a:r>
-              <a:rPr sz="1350" b="0">
+              <a:rPr sz="1350" b="0" dirty="0">
                 <a:solidFill>
                   <a:srgbClr val="475569"/>
                 </a:solidFill>
               </a:rPr>
               <a:t>This is where the project becomes visible on the home page.</a:t>
             </a:r>
+            <a:r>
+              <a:rPr lang="fr-FR" sz="1350" b="0" dirty="0">
+                <a:solidFill>
+                  <a:srgbClr val="475569"/>
+                </a:solidFill>
+              </a:rPr>
+              <a:t> </a:t>
+            </a:r>
+            <a:r>
+              <a:rPr lang="fr-FR" sz="1350" b="0" dirty="0" err="1">
+                <a:solidFill>
+                  <a:srgbClr val="475569"/>
+                </a:solidFill>
+              </a:rPr>
+              <a:t>Create</a:t>
+            </a:r>
+            <a:r>
+              <a:rPr lang="fr-FR" sz="1350" b="0" dirty="0">
+                <a:solidFill>
+                  <a:srgbClr val="475569"/>
+                </a:solidFill>
+              </a:rPr>
+              <a:t> a new file for the </a:t>
+            </a:r>
+            <a:r>
+              <a:rPr lang="fr-FR" sz="1350" b="0" dirty="0" err="1">
+                <a:solidFill>
+                  <a:srgbClr val="475569"/>
+                </a:solidFill>
+              </a:rPr>
+              <a:t>project</a:t>
+            </a:r>
+            <a:r>
+              <a:rPr lang="fr-FR" sz="1350" b="0" dirty="0">
+                <a:solidFill>
+                  <a:srgbClr val="475569"/>
+                </a:solidFill>
+              </a:rPr>
+              <a:t> (ex: Exemple_blocs.html)</a:t>
+            </a:r>
+            <a:endParaRPr sz="1350" b="0" dirty="0">
+              <a:solidFill>
+                <a:srgbClr val="475569"/>
+              </a:solidFill>
+            </a:endParaRPr>
           </a:p>
         </p:txBody>
       </p:sp>
@@ -8047,7 +9491,7 @@
               </a:defRPr>
             </a:pPr>
             <a:r>
-              <a:rPr sz="1200" b="0">
+              <a:rPr sz="1200" b="0" dirty="0">
                 <a:solidFill>
                   <a:srgbClr val="E2E8F0"/>
                 </a:solidFill>
@@ -8070,7 +9514,7 @@
               </a:defRPr>
             </a:pPr>
             <a:r>
-              <a:rPr sz="1200" b="0">
+              <a:rPr sz="1200" b="0" dirty="0">
                 <a:solidFill>
                   <a:srgbClr val="E2E8F0"/>
                 </a:solidFill>
@@ -8078,22 +9522,21 @@
                 <a:ea typeface="Consolas"/>
                 <a:cs typeface="Consolas"/>
               </a:rPr>
-              <a:t>  &lt;h2&gt;RINA&lt;/h2&gt;</a:t>
-            </a:r>
-          </a:p>
-          <a:p>
-            <a:pPr algn="l">
-              <a:defRPr sz="1200" b="0">
+              <a:t>  &lt;h2&gt;</a:t>
+            </a:r>
+            <a:r>
+              <a:rPr lang="fr-FR" sz="1200" b="0" dirty="0">
                 <a:solidFill>
                   <a:srgbClr val="E2E8F0"/>
                 </a:solidFill>
                 <a:latin typeface="Consolas"/>
                 <a:ea typeface="Consolas"/>
                 <a:cs typeface="Consolas"/>
-              </a:defRPr>
-            </a:pPr>
-            <a:r>
-              <a:rPr sz="1200" b="0">
+              </a:rPr>
+              <a:t>EXAMPLE</a:t>
+            </a:r>
+            <a:r>
+              <a:rPr sz="1200" b="0" dirty="0">
                 <a:solidFill>
                   <a:srgbClr val="E2E8F0"/>
                 </a:solidFill>
@@ -8101,7 +9544,7 @@
                 <a:ea typeface="Consolas"/>
                 <a:cs typeface="Consolas"/>
               </a:rPr>
-              <a:t>  &lt;p class="project-description"&gt;</a:t>
+              <a:t>&lt;/h2&gt;</a:t>
             </a:r>
           </a:p>
           <a:p>
@@ -8116,7 +9559,7 @@
               </a:defRPr>
             </a:pPr>
             <a:r>
-              <a:rPr sz="1200" b="0">
+              <a:rPr sz="1200" b="0" dirty="0">
                 <a:solidFill>
                   <a:srgbClr val="E2E8F0"/>
                 </a:solidFill>
@@ -8124,7 +9567,7 @@
                 <a:ea typeface="Consolas"/>
                 <a:cs typeface="Consolas"/>
               </a:rPr>
-              <a:t>    Short project description</a:t>
+              <a:t>  &lt;p class="project-description"&gt;</a:t>
             </a:r>
           </a:p>
           <a:p>
@@ -8139,7 +9582,7 @@
               </a:defRPr>
             </a:pPr>
             <a:r>
-              <a:rPr sz="1200" b="0">
+              <a:rPr sz="1200" b="0" dirty="0">
                 <a:solidFill>
                   <a:srgbClr val="E2E8F0"/>
                 </a:solidFill>
@@ -8147,11 +9590,34 @@
                 <a:ea typeface="Consolas"/>
                 <a:cs typeface="Consolas"/>
               </a:rPr>
+              <a:t>    Short project description</a:t>
+            </a:r>
+          </a:p>
+          <a:p>
+            <a:pPr algn="l">
+              <a:defRPr sz="1200" b="0">
+                <a:solidFill>
+                  <a:srgbClr val="E2E8F0"/>
+                </a:solidFill>
+                <a:latin typeface="Consolas"/>
+                <a:ea typeface="Consolas"/>
+                <a:cs typeface="Consolas"/>
+              </a:defRPr>
+            </a:pPr>
+            <a:r>
+              <a:rPr sz="1200" b="0" dirty="0">
+                <a:solidFill>
+                  <a:srgbClr val="E2E8F0"/>
+                </a:solidFill>
+                <a:latin typeface="Consolas"/>
+                <a:ea typeface="Consolas"/>
+                <a:cs typeface="Consolas"/>
+              </a:rPr>
               <a:t>  &lt;/p&gt;</a:t>
             </a:r>
           </a:p>
           <a:p>
-            <a:endParaRPr sz="1200" b="0">
+            <a:endParaRPr sz="1200" b="0" dirty="0">
               <a:solidFill>
                 <a:srgbClr val="E2E8F0"/>
               </a:solidFill>
@@ -8172,7 +9638,7 @@
               </a:defRPr>
             </a:pPr>
             <a:r>
-              <a:rPr sz="1200" b="0">
+              <a:rPr sz="1200" b="0" dirty="0">
                 <a:solidFill>
                   <a:srgbClr val="E2E8F0"/>
                 </a:solidFill>
@@ -8195,7 +9661,7 @@
               </a:defRPr>
             </a:pPr>
             <a:r>
-              <a:rPr sz="1200" b="0">
+              <a:rPr sz="1200" b="0" dirty="0">
                 <a:solidFill>
                   <a:srgbClr val="E2E8F0"/>
                 </a:solidFill>
@@ -8218,7 +9684,7 @@
               </a:defRPr>
             </a:pPr>
             <a:r>
-              <a:rPr sz="1200" b="0">
+              <a:rPr sz="1200" b="0" dirty="0">
                 <a:solidFill>
                   <a:srgbClr val="E2E8F0"/>
                 </a:solidFill>
@@ -8226,22 +9692,21 @@
                 <a:ea typeface="Consolas"/>
                 <a:cs typeface="Consolas"/>
               </a:rPr>
-              <a:t>      &lt;img src="Image/RINA/Image_Rina.png" alt="RINA image"&gt;</a:t>
-            </a:r>
-          </a:p>
-          <a:p>
-            <a:pPr algn="l">
-              <a:defRPr sz="1200" b="0">
+              <a:t>      &lt;</a:t>
+            </a:r>
+            <a:r>
+              <a:rPr sz="1200" b="0" dirty="0" err="1">
                 <a:solidFill>
                   <a:srgbClr val="E2E8F0"/>
                 </a:solidFill>
                 <a:latin typeface="Consolas"/>
                 <a:ea typeface="Consolas"/>
                 <a:cs typeface="Consolas"/>
-              </a:defRPr>
-            </a:pPr>
-            <a:r>
-              <a:rPr sz="1200" b="0">
+              </a:rPr>
+              <a:t>img</a:t>
+            </a:r>
+            <a:r>
+              <a:rPr sz="1200" b="0" dirty="0">
                 <a:solidFill>
                   <a:srgbClr val="E2E8F0"/>
                 </a:solidFill>
@@ -8249,11 +9714,122 @@
                 <a:ea typeface="Consolas"/>
                 <a:cs typeface="Consolas"/>
               </a:rPr>
+              <a:t> </a:t>
+            </a:r>
+            <a:r>
+              <a:rPr sz="1200" b="0" dirty="0" err="1">
+                <a:solidFill>
+                  <a:srgbClr val="E2E8F0"/>
+                </a:solidFill>
+                <a:latin typeface="Consolas"/>
+                <a:ea typeface="Consolas"/>
+                <a:cs typeface="Consolas"/>
+              </a:rPr>
+              <a:t>src</a:t>
+            </a:r>
+            <a:r>
+              <a:rPr sz="1200" b="0" dirty="0">
+                <a:solidFill>
+                  <a:srgbClr val="E2E8F0"/>
+                </a:solidFill>
+                <a:latin typeface="Consolas"/>
+                <a:ea typeface="Consolas"/>
+                <a:cs typeface="Consolas"/>
+              </a:rPr>
+              <a:t>="Image/</a:t>
+            </a:r>
+            <a:r>
+              <a:rPr lang="fr-FR" sz="1200" b="0" dirty="0">
+                <a:solidFill>
+                  <a:srgbClr val="E2E8F0"/>
+                </a:solidFill>
+                <a:latin typeface="Consolas"/>
+                <a:ea typeface="Consolas"/>
+                <a:cs typeface="Consolas"/>
+              </a:rPr>
+              <a:t>EXAMPLE</a:t>
+            </a:r>
+            <a:r>
+              <a:rPr sz="1200" b="0" dirty="0">
+                <a:solidFill>
+                  <a:srgbClr val="E2E8F0"/>
+                </a:solidFill>
+                <a:latin typeface="Consolas"/>
+                <a:ea typeface="Consolas"/>
+                <a:cs typeface="Consolas"/>
+              </a:rPr>
+              <a:t>/</a:t>
+            </a:r>
+            <a:r>
+              <a:rPr lang="fr-FR" sz="1200" b="0" dirty="0" err="1">
+                <a:solidFill>
+                  <a:srgbClr val="E2E8F0"/>
+                </a:solidFill>
+                <a:latin typeface="Consolas"/>
+                <a:ea typeface="Consolas"/>
+                <a:cs typeface="Consolas"/>
+              </a:rPr>
+              <a:t>example</a:t>
+            </a:r>
+            <a:r>
+              <a:rPr sz="1200" b="0" dirty="0">
+                <a:solidFill>
+                  <a:srgbClr val="E2E8F0"/>
+                </a:solidFill>
+                <a:latin typeface="Consolas"/>
+                <a:ea typeface="Consolas"/>
+                <a:cs typeface="Consolas"/>
+              </a:rPr>
+              <a:t>.png" alt="</a:t>
+            </a:r>
+            <a:r>
+              <a:rPr lang="fr-FR" sz="1200" b="0" dirty="0">
+                <a:solidFill>
+                  <a:srgbClr val="E2E8F0"/>
+                </a:solidFill>
+                <a:latin typeface="Consolas"/>
+                <a:ea typeface="Consolas"/>
+                <a:cs typeface="Consolas"/>
+              </a:rPr>
+              <a:t>EXAMPLE</a:t>
+            </a:r>
+            <a:r>
+              <a:rPr sz="1200" b="0" dirty="0">
+                <a:solidFill>
+                  <a:srgbClr val="E2E8F0"/>
+                </a:solidFill>
+                <a:latin typeface="Consolas"/>
+                <a:ea typeface="Consolas"/>
+                <a:cs typeface="Consolas"/>
+              </a:rPr>
+              <a:t> image"&gt;</a:t>
+            </a:r>
+          </a:p>
+          <a:p>
+            <a:pPr algn="l">
+              <a:defRPr sz="1200" b="0">
+                <a:solidFill>
+                  <a:srgbClr val="E2E8F0"/>
+                </a:solidFill>
+                <a:latin typeface="Consolas"/>
+                <a:ea typeface="Consolas"/>
+                <a:cs typeface="Consolas"/>
+              </a:defRPr>
+            </a:pPr>
+            <a:r>
+              <a:rPr sz="1200" b="0" dirty="0">
+                <a:solidFill>
+                  <a:srgbClr val="E2E8F0"/>
+                </a:solidFill>
+                <a:latin typeface="Consolas"/>
+                <a:ea typeface="Consolas"/>
+                <a:cs typeface="Consolas"/>
+              </a:rPr>
               <a:t>    &lt;/div&gt;</a:t>
             </a:r>
           </a:p>
           <a:p>
-            <a:endParaRPr sz="1200" b="0">
+            <a:endParaRPr sz="1200" b="0" dirty="0">
               <a:solidFill>
                 <a:srgbClr val="E2E8F0"/>
               </a:solidFill>
@@ -8274,7 +9850,7 @@
               </a:defRPr>
             </a:pPr>
             <a:r>
-              <a:rPr sz="1200" b="0">
+              <a:rPr sz="1200" b="0" dirty="0">
                 <a:solidFill>
                   <a:srgbClr val="E2E8F0"/>
                 </a:solidFill>
@@ -8297,7 +9873,7 @@
               </a:defRPr>
             </a:pPr>
             <a:r>
-              <a:rPr sz="1200" b="0">
+              <a:rPr sz="1200" b="0" dirty="0">
                 <a:solidFill>
                   <a:srgbClr val="E2E8F0"/>
                 </a:solidFill>
@@ -8320,7 +9896,7 @@
               </a:defRPr>
             </a:pPr>
             <a:r>
-              <a:rPr sz="1200" b="0">
+              <a:rPr sz="1200" b="0" dirty="0">
                 <a:solidFill>
                   <a:srgbClr val="E2E8F0"/>
                 </a:solidFill>
@@ -8328,45 +9904,52 @@
                 <a:ea typeface="Consolas"/>
                 <a:cs typeface="Consolas"/>
               </a:rPr>
-              <a:t>      &lt;div id="rina-vessel-links" class="vessel-link-list"&gt;&lt;/div&gt;</a:t>
-            </a:r>
-          </a:p>
-          <a:p>
-            <a:pPr algn="l">
-              <a:defRPr sz="1200" b="0">
+              <a:t>      &lt;div </a:t>
+            </a:r>
+            <a:r>
+              <a:rPr sz="1200" b="0" dirty="0">
                 <a:solidFill>
                   <a:srgbClr val="E2E8F0"/>
                 </a:solidFill>
+                <a:highlight>
+                  <a:srgbClr val="FF0000"/>
+                </a:highlight>
                 <a:latin typeface="Consolas"/>
                 <a:ea typeface="Consolas"/>
                 <a:cs typeface="Consolas"/>
-              </a:defRPr>
-            </a:pPr>
-            <a:r>
-              <a:rPr sz="1200" b="0">
+              </a:rPr>
+              <a:t>id="</a:t>
+            </a:r>
+            <a:r>
+              <a:rPr lang="fr-FR" sz="1200" b="0" dirty="0" err="1">
                 <a:solidFill>
                   <a:srgbClr val="E2E8F0"/>
                 </a:solidFill>
+                <a:highlight>
+                  <a:srgbClr val="FF0000"/>
+                </a:highlight>
                 <a:latin typeface="Consolas"/>
                 <a:ea typeface="Consolas"/>
                 <a:cs typeface="Consolas"/>
               </a:rPr>
-              <a:t>    &lt;/div&gt;</a:t>
-            </a:r>
-          </a:p>
-          <a:p>
-            <a:pPr algn="l">
-              <a:defRPr sz="1200" b="0">
+              <a:t>example</a:t>
+            </a:r>
+            <a:r>
+              <a:rPr sz="1200" b="0" dirty="0">
                 <a:solidFill>
                   <a:srgbClr val="E2E8F0"/>
                 </a:solidFill>
+                <a:highlight>
+                  <a:srgbClr val="FF0000"/>
+                </a:highlight>
                 <a:latin typeface="Consolas"/>
                 <a:ea typeface="Consolas"/>
                 <a:cs typeface="Consolas"/>
-              </a:defRPr>
-            </a:pPr>
-            <a:r>
-              <a:rPr sz="1200" b="0">
+              </a:rPr>
+              <a:t>-vessel-links" </a:t>
+            </a:r>
+            <a:r>
+              <a:rPr sz="1200" b="0" dirty="0">
                 <a:solidFill>
                   <a:srgbClr val="E2E8F0"/>
                 </a:solidFill>
@@ -8374,7 +9957,7 @@
                 <a:ea typeface="Consolas"/>
                 <a:cs typeface="Consolas"/>
               </a:rPr>
-              <a:t>  &lt;/div&gt;</a:t>
+              <a:t>class="vessel-link-list"&gt;&lt;/div&gt;</a:t>
             </a:r>
           </a:p>
           <a:p>
@@ -8389,7 +9972,53 @@
               </a:defRPr>
             </a:pPr>
             <a:r>
-              <a:rPr sz="1200" b="0">
+              <a:rPr sz="1200" b="0" dirty="0">
+                <a:solidFill>
+                  <a:srgbClr val="E2E8F0"/>
+                </a:solidFill>
+                <a:latin typeface="Consolas"/>
+                <a:ea typeface="Consolas"/>
+                <a:cs typeface="Consolas"/>
+              </a:rPr>
+              <a:t>    &lt;/div&gt;</a:t>
+            </a:r>
+          </a:p>
+          <a:p>
+            <a:pPr algn="l">
+              <a:defRPr sz="1200" b="0">
+                <a:solidFill>
+                  <a:srgbClr val="E2E8F0"/>
+                </a:solidFill>
+                <a:latin typeface="Consolas"/>
+                <a:ea typeface="Consolas"/>
+                <a:cs typeface="Consolas"/>
+              </a:defRPr>
+            </a:pPr>
+            <a:r>
+              <a:rPr sz="1200" b="0" dirty="0">
+                <a:solidFill>
+                  <a:srgbClr val="E2E8F0"/>
+                </a:solidFill>
+                <a:latin typeface="Consolas"/>
+                <a:ea typeface="Consolas"/>
+                <a:cs typeface="Consolas"/>
+              </a:rPr>
+              <a:t>  &lt;/div&gt;</a:t>
+            </a:r>
+          </a:p>
+          <a:p>
+            <a:pPr algn="l">
+              <a:defRPr sz="1200" b="0">
+                <a:solidFill>
+                  <a:srgbClr val="E2E8F0"/>
+                </a:solidFill>
+                <a:latin typeface="Consolas"/>
+                <a:ea typeface="Consolas"/>
+                <a:cs typeface="Consolas"/>
+              </a:defRPr>
+            </a:pPr>
+            <a:r>
+              <a:rPr sz="1200" b="0" dirty="0">
                 <a:solidFill>
                   <a:srgbClr val="E2E8F0"/>
                 </a:solidFill>
@@ -9210,1555 +10839,6 @@
 </file>
 
 <file path=ppt/slides/slide5.xml><?xml version="1.0" encoding="utf-8"?>
-<p:sld xmlns:a="http://schemas.openxmlformats.org/drawingml/2006/main" xmlns:r="http://schemas.openxmlformats.org/officeDocument/2006/relationships" xmlns:p="http://schemas.openxmlformats.org/presentationml/2006/main">
-  <p:cSld>
-    <p:bg>
-      <p:bgPr>
-        <a:solidFill>
-          <a:srgbClr val="F4F8FB"/>
-        </a:solidFill>
-        <a:effectLst/>
-      </p:bgPr>
-    </p:bg>
-    <p:spTree>
-      <p:nvGrpSpPr>
-        <p:cNvPr id="1" name=""/>
-        <p:cNvGrpSpPr/>
-        <p:nvPr/>
-      </p:nvGrpSpPr>
-      <p:grpSpPr>
-        <a:xfrm>
-          <a:off x="0" y="0"/>
-          <a:ext cx="0" cy="0"/>
-          <a:chOff x="0" y="0"/>
-          <a:chExt cx="0" cy="0"/>
-        </a:xfrm>
-      </p:grpSpPr>
-      <p:sp>
-        <p:nvSpPr>
-          <p:cNvPr id="33" name="Rectangle : coins arrondis 32">
-            <a:extLst>
-              <a:ext uri="{FF2B5EF4-FFF2-40B4-BE49-F238E27FC236}">
-                <a16:creationId xmlns:a16="http://schemas.microsoft.com/office/drawing/2014/main" id="{C282679E-D6E3-4F3C-8AD5-CC8D1FBA7A57}"/>
-              </a:ext>
-            </a:extLst>
-          </p:cNvPr>
-          <p:cNvSpPr>
-            <a:spLocks noGrp="1"/>
-          </p:cNvSpPr>
-          <p:nvPr/>
-        </p:nvSpPr>
-        <p:spPr>
-          <a:xfrm>
-            <a:off x="571500" y="425958"/>
-            <a:ext cx="1619250" cy="285750"/>
-          </a:xfrm>
-          <a:prstGeom prst="roundRect">
-            <a:avLst>
-              <a:gd name="adj" fmla="val 50000"/>
-            </a:avLst>
-          </a:prstGeom>
-          <a:solidFill>
-            <a:srgbClr val="2553D6"/>
-          </a:solidFill>
-          <a:ln w="0">
-            <a:solidFill>
-              <a:srgbClr val="2553D6"/>
-            </a:solidFill>
-            <a:prstDash val="solid"/>
-          </a:ln>
-        </p:spPr>
-        <p:txBody>
-          <a:bodyPr/>
-          <a:lstStyle/>
-          <a:p>
-            <a:endParaRPr lang="fr-FR"/>
-          </a:p>
-        </p:txBody>
-      </p:sp>
-      <p:sp>
-        <p:nvSpPr>
-          <p:cNvPr id="2" name="Rectangle 1">
-            <a:extLst>
-              <a:ext uri="{FF2B5EF4-FFF2-40B4-BE49-F238E27FC236}">
-                <a16:creationId xmlns:a16="http://schemas.microsoft.com/office/drawing/2014/main" id="{42692C5F-7834-44D9-AB53-E31D041B1143}"/>
-              </a:ext>
-            </a:extLst>
-          </p:cNvPr>
-          <p:cNvSpPr>
-            <a:spLocks noGrp="1"/>
-          </p:cNvSpPr>
-          <p:nvPr/>
-        </p:nvSpPr>
-        <p:spPr>
-          <a:xfrm>
-            <a:off x="571500" y="444246"/>
-            <a:ext cx="1619250" cy="285750"/>
-          </a:xfrm>
-          <a:prstGeom prst="rect">
-            <a:avLst/>
-          </a:prstGeom>
-          <a:noFill/>
-          <a:ln w="0">
-            <a:noFill/>
-            <a:prstDash val="solid"/>
-          </a:ln>
-        </p:spPr>
-        <p:txBody>
-          <a:bodyPr wrap="square" lIns="76200" tIns="76200" rIns="76200" bIns="76200" anchor="ctr">
-            <a:normAutofit fontScale="90833" lnSpcReduction="20000"/>
-          </a:bodyPr>
-          <a:lstStyle/>
-          <a:p>
-            <a:pPr algn="ctr">
-              <a:defRPr sz="1050" b="1">
-                <a:solidFill>
-                  <a:srgbClr val="FFFFFF"/>
-                </a:solidFill>
-              </a:defRPr>
-            </a:pPr>
-            <a:r>
-              <a:rPr sz="1050" b="1">
-                <a:solidFill>
-                  <a:srgbClr val="FFFFFF"/>
-                </a:solidFill>
-              </a:rPr>
-              <a:t>BUILD STEP 3</a:t>
-            </a:r>
-          </a:p>
-        </p:txBody>
-      </p:sp>
-      <p:sp>
-        <p:nvSpPr>
-          <p:cNvPr id="3" name="Rectangle 2">
-            <a:extLst>
-              <a:ext uri="{FF2B5EF4-FFF2-40B4-BE49-F238E27FC236}">
-                <a16:creationId xmlns:a16="http://schemas.microsoft.com/office/drawing/2014/main" id="{90BC87C7-DDBC-44A5-89FD-D5A9E2F1357F}"/>
-              </a:ext>
-            </a:extLst>
-          </p:cNvPr>
-          <p:cNvSpPr>
-            <a:spLocks noGrp="1"/>
-          </p:cNvSpPr>
-          <p:nvPr/>
-        </p:nvSpPr>
-        <p:spPr>
-          <a:xfrm>
-            <a:off x="571500" y="862584"/>
-            <a:ext cx="11049000" cy="476250"/>
-          </a:xfrm>
-          <a:prstGeom prst="rect">
-            <a:avLst/>
-          </a:prstGeom>
-          <a:noFill/>
-          <a:ln w="0">
-            <a:noFill/>
-            <a:prstDash val="solid"/>
-          </a:ln>
-        </p:spPr>
-        <p:txBody>
-          <a:bodyPr wrap="square" lIns="0" tIns="0" rIns="0" bIns="0" anchor="t">
-            <a:normAutofit/>
-          </a:bodyPr>
-          <a:lstStyle/>
-          <a:p>
-            <a:pPr algn="l">
-              <a:defRPr sz="3000" b="1">
-                <a:solidFill>
-                  <a:srgbClr val="0F172A"/>
-                </a:solidFill>
-              </a:defRPr>
-            </a:pPr>
-            <a:r>
-              <a:rPr sz="3000" b="1" dirty="0">
-                <a:solidFill>
-                  <a:srgbClr val="0F172A"/>
-                </a:solidFill>
-              </a:rPr>
-              <a:t>Register the project once in project-config.js</a:t>
-            </a:r>
-          </a:p>
-        </p:txBody>
-      </p:sp>
-      <p:sp>
-        <p:nvSpPr>
-          <p:cNvPr id="4" name="Rectangle 3">
-            <a:extLst>
-              <a:ext uri="{FF2B5EF4-FFF2-40B4-BE49-F238E27FC236}">
-                <a16:creationId xmlns:a16="http://schemas.microsoft.com/office/drawing/2014/main" id="{4A759C8F-6AFF-4C64-BBB1-7A250DF5D613}"/>
-              </a:ext>
-            </a:extLst>
-          </p:cNvPr>
-          <p:cNvSpPr>
-            <a:spLocks noGrp="1"/>
-          </p:cNvSpPr>
-          <p:nvPr/>
-        </p:nvSpPr>
-        <p:spPr>
-          <a:xfrm>
-            <a:off x="571500" y="1400556"/>
-            <a:ext cx="11049000" cy="323850"/>
-          </a:xfrm>
-          <a:prstGeom prst="rect">
-            <a:avLst/>
-          </a:prstGeom>
-          <a:noFill/>
-          <a:ln w="0">
-            <a:noFill/>
-            <a:prstDash val="solid"/>
-          </a:ln>
-        </p:spPr>
-        <p:txBody>
-          <a:bodyPr wrap="square" lIns="0" tIns="0" rIns="0" bIns="0" anchor="t">
-            <a:normAutofit/>
-          </a:bodyPr>
-          <a:lstStyle/>
-          <a:p>
-            <a:pPr algn="l">
-              <a:defRPr sz="1350" b="0">
-                <a:solidFill>
-                  <a:srgbClr val="475569"/>
-                </a:solidFill>
-              </a:defRPr>
-            </a:pPr>
-            <a:r>
-              <a:rPr sz="1350" b="0" dirty="0">
-                <a:solidFill>
-                  <a:srgbClr val="475569"/>
-                </a:solidFill>
-              </a:rPr>
-              <a:t>This is the bridge between the dashboard block, the page URL, and the main JSON file.</a:t>
-            </a:r>
-          </a:p>
-        </p:txBody>
-      </p:sp>
-      <p:sp>
-        <p:nvSpPr>
-          <p:cNvPr id="5" name="Rectangle : coins arrondis 4">
-            <a:extLst>
-              <a:ext uri="{FF2B5EF4-FFF2-40B4-BE49-F238E27FC236}">
-                <a16:creationId xmlns:a16="http://schemas.microsoft.com/office/drawing/2014/main" id="{C197C6ED-5835-4687-A6B0-FD7DF04B089A}"/>
-              </a:ext>
-            </a:extLst>
-          </p:cNvPr>
-          <p:cNvSpPr>
-            <a:spLocks noGrp="1"/>
-          </p:cNvSpPr>
-          <p:nvPr/>
-        </p:nvSpPr>
-        <p:spPr>
-          <a:xfrm>
-            <a:off x="571500" y="2258568"/>
-            <a:ext cx="4476750" cy="3086100"/>
-          </a:xfrm>
-          <a:prstGeom prst="roundRect">
-            <a:avLst>
-              <a:gd name="adj" fmla="val 4938"/>
-            </a:avLst>
-          </a:prstGeom>
-          <a:solidFill>
-            <a:srgbClr val="0B1220"/>
-          </a:solidFill>
-          <a:ln w="9525">
-            <a:solidFill>
-              <a:srgbClr val="1E293B"/>
-            </a:solidFill>
-            <a:prstDash val="solid"/>
-          </a:ln>
-        </p:spPr>
-        <p:style>
-          <a:lnRef idx="0">
-            <a:scrgbClr r="0" g="0" b="0"/>
-          </a:lnRef>
-          <a:fillRef idx="0">
-            <a:scrgbClr r="0" g="0" b="0"/>
-          </a:fillRef>
-          <a:effectRef idx="4">
-            <a:scrgbClr r="0" g="0" b="0"/>
-          </a:effectRef>
-          <a:fontRef idx="major"/>
-        </p:style>
-        <p:txBody>
-          <a:bodyPr/>
-          <a:lstStyle/>
-          <a:p>
-            <a:endParaRPr lang="fr-FR"/>
-          </a:p>
-        </p:txBody>
-      </p:sp>
-      <p:sp>
-        <p:nvSpPr>
-          <p:cNvPr id="6" name="Rectangle 5">
-            <a:extLst>
-              <a:ext uri="{FF2B5EF4-FFF2-40B4-BE49-F238E27FC236}">
-                <a16:creationId xmlns:a16="http://schemas.microsoft.com/office/drawing/2014/main" id="{C022F649-5821-44FA-95DA-2AEB10DB7F39}"/>
-              </a:ext>
-            </a:extLst>
-          </p:cNvPr>
-          <p:cNvSpPr>
-            <a:spLocks noGrp="1"/>
-          </p:cNvSpPr>
-          <p:nvPr/>
-        </p:nvSpPr>
-        <p:spPr>
-          <a:xfrm>
-            <a:off x="742950" y="2410968"/>
-            <a:ext cx="4133850" cy="2781300"/>
-          </a:xfrm>
-          <a:prstGeom prst="rect">
-            <a:avLst/>
-          </a:prstGeom>
-          <a:noFill/>
-          <a:ln w="0">
-            <a:noFill/>
-            <a:prstDash val="solid"/>
-          </a:ln>
-        </p:spPr>
-        <p:txBody>
-          <a:bodyPr wrap="square" lIns="0" tIns="0" rIns="0" bIns="0" anchor="t">
-            <a:normAutofit/>
-          </a:bodyPr>
-          <a:lstStyle/>
-          <a:p>
-            <a:pPr algn="l">
-              <a:defRPr sz="1500" b="0">
-                <a:solidFill>
-                  <a:srgbClr val="E2E8F0"/>
-                </a:solidFill>
-                <a:latin typeface="Consolas"/>
-                <a:ea typeface="Consolas"/>
-                <a:cs typeface="Consolas"/>
-              </a:defRPr>
-            </a:pPr>
-            <a:r>
-              <a:rPr sz="1500" b="0">
-                <a:solidFill>
-                  <a:srgbClr val="E2E8F0"/>
-                </a:solidFill>
-                <a:latin typeface="Consolas"/>
-                <a:ea typeface="Consolas"/>
-                <a:cs typeface="Consolas"/>
-              </a:rPr>
-              <a:t>{</a:t>
-            </a:r>
-          </a:p>
-          <a:p>
-            <a:pPr algn="l">
-              <a:defRPr sz="1500" b="0">
-                <a:solidFill>
-                  <a:srgbClr val="E2E8F0"/>
-                </a:solidFill>
-                <a:latin typeface="Consolas"/>
-                <a:ea typeface="Consolas"/>
-                <a:cs typeface="Consolas"/>
-              </a:defRPr>
-            </a:pPr>
-            <a:r>
-              <a:rPr sz="1500" b="0">
-                <a:solidFill>
-                  <a:srgbClr val="E2E8F0"/>
-                </a:solidFill>
-                <a:latin typeface="Consolas"/>
-                <a:ea typeface="Consolas"/>
-                <a:cs typeface="Consolas"/>
-              </a:rPr>
-              <a:t>  id: "atlas",</a:t>
-            </a:r>
-          </a:p>
-          <a:p>
-            <a:pPr algn="l">
-              <a:defRPr sz="1500" b="0">
-                <a:solidFill>
-                  <a:srgbClr val="E2E8F0"/>
-                </a:solidFill>
-                <a:latin typeface="Consolas"/>
-                <a:ea typeface="Consolas"/>
-                <a:cs typeface="Consolas"/>
-              </a:defRPr>
-            </a:pPr>
-            <a:r>
-              <a:rPr sz="1500" b="0">
-                <a:solidFill>
-                  <a:srgbClr val="E2E8F0"/>
-                </a:solidFill>
-                <a:latin typeface="Consolas"/>
-                <a:ea typeface="Consolas"/>
-                <a:cs typeface="Consolas"/>
-              </a:rPr>
-              <a:t>  name: "ALMI ATLAS",</a:t>
-            </a:r>
-          </a:p>
-          <a:p>
-            <a:pPr algn="l">
-              <a:defRPr sz="1500" b="0">
-                <a:solidFill>
-                  <a:srgbClr val="E2E8F0"/>
-                </a:solidFill>
-                <a:latin typeface="Consolas"/>
-                <a:ea typeface="Consolas"/>
-                <a:cs typeface="Consolas"/>
-              </a:defRPr>
-            </a:pPr>
-            <a:r>
-              <a:rPr sz="1500" b="0">
-                <a:solidFill>
-                  <a:srgbClr val="E2E8F0"/>
-                </a:solidFill>
-                <a:latin typeface="Consolas"/>
-                <a:ea typeface="Consolas"/>
-                <a:cs typeface="Consolas"/>
-              </a:rPr>
-              <a:t>  dashboardListId: "rina-vessel-links",</a:t>
-            </a:r>
-          </a:p>
-          <a:p>
-            <a:pPr algn="l">
-              <a:defRPr sz="1500" b="0">
-                <a:solidFill>
-                  <a:srgbClr val="E2E8F0"/>
-                </a:solidFill>
-                <a:latin typeface="Consolas"/>
-                <a:ea typeface="Consolas"/>
-                <a:cs typeface="Consolas"/>
-              </a:defRPr>
-            </a:pPr>
-            <a:r>
-              <a:rPr sz="1500" b="0">
-                <a:solidFill>
-                  <a:srgbClr val="E2E8F0"/>
-                </a:solidFill>
-                <a:latin typeface="Consolas"/>
-                <a:ea typeface="Consolas"/>
-                <a:cs typeface="Consolas"/>
-              </a:rPr>
-              <a:t>  jsonPath: "Projects/RINA Sig. Ships/Vol.2018/ALMI ATLAS/JSON/ALMI_ATLAS.json"</a:t>
-            </a:r>
-          </a:p>
-          <a:p>
-            <a:pPr algn="l">
-              <a:defRPr sz="1500" b="0">
-                <a:solidFill>
-                  <a:srgbClr val="E2E8F0"/>
-                </a:solidFill>
-                <a:latin typeface="Consolas"/>
-                <a:ea typeface="Consolas"/>
-                <a:cs typeface="Consolas"/>
-              </a:defRPr>
-            </a:pPr>
-            <a:r>
-              <a:rPr sz="1500" b="0">
-                <a:solidFill>
-                  <a:srgbClr val="E2E8F0"/>
-                </a:solidFill>
-                <a:latin typeface="Consolas"/>
-                <a:ea typeface="Consolas"/>
-                <a:cs typeface="Consolas"/>
-              </a:rPr>
-              <a:t>}</a:t>
-            </a:r>
-          </a:p>
-        </p:txBody>
-      </p:sp>
-      <p:sp>
-        <p:nvSpPr>
-          <p:cNvPr id="7" name="Rectangle : coins arrondis 6">
-            <a:extLst>
-              <a:ext uri="{FF2B5EF4-FFF2-40B4-BE49-F238E27FC236}">
-                <a16:creationId xmlns:a16="http://schemas.microsoft.com/office/drawing/2014/main" id="{49BE4D16-99C1-481C-B09F-F5784EF8BB16}"/>
-              </a:ext>
-            </a:extLst>
-          </p:cNvPr>
-          <p:cNvSpPr>
-            <a:spLocks noGrp="1"/>
-          </p:cNvSpPr>
-          <p:nvPr/>
-        </p:nvSpPr>
-        <p:spPr>
-          <a:xfrm>
-            <a:off x="5391150" y="2258568"/>
-            <a:ext cx="2724150" cy="1143000"/>
-          </a:xfrm>
-          <a:prstGeom prst="roundRect">
-            <a:avLst>
-              <a:gd name="adj" fmla="val 13333"/>
-            </a:avLst>
-          </a:prstGeom>
-          <a:solidFill>
-            <a:srgbClr val="FFFFFF"/>
-          </a:solidFill>
-          <a:ln w="9525">
-            <a:solidFill>
-              <a:srgbClr val="E2E8F0"/>
-            </a:solidFill>
-            <a:prstDash val="solid"/>
-          </a:ln>
-        </p:spPr>
-        <p:style>
-          <a:lnRef idx="0">
-            <a:scrgbClr r="0" g="0" b="0"/>
-          </a:lnRef>
-          <a:fillRef idx="0">
-            <a:scrgbClr r="0" g="0" b="0"/>
-          </a:fillRef>
-          <a:effectRef idx="4">
-            <a:scrgbClr r="0" g="0" b="0"/>
-          </a:effectRef>
-          <a:fontRef idx="major"/>
-        </p:style>
-        <p:txBody>
-          <a:bodyPr/>
-          <a:lstStyle/>
-          <a:p>
-            <a:endParaRPr lang="fr-FR"/>
-          </a:p>
-        </p:txBody>
-      </p:sp>
-      <p:sp>
-        <p:nvSpPr>
-          <p:cNvPr id="8" name="Rectangle : coins arrondis 7">
-            <a:extLst>
-              <a:ext uri="{FF2B5EF4-FFF2-40B4-BE49-F238E27FC236}">
-                <a16:creationId xmlns:a16="http://schemas.microsoft.com/office/drawing/2014/main" id="{BB2DA3EF-D615-4FA4-8711-FE6CAB004134}"/>
-              </a:ext>
-            </a:extLst>
-          </p:cNvPr>
-          <p:cNvSpPr>
-            <a:spLocks noGrp="1"/>
-          </p:cNvSpPr>
-          <p:nvPr/>
-        </p:nvSpPr>
-        <p:spPr>
-          <a:xfrm>
-            <a:off x="5543550" y="2410968"/>
-            <a:ext cx="1162050" cy="247650"/>
-          </a:xfrm>
-          <a:prstGeom prst="roundRect">
-            <a:avLst>
-              <a:gd name="adj" fmla="val 50000"/>
-            </a:avLst>
-          </a:prstGeom>
-          <a:solidFill>
-            <a:srgbClr val="2553D6"/>
-          </a:solidFill>
-          <a:ln w="0">
-            <a:solidFill>
-              <a:srgbClr val="2553D6"/>
-            </a:solidFill>
-            <a:prstDash val="solid"/>
-          </a:ln>
-        </p:spPr>
-        <p:txBody>
-          <a:bodyPr/>
-          <a:lstStyle/>
-          <a:p>
-            <a:endParaRPr lang="fr-FR"/>
-          </a:p>
-        </p:txBody>
-      </p:sp>
-      <p:sp>
-        <p:nvSpPr>
-          <p:cNvPr id="9" name="Rectangle 8">
-            <a:extLst>
-              <a:ext uri="{FF2B5EF4-FFF2-40B4-BE49-F238E27FC236}">
-                <a16:creationId xmlns:a16="http://schemas.microsoft.com/office/drawing/2014/main" id="{A52142E5-B6BA-4933-B827-BE38B048D188}"/>
-              </a:ext>
-            </a:extLst>
-          </p:cNvPr>
-          <p:cNvSpPr>
-            <a:spLocks noGrp="1"/>
-          </p:cNvSpPr>
-          <p:nvPr/>
-        </p:nvSpPr>
-        <p:spPr>
-          <a:xfrm>
-            <a:off x="5543550" y="2410968"/>
-            <a:ext cx="1162050" cy="247650"/>
-          </a:xfrm>
-          <a:prstGeom prst="rect">
-            <a:avLst/>
-          </a:prstGeom>
-          <a:noFill/>
-          <a:ln w="0">
-            <a:noFill/>
-            <a:prstDash val="solid"/>
-          </a:ln>
-        </p:spPr>
-        <p:txBody>
-          <a:bodyPr wrap="square" lIns="76200" tIns="76200" rIns="76200" bIns="76200" anchor="ctr">
-            <a:noAutofit/>
-          </a:bodyPr>
-          <a:lstStyle/>
-          <a:p>
-            <a:pPr algn="ctr">
-              <a:defRPr sz="1050" b="1">
-                <a:solidFill>
-                  <a:srgbClr val="FFFFFF"/>
-                </a:solidFill>
-              </a:defRPr>
-            </a:pPr>
-            <a:r>
-              <a:rPr sz="1200" b="1" dirty="0">
-                <a:solidFill>
-                  <a:srgbClr val="FFFFFF"/>
-                </a:solidFill>
-              </a:rPr>
-              <a:t>id</a:t>
-            </a:r>
-          </a:p>
-        </p:txBody>
-      </p:sp>
-      <p:sp>
-        <p:nvSpPr>
-          <p:cNvPr id="10" name="Rectangle 9">
-            <a:extLst>
-              <a:ext uri="{FF2B5EF4-FFF2-40B4-BE49-F238E27FC236}">
-                <a16:creationId xmlns:a16="http://schemas.microsoft.com/office/drawing/2014/main" id="{4F1652FE-DB40-45C2-B368-225D58FF8046}"/>
-              </a:ext>
-            </a:extLst>
-          </p:cNvPr>
-          <p:cNvSpPr>
-            <a:spLocks noGrp="1"/>
-          </p:cNvSpPr>
-          <p:nvPr/>
-        </p:nvSpPr>
-        <p:spPr>
-          <a:xfrm>
-            <a:off x="5543550" y="2772918"/>
-            <a:ext cx="2419350" cy="495300"/>
-          </a:xfrm>
-          <a:prstGeom prst="rect">
-            <a:avLst/>
-          </a:prstGeom>
-          <a:noFill/>
-          <a:ln w="0">
-            <a:noFill/>
-            <a:prstDash val="solid"/>
-          </a:ln>
-        </p:spPr>
-        <p:txBody>
-          <a:bodyPr wrap="square" lIns="0" tIns="0" rIns="0" bIns="0" anchor="t">
-            <a:normAutofit/>
-          </a:bodyPr>
-          <a:lstStyle/>
-          <a:p>
-            <a:pPr algn="l">
-              <a:defRPr sz="1200" b="0">
-                <a:solidFill>
-                  <a:srgbClr val="334155"/>
-                </a:solidFill>
-              </a:defRPr>
-            </a:pPr>
-            <a:r>
-              <a:rPr sz="1200" b="0" dirty="0">
-                <a:solidFill>
-                  <a:srgbClr val="334155"/>
-                </a:solidFill>
-              </a:rPr>
-              <a:t>Unique key used in the URL.</a:t>
-            </a:r>
-          </a:p>
-          <a:p>
-            <a:pPr algn="l">
-              <a:defRPr sz="1200" b="0">
-                <a:solidFill>
-                  <a:srgbClr val="334155"/>
-                </a:solidFill>
-              </a:defRPr>
-            </a:pPr>
-            <a:r>
-              <a:rPr sz="1200" b="0" dirty="0">
-                <a:solidFill>
-                  <a:srgbClr val="334155"/>
-                </a:solidFill>
-              </a:rPr>
-              <a:t>Example: project=atlas</a:t>
-            </a:r>
-          </a:p>
-        </p:txBody>
-      </p:sp>
-      <p:sp>
-        <p:nvSpPr>
-          <p:cNvPr id="11" name="Rectangle : coins arrondis 10">
-            <a:extLst>
-              <a:ext uri="{FF2B5EF4-FFF2-40B4-BE49-F238E27FC236}">
-                <a16:creationId xmlns:a16="http://schemas.microsoft.com/office/drawing/2014/main" id="{575B6E37-095D-4C9B-ABF6-53B06A9290BE}"/>
-              </a:ext>
-            </a:extLst>
-          </p:cNvPr>
-          <p:cNvSpPr>
-            <a:spLocks noGrp="1"/>
-          </p:cNvSpPr>
-          <p:nvPr/>
-        </p:nvSpPr>
-        <p:spPr>
-          <a:xfrm>
-            <a:off x="8420100" y="2258568"/>
-            <a:ext cx="3105150" cy="1143000"/>
-          </a:xfrm>
-          <a:prstGeom prst="roundRect">
-            <a:avLst>
-              <a:gd name="adj" fmla="val 13333"/>
-            </a:avLst>
-          </a:prstGeom>
-          <a:solidFill>
-            <a:srgbClr val="FFFFFF"/>
-          </a:solidFill>
-          <a:ln w="9525">
-            <a:solidFill>
-              <a:srgbClr val="E2E8F0"/>
-            </a:solidFill>
-            <a:prstDash val="solid"/>
-          </a:ln>
-        </p:spPr>
-        <p:style>
-          <a:lnRef idx="0">
-            <a:scrgbClr r="0" g="0" b="0"/>
-          </a:lnRef>
-          <a:fillRef idx="0">
-            <a:scrgbClr r="0" g="0" b="0"/>
-          </a:fillRef>
-          <a:effectRef idx="4">
-            <a:scrgbClr r="0" g="0" b="0"/>
-          </a:effectRef>
-          <a:fontRef idx="major"/>
-        </p:style>
-        <p:txBody>
-          <a:bodyPr/>
-          <a:lstStyle/>
-          <a:p>
-            <a:endParaRPr lang="fr-FR"/>
-          </a:p>
-        </p:txBody>
-      </p:sp>
-      <p:sp>
-        <p:nvSpPr>
-          <p:cNvPr id="12" name="Rectangle : coins arrondis 11">
-            <a:extLst>
-              <a:ext uri="{FF2B5EF4-FFF2-40B4-BE49-F238E27FC236}">
-                <a16:creationId xmlns:a16="http://schemas.microsoft.com/office/drawing/2014/main" id="{01B5D687-48AB-4D74-966D-2815FC55ECFD}"/>
-              </a:ext>
-            </a:extLst>
-          </p:cNvPr>
-          <p:cNvSpPr>
-            <a:spLocks noGrp="1"/>
-          </p:cNvSpPr>
-          <p:nvPr/>
-        </p:nvSpPr>
-        <p:spPr>
-          <a:xfrm>
-            <a:off x="8572500" y="2410968"/>
-            <a:ext cx="1162050" cy="247650"/>
-          </a:xfrm>
-          <a:prstGeom prst="roundRect">
-            <a:avLst>
-              <a:gd name="adj" fmla="val 50000"/>
-            </a:avLst>
-          </a:prstGeom>
-          <a:solidFill>
-            <a:srgbClr val="0F766E"/>
-          </a:solidFill>
-          <a:ln w="0">
-            <a:solidFill>
-              <a:srgbClr val="0F766E"/>
-            </a:solidFill>
-            <a:prstDash val="solid"/>
-          </a:ln>
-        </p:spPr>
-        <p:txBody>
-          <a:bodyPr/>
-          <a:lstStyle/>
-          <a:p>
-            <a:endParaRPr lang="fr-FR"/>
-          </a:p>
-        </p:txBody>
-      </p:sp>
-      <p:sp>
-        <p:nvSpPr>
-          <p:cNvPr id="13" name="Rectangle 12">
-            <a:extLst>
-              <a:ext uri="{FF2B5EF4-FFF2-40B4-BE49-F238E27FC236}">
-                <a16:creationId xmlns:a16="http://schemas.microsoft.com/office/drawing/2014/main" id="{D039E889-660D-4CF8-898D-EE7ACDE9BB41}"/>
-              </a:ext>
-            </a:extLst>
-          </p:cNvPr>
-          <p:cNvSpPr>
-            <a:spLocks noGrp="1"/>
-          </p:cNvSpPr>
-          <p:nvPr/>
-        </p:nvSpPr>
-        <p:spPr>
-          <a:xfrm>
-            <a:off x="8572500" y="2410968"/>
-            <a:ext cx="1162050" cy="247650"/>
-          </a:xfrm>
-          <a:prstGeom prst="rect">
-            <a:avLst/>
-          </a:prstGeom>
-          <a:noFill/>
-          <a:ln w="0">
-            <a:noFill/>
-            <a:prstDash val="solid"/>
-          </a:ln>
-        </p:spPr>
-        <p:txBody>
-          <a:bodyPr wrap="square" lIns="76200" tIns="76200" rIns="76200" bIns="76200" anchor="ctr">
-            <a:noAutofit/>
-          </a:bodyPr>
-          <a:lstStyle/>
-          <a:p>
-            <a:pPr algn="ctr">
-              <a:defRPr sz="1050" b="1">
-                <a:solidFill>
-                  <a:srgbClr val="FFFFFF"/>
-                </a:solidFill>
-              </a:defRPr>
-            </a:pPr>
-            <a:r>
-              <a:rPr sz="1200" b="1" dirty="0">
-                <a:solidFill>
-                  <a:srgbClr val="FFFFFF"/>
-                </a:solidFill>
-              </a:rPr>
-              <a:t>name</a:t>
-            </a:r>
-          </a:p>
-        </p:txBody>
-      </p:sp>
-      <p:sp>
-        <p:nvSpPr>
-          <p:cNvPr id="14" name="Rectangle 13">
-            <a:extLst>
-              <a:ext uri="{FF2B5EF4-FFF2-40B4-BE49-F238E27FC236}">
-                <a16:creationId xmlns:a16="http://schemas.microsoft.com/office/drawing/2014/main" id="{1C050138-AAC8-46B8-9A90-FBFA7284F043}"/>
-              </a:ext>
-            </a:extLst>
-          </p:cNvPr>
-          <p:cNvSpPr>
-            <a:spLocks noGrp="1"/>
-          </p:cNvSpPr>
-          <p:nvPr/>
-        </p:nvSpPr>
-        <p:spPr>
-          <a:xfrm>
-            <a:off x="8572500" y="2772918"/>
-            <a:ext cx="2800350" cy="495300"/>
-          </a:xfrm>
-          <a:prstGeom prst="rect">
-            <a:avLst/>
-          </a:prstGeom>
-          <a:noFill/>
-          <a:ln w="0">
-            <a:noFill/>
-            <a:prstDash val="solid"/>
-          </a:ln>
-        </p:spPr>
-        <p:txBody>
-          <a:bodyPr wrap="square" lIns="0" tIns="0" rIns="0" bIns="0" anchor="t">
-            <a:normAutofit/>
-          </a:bodyPr>
-          <a:lstStyle/>
-          <a:p>
-            <a:pPr algn="l">
-              <a:defRPr sz="1200" b="0">
-                <a:solidFill>
-                  <a:srgbClr val="334155"/>
-                </a:solidFill>
-              </a:defRPr>
-            </a:pPr>
-            <a:r>
-              <a:rPr sz="1200" b="0">
-                <a:solidFill>
-                  <a:srgbClr val="334155"/>
-                </a:solidFill>
-              </a:rPr>
-              <a:t>Visible name shown in the dashboard and in the details page header.</a:t>
-            </a:r>
-          </a:p>
-        </p:txBody>
-      </p:sp>
-      <p:sp>
-        <p:nvSpPr>
-          <p:cNvPr id="15" name="Rectangle : coins arrondis 14">
-            <a:extLst>
-              <a:ext uri="{FF2B5EF4-FFF2-40B4-BE49-F238E27FC236}">
-                <a16:creationId xmlns:a16="http://schemas.microsoft.com/office/drawing/2014/main" id="{6B02FE4E-1A81-4988-AED8-C7B93572FF47}"/>
-              </a:ext>
-            </a:extLst>
-          </p:cNvPr>
-          <p:cNvSpPr>
-            <a:spLocks noGrp="1"/>
-          </p:cNvSpPr>
-          <p:nvPr/>
-        </p:nvSpPr>
-        <p:spPr>
-          <a:xfrm>
-            <a:off x="5391150" y="4177284"/>
-            <a:ext cx="2724150" cy="1143000"/>
-          </a:xfrm>
-          <a:prstGeom prst="roundRect">
-            <a:avLst>
-              <a:gd name="adj" fmla="val 13333"/>
-            </a:avLst>
-          </a:prstGeom>
-          <a:solidFill>
-            <a:srgbClr val="FFFFFF"/>
-          </a:solidFill>
-          <a:ln w="9525">
-            <a:solidFill>
-              <a:srgbClr val="E2E8F0"/>
-            </a:solidFill>
-            <a:prstDash val="solid"/>
-          </a:ln>
-        </p:spPr>
-        <p:style>
-          <a:lnRef idx="0">
-            <a:scrgbClr r="0" g="0" b="0"/>
-          </a:lnRef>
-          <a:fillRef idx="0">
-            <a:scrgbClr r="0" g="0" b="0"/>
-          </a:fillRef>
-          <a:effectRef idx="4">
-            <a:scrgbClr r="0" g="0" b="0"/>
-          </a:effectRef>
-          <a:fontRef idx="major"/>
-        </p:style>
-        <p:txBody>
-          <a:bodyPr/>
-          <a:lstStyle/>
-          <a:p>
-            <a:endParaRPr lang="fr-FR"/>
-          </a:p>
-        </p:txBody>
-      </p:sp>
-      <p:sp>
-        <p:nvSpPr>
-          <p:cNvPr id="16" name="Rectangle : coins arrondis 15">
-            <a:extLst>
-              <a:ext uri="{FF2B5EF4-FFF2-40B4-BE49-F238E27FC236}">
-                <a16:creationId xmlns:a16="http://schemas.microsoft.com/office/drawing/2014/main" id="{BECEBF19-FB5E-4A33-9301-6F340CB25B35}"/>
-              </a:ext>
-            </a:extLst>
-          </p:cNvPr>
-          <p:cNvSpPr>
-            <a:spLocks noGrp="1"/>
-          </p:cNvSpPr>
-          <p:nvPr/>
-        </p:nvSpPr>
-        <p:spPr>
-          <a:xfrm>
-            <a:off x="5543550" y="4329684"/>
-            <a:ext cx="1238250" cy="247650"/>
-          </a:xfrm>
-          <a:prstGeom prst="roundRect">
-            <a:avLst>
-              <a:gd name="adj" fmla="val 50000"/>
-            </a:avLst>
-          </a:prstGeom>
-          <a:solidFill>
-            <a:srgbClr val="16803C"/>
-          </a:solidFill>
-          <a:ln w="0">
-            <a:solidFill>
-              <a:srgbClr val="16803C"/>
-            </a:solidFill>
-            <a:prstDash val="solid"/>
-          </a:ln>
-        </p:spPr>
-        <p:txBody>
-          <a:bodyPr/>
-          <a:lstStyle/>
-          <a:p>
-            <a:endParaRPr lang="fr-FR"/>
-          </a:p>
-        </p:txBody>
-      </p:sp>
-      <p:sp>
-        <p:nvSpPr>
-          <p:cNvPr id="17" name="Rectangle 16">
-            <a:extLst>
-              <a:ext uri="{FF2B5EF4-FFF2-40B4-BE49-F238E27FC236}">
-                <a16:creationId xmlns:a16="http://schemas.microsoft.com/office/drawing/2014/main" id="{5FCC21A4-047B-4FF0-8E9C-0A7E64E21499}"/>
-              </a:ext>
-            </a:extLst>
-          </p:cNvPr>
-          <p:cNvSpPr>
-            <a:spLocks noGrp="1"/>
-          </p:cNvSpPr>
-          <p:nvPr/>
-        </p:nvSpPr>
-        <p:spPr>
-          <a:xfrm>
-            <a:off x="5543550" y="4329684"/>
-            <a:ext cx="1238250" cy="247650"/>
-          </a:xfrm>
-          <a:prstGeom prst="rect">
-            <a:avLst/>
-          </a:prstGeom>
-          <a:noFill/>
-          <a:ln w="0">
-            <a:noFill/>
-            <a:prstDash val="solid"/>
-          </a:ln>
-        </p:spPr>
-        <p:txBody>
-          <a:bodyPr wrap="square" lIns="76200" tIns="76200" rIns="76200" bIns="76200" anchor="ctr">
-            <a:noAutofit/>
-          </a:bodyPr>
-          <a:lstStyle/>
-          <a:p>
-            <a:pPr algn="ctr">
-              <a:defRPr sz="1050" b="1">
-                <a:solidFill>
-                  <a:srgbClr val="FFFFFF"/>
-                </a:solidFill>
-              </a:defRPr>
-            </a:pPr>
-            <a:r>
-              <a:rPr sz="1200" b="1" dirty="0" err="1">
-                <a:solidFill>
-                  <a:srgbClr val="FFFFFF"/>
-                </a:solidFill>
-              </a:rPr>
-              <a:t>dashboardListId</a:t>
-            </a:r>
-            <a:endParaRPr sz="1200" b="1" dirty="0">
-              <a:solidFill>
-                <a:srgbClr val="FFFFFF"/>
-              </a:solidFill>
-            </a:endParaRPr>
-          </a:p>
-        </p:txBody>
-      </p:sp>
-      <p:sp>
-        <p:nvSpPr>
-          <p:cNvPr id="18" name="Rectangle 17">
-            <a:extLst>
-              <a:ext uri="{FF2B5EF4-FFF2-40B4-BE49-F238E27FC236}">
-                <a16:creationId xmlns:a16="http://schemas.microsoft.com/office/drawing/2014/main" id="{6BC423AF-FEB6-4CE1-B234-25AFF543E89E}"/>
-              </a:ext>
-            </a:extLst>
-          </p:cNvPr>
-          <p:cNvSpPr>
-            <a:spLocks noGrp="1"/>
-          </p:cNvSpPr>
-          <p:nvPr/>
-        </p:nvSpPr>
-        <p:spPr>
-          <a:xfrm>
-            <a:off x="5543550" y="4691634"/>
-            <a:ext cx="2419350" cy="495300"/>
-          </a:xfrm>
-          <a:prstGeom prst="rect">
-            <a:avLst/>
-          </a:prstGeom>
-          <a:noFill/>
-          <a:ln w="0">
-            <a:noFill/>
-            <a:prstDash val="solid"/>
-          </a:ln>
-        </p:spPr>
-        <p:txBody>
-          <a:bodyPr wrap="square" lIns="0" tIns="0" rIns="0" bIns="0" anchor="t">
-            <a:normAutofit/>
-          </a:bodyPr>
-          <a:lstStyle/>
-          <a:p>
-            <a:pPr algn="l">
-              <a:defRPr sz="1200" b="0">
-                <a:solidFill>
-                  <a:srgbClr val="334155"/>
-                </a:solidFill>
-              </a:defRPr>
-            </a:pPr>
-            <a:r>
-              <a:rPr sz="1200" b="0" dirty="0">
-                <a:solidFill>
-                  <a:srgbClr val="334155"/>
-                </a:solidFill>
-              </a:rPr>
-              <a:t>Must match the empty list container id inside the dashboard block.</a:t>
-            </a:r>
-          </a:p>
-        </p:txBody>
-      </p:sp>
-      <p:sp>
-        <p:nvSpPr>
-          <p:cNvPr id="19" name="Rectangle : coins arrondis 18">
-            <a:extLst>
-              <a:ext uri="{FF2B5EF4-FFF2-40B4-BE49-F238E27FC236}">
-                <a16:creationId xmlns:a16="http://schemas.microsoft.com/office/drawing/2014/main" id="{76ECA61B-8C67-4A40-97F3-30625F914414}"/>
-              </a:ext>
-            </a:extLst>
-          </p:cNvPr>
-          <p:cNvSpPr>
-            <a:spLocks noGrp="1"/>
-          </p:cNvSpPr>
-          <p:nvPr/>
-        </p:nvSpPr>
-        <p:spPr>
-          <a:xfrm>
-            <a:off x="8420100" y="4177284"/>
-            <a:ext cx="3105150" cy="1143000"/>
-          </a:xfrm>
-          <a:prstGeom prst="roundRect">
-            <a:avLst>
-              <a:gd name="adj" fmla="val 13333"/>
-            </a:avLst>
-          </a:prstGeom>
-          <a:solidFill>
-            <a:srgbClr val="FFFFFF"/>
-          </a:solidFill>
-          <a:ln w="9525">
-            <a:solidFill>
-              <a:srgbClr val="E2E8F0"/>
-            </a:solidFill>
-            <a:prstDash val="solid"/>
-          </a:ln>
-        </p:spPr>
-        <p:style>
-          <a:lnRef idx="0">
-            <a:scrgbClr r="0" g="0" b="0"/>
-          </a:lnRef>
-          <a:fillRef idx="0">
-            <a:scrgbClr r="0" g="0" b="0"/>
-          </a:fillRef>
-          <a:effectRef idx="4">
-            <a:scrgbClr r="0" g="0" b="0"/>
-          </a:effectRef>
-          <a:fontRef idx="major"/>
-        </p:style>
-        <p:txBody>
-          <a:bodyPr/>
-          <a:lstStyle/>
-          <a:p>
-            <a:endParaRPr lang="fr-FR"/>
-          </a:p>
-        </p:txBody>
-      </p:sp>
-      <p:sp>
-        <p:nvSpPr>
-          <p:cNvPr id="20" name="Rectangle : coins arrondis 19">
-            <a:extLst>
-              <a:ext uri="{FF2B5EF4-FFF2-40B4-BE49-F238E27FC236}">
-                <a16:creationId xmlns:a16="http://schemas.microsoft.com/office/drawing/2014/main" id="{0D33EF37-1F16-4DF9-9402-5627511565AB}"/>
-              </a:ext>
-            </a:extLst>
-          </p:cNvPr>
-          <p:cNvSpPr>
-            <a:spLocks noGrp="1"/>
-          </p:cNvSpPr>
-          <p:nvPr/>
-        </p:nvSpPr>
-        <p:spPr>
-          <a:xfrm>
-            <a:off x="8572500" y="4329684"/>
-            <a:ext cx="1162050" cy="247650"/>
-          </a:xfrm>
-          <a:prstGeom prst="roundRect">
-            <a:avLst>
-              <a:gd name="adj" fmla="val 50000"/>
-            </a:avLst>
-          </a:prstGeom>
-          <a:solidFill>
-            <a:srgbClr val="D97706"/>
-          </a:solidFill>
-          <a:ln w="0">
-            <a:solidFill>
-              <a:srgbClr val="D97706"/>
-            </a:solidFill>
-            <a:prstDash val="solid"/>
-          </a:ln>
-        </p:spPr>
-        <p:txBody>
-          <a:bodyPr/>
-          <a:lstStyle/>
-          <a:p>
-            <a:endParaRPr lang="fr-FR" dirty="0"/>
-          </a:p>
-        </p:txBody>
-      </p:sp>
-      <p:sp>
-        <p:nvSpPr>
-          <p:cNvPr id="21" name="Rectangle 20">
-            <a:extLst>
-              <a:ext uri="{FF2B5EF4-FFF2-40B4-BE49-F238E27FC236}">
-                <a16:creationId xmlns:a16="http://schemas.microsoft.com/office/drawing/2014/main" id="{38A2B9FB-69AF-4A0B-843C-4E9CDE5DA358}"/>
-              </a:ext>
-            </a:extLst>
-          </p:cNvPr>
-          <p:cNvSpPr>
-            <a:spLocks noGrp="1"/>
-          </p:cNvSpPr>
-          <p:nvPr/>
-        </p:nvSpPr>
-        <p:spPr>
-          <a:xfrm>
-            <a:off x="8572500" y="4329684"/>
-            <a:ext cx="1162050" cy="247650"/>
-          </a:xfrm>
-          <a:prstGeom prst="rect">
-            <a:avLst/>
-          </a:prstGeom>
-          <a:noFill/>
-          <a:ln w="0">
-            <a:noFill/>
-            <a:prstDash val="solid"/>
-          </a:ln>
-        </p:spPr>
-        <p:txBody>
-          <a:bodyPr wrap="square" lIns="76200" tIns="76200" rIns="76200" bIns="76200" anchor="ctr">
-            <a:noAutofit/>
-          </a:bodyPr>
-          <a:lstStyle/>
-          <a:p>
-            <a:pPr algn="ctr">
-              <a:defRPr sz="1050" b="1">
-                <a:solidFill>
-                  <a:srgbClr val="FFFFFF"/>
-                </a:solidFill>
-              </a:defRPr>
-            </a:pPr>
-            <a:r>
-              <a:rPr sz="1200" b="1" dirty="0" err="1">
-                <a:solidFill>
-                  <a:srgbClr val="FFFFFF"/>
-                </a:solidFill>
-              </a:rPr>
-              <a:t>jsonPath</a:t>
-            </a:r>
-            <a:endParaRPr sz="1200" b="1" dirty="0">
-              <a:solidFill>
-                <a:srgbClr val="FFFFFF"/>
-              </a:solidFill>
-            </a:endParaRPr>
-          </a:p>
-        </p:txBody>
-      </p:sp>
-      <p:sp>
-        <p:nvSpPr>
-          <p:cNvPr id="22" name="Rectangle 21">
-            <a:extLst>
-              <a:ext uri="{FF2B5EF4-FFF2-40B4-BE49-F238E27FC236}">
-                <a16:creationId xmlns:a16="http://schemas.microsoft.com/office/drawing/2014/main" id="{EA26F69E-37AA-491D-8C75-FE16A0F15306}"/>
-              </a:ext>
-            </a:extLst>
-          </p:cNvPr>
-          <p:cNvSpPr>
-            <a:spLocks noGrp="1"/>
-          </p:cNvSpPr>
-          <p:nvPr/>
-        </p:nvSpPr>
-        <p:spPr>
-          <a:xfrm>
-            <a:off x="8572500" y="4691634"/>
-            <a:ext cx="2800350" cy="495300"/>
-          </a:xfrm>
-          <a:prstGeom prst="rect">
-            <a:avLst/>
-          </a:prstGeom>
-          <a:noFill/>
-          <a:ln w="0">
-            <a:noFill/>
-            <a:prstDash val="solid"/>
-          </a:ln>
-        </p:spPr>
-        <p:txBody>
-          <a:bodyPr wrap="square" lIns="0" tIns="0" rIns="0" bIns="0" anchor="t">
-            <a:normAutofit/>
-          </a:bodyPr>
-          <a:lstStyle/>
-          <a:p>
-            <a:pPr algn="l">
-              <a:defRPr sz="1200" b="0">
-                <a:solidFill>
-                  <a:srgbClr val="334155"/>
-                </a:solidFill>
-              </a:defRPr>
-            </a:pPr>
-            <a:r>
-              <a:rPr sz="1200" b="0">
-                <a:solidFill>
-                  <a:srgbClr val="334155"/>
-                </a:solidFill>
-              </a:rPr>
-              <a:t>Path to the single main JSON file for this project.</a:t>
-            </a:r>
-          </a:p>
-        </p:txBody>
-      </p:sp>
-      <p:sp>
-        <p:nvSpPr>
-          <p:cNvPr id="23" name="Rectangle : coins arrondis 22">
-            <a:extLst>
-              <a:ext uri="{FF2B5EF4-FFF2-40B4-BE49-F238E27FC236}">
-                <a16:creationId xmlns:a16="http://schemas.microsoft.com/office/drawing/2014/main" id="{C56F445E-6F04-4A0F-9143-2540B8764046}"/>
-              </a:ext>
-            </a:extLst>
-          </p:cNvPr>
-          <p:cNvSpPr>
-            <a:spLocks noGrp="1"/>
-          </p:cNvSpPr>
-          <p:nvPr/>
-        </p:nvSpPr>
-        <p:spPr>
-          <a:xfrm>
-            <a:off x="3031998" y="5971794"/>
-            <a:ext cx="6305550" cy="381000"/>
-          </a:xfrm>
-          <a:prstGeom prst="roundRect">
-            <a:avLst>
-              <a:gd name="adj" fmla="val 18182"/>
-            </a:avLst>
-          </a:prstGeom>
-          <a:solidFill>
-            <a:srgbClr val="EBFBF1"/>
-          </a:solidFill>
-          <a:ln w="9525">
-            <a:solidFill>
-              <a:srgbClr val="A7F3D0"/>
-            </a:solidFill>
-            <a:prstDash val="solid"/>
-          </a:ln>
-        </p:spPr>
-        <p:style>
-          <a:lnRef idx="0">
-            <a:scrgbClr r="0" g="0" b="0"/>
-          </a:lnRef>
-          <a:fillRef idx="0">
-            <a:scrgbClr r="0" g="0" b="0"/>
-          </a:fillRef>
-          <a:effectRef idx="4">
-            <a:scrgbClr r="0" g="0" b="0"/>
-          </a:effectRef>
-          <a:fontRef idx="major"/>
-        </p:style>
-        <p:txBody>
-          <a:bodyPr/>
-          <a:lstStyle/>
-          <a:p>
-            <a:endParaRPr lang="fr-FR"/>
-          </a:p>
-        </p:txBody>
-      </p:sp>
-      <p:sp>
-        <p:nvSpPr>
-          <p:cNvPr id="25" name="Rectangle 24">
-            <a:extLst>
-              <a:ext uri="{FF2B5EF4-FFF2-40B4-BE49-F238E27FC236}">
-                <a16:creationId xmlns:a16="http://schemas.microsoft.com/office/drawing/2014/main" id="{BBF803A6-21E9-4065-B274-D6316EEAF4FC}"/>
-              </a:ext>
-            </a:extLst>
-          </p:cNvPr>
-          <p:cNvSpPr>
-            <a:spLocks noGrp="1"/>
-          </p:cNvSpPr>
-          <p:nvPr/>
-        </p:nvSpPr>
-        <p:spPr>
-          <a:xfrm>
-            <a:off x="3355848" y="6105144"/>
-            <a:ext cx="400050" cy="228600"/>
-          </a:xfrm>
-          <a:prstGeom prst="rect">
-            <a:avLst/>
-          </a:prstGeom>
-          <a:noFill/>
-          <a:ln w="0">
-            <a:noFill/>
-            <a:prstDash val="solid"/>
-          </a:ln>
-        </p:spPr>
-        <p:txBody>
-          <a:bodyPr wrap="square" lIns="76200" tIns="76200" rIns="76200" bIns="76200" anchor="ctr">
-            <a:normAutofit fontScale="55119" lnSpcReduction="20000"/>
-          </a:bodyPr>
-          <a:lstStyle/>
-          <a:p>
-            <a:pPr algn="ctr">
-              <a:defRPr sz="1050" b="1">
-                <a:solidFill>
-                  <a:srgbClr val="FFFFFF"/>
-                </a:solidFill>
-              </a:defRPr>
-            </a:pPr>
-            <a:endParaRPr sz="1050" b="1" dirty="0">
-              <a:solidFill>
-                <a:srgbClr val="FFFFFF"/>
-              </a:solidFill>
-            </a:endParaRPr>
-          </a:p>
-        </p:txBody>
-      </p:sp>
-      <p:sp>
-        <p:nvSpPr>
-          <p:cNvPr id="26" name="Rectangle 25">
-            <a:extLst>
-              <a:ext uri="{FF2B5EF4-FFF2-40B4-BE49-F238E27FC236}">
-                <a16:creationId xmlns:a16="http://schemas.microsoft.com/office/drawing/2014/main" id="{D5BA3CAA-7629-4200-B7E9-806124B38E43}"/>
-              </a:ext>
-            </a:extLst>
-          </p:cNvPr>
-          <p:cNvSpPr>
-            <a:spLocks noGrp="1"/>
-          </p:cNvSpPr>
-          <p:nvPr/>
-        </p:nvSpPr>
-        <p:spPr>
-          <a:xfrm>
-            <a:off x="3143250" y="6076950"/>
-            <a:ext cx="6087618" cy="647700"/>
-          </a:xfrm>
-          <a:prstGeom prst="rect">
-            <a:avLst/>
-          </a:prstGeom>
-          <a:noFill/>
-          <a:ln w="0">
-            <a:noFill/>
-            <a:prstDash val="solid"/>
-          </a:ln>
-        </p:spPr>
-        <p:txBody>
-          <a:bodyPr wrap="square" lIns="0" tIns="0" rIns="0" bIns="0" anchor="t">
-            <a:normAutofit/>
-          </a:bodyPr>
-          <a:lstStyle/>
-          <a:p>
-            <a:pPr algn="l">
-              <a:defRPr sz="1200" b="0">
-                <a:solidFill>
-                  <a:srgbClr val="1E293B"/>
-                </a:solidFill>
-              </a:defRPr>
-            </a:pPr>
-            <a:r>
-              <a:rPr sz="1200" b="0" dirty="0">
-                <a:solidFill>
-                  <a:srgbClr val="1E293B"/>
-                </a:solidFill>
-              </a:rPr>
-              <a:t>When you add a new vessel or project later, this is usually the only JavaScript file you need to edit.</a:t>
-            </a:r>
-          </a:p>
-        </p:txBody>
-      </p:sp>
-      <p:sp>
-        <p:nvSpPr>
-          <p:cNvPr id="31" name="Rectangle 30">
-            <a:extLst>
-              <a:ext uri="{FF2B5EF4-FFF2-40B4-BE49-F238E27FC236}">
-                <a16:creationId xmlns:a16="http://schemas.microsoft.com/office/drawing/2014/main" id="{1E5D556A-C9AC-4B59-9486-6D63B475C9D2}"/>
-              </a:ext>
-            </a:extLst>
-          </p:cNvPr>
-          <p:cNvSpPr>
-            <a:spLocks noGrp="1"/>
-          </p:cNvSpPr>
-          <p:nvPr/>
-        </p:nvSpPr>
-        <p:spPr>
-          <a:xfrm>
-            <a:off x="571500" y="6534150"/>
-            <a:ext cx="3048000" cy="190500"/>
-          </a:xfrm>
-          <a:prstGeom prst="rect">
-            <a:avLst/>
-          </a:prstGeom>
-          <a:noFill/>
-          <a:ln w="0">
-            <a:noFill/>
-            <a:prstDash val="solid"/>
-          </a:ln>
-        </p:spPr>
-        <p:txBody>
-          <a:bodyPr wrap="square" lIns="0" tIns="0" rIns="0" bIns="0" anchor="t">
-            <a:normAutofit/>
-          </a:bodyPr>
-          <a:lstStyle/>
-          <a:p>
-            <a:pPr algn="l">
-              <a:defRPr sz="825" b="0">
-                <a:solidFill>
-                  <a:srgbClr val="64748B"/>
-                </a:solidFill>
-              </a:defRPr>
-            </a:pPr>
-            <a:r>
-              <a:rPr sz="825" b="0">
-                <a:solidFill>
-                  <a:srgbClr val="64748B"/>
-                </a:solidFill>
-              </a:rPr>
-              <a:t>Data Hub guide - new vessel workflow</a:t>
-            </a:r>
-          </a:p>
-        </p:txBody>
-      </p:sp>
-      <p:sp>
-        <p:nvSpPr>
-          <p:cNvPr id="32" name="Rectangle 31">
-            <a:extLst>
-              <a:ext uri="{FF2B5EF4-FFF2-40B4-BE49-F238E27FC236}">
-                <a16:creationId xmlns:a16="http://schemas.microsoft.com/office/drawing/2014/main" id="{84469773-1725-4EFF-A9FB-A2BF1EFABAFD}"/>
-              </a:ext>
-            </a:extLst>
-          </p:cNvPr>
-          <p:cNvSpPr>
-            <a:spLocks noGrp="1"/>
-          </p:cNvSpPr>
-          <p:nvPr/>
-        </p:nvSpPr>
-        <p:spPr>
-          <a:xfrm>
-            <a:off x="11144250" y="6496050"/>
-            <a:ext cx="381000" cy="228600"/>
-          </a:xfrm>
-          <a:prstGeom prst="rect">
-            <a:avLst/>
-          </a:prstGeom>
-          <a:noFill/>
-          <a:ln w="0">
-            <a:noFill/>
-            <a:prstDash val="solid"/>
-          </a:ln>
-        </p:spPr>
-        <p:txBody>
-          <a:bodyPr wrap="square" lIns="0" tIns="0" rIns="0" bIns="0" anchor="t">
-            <a:normAutofit/>
-          </a:bodyPr>
-          <a:lstStyle/>
-          <a:p>
-            <a:pPr algn="r">
-              <a:defRPr sz="900" b="1">
-                <a:solidFill>
-                  <a:srgbClr val="64748B"/>
-                </a:solidFill>
-              </a:defRPr>
-            </a:pPr>
-            <a:r>
-              <a:rPr sz="900" b="1">
-                <a:solidFill>
-                  <a:srgbClr val="64748B"/>
-                </a:solidFill>
-              </a:rPr>
-              <a:t>5</a:t>
-            </a:r>
-          </a:p>
-        </p:txBody>
-      </p:sp>
-    </p:spTree>
-    <p:extLst>
-      <p:ext uri="{BB962C8B-B14F-4D97-AF65-F5344CB8AC3E}">
-        <p14:creationId xmlns:p14="http://schemas.microsoft.com/office/powerpoint/2010/main" val="1473021361"/>
-      </p:ext>
-    </p:extLst>
-  </p:cSld>
-  <p:clrMapOvr>
-    <a:masterClrMapping/>
-  </p:clrMapOvr>
-</p:sld>
-</file>
-
-<file path=ppt/slides/slide6.xml><?xml version="1.0" encoding="utf-8"?>
 <p:sld xmlns:a="http://schemas.openxmlformats.org/drawingml/2006/main" xmlns:r="http://schemas.openxmlformats.org/officeDocument/2006/relationships" xmlns:p="http://schemas.openxmlformats.org/presentationml/2006/main">
   <p:cSld>
     <p:spTree>
@@ -10983,7 +11063,7 @@
                 <a:uFillTx/>
               </a:defRPr>
             </a:pPr>
-            <a:endParaRPr lang="fr-FR" sz="1800" b="0" i="0" u="none" strike="noStrike" kern="1200" cap="none" spc="0" baseline="0">
+            <a:endParaRPr lang="fr-FR" sz="1800" b="0" i="0" u="none" strike="noStrike" kern="1200" cap="none" spc="0" baseline="0" dirty="0">
               <a:solidFill>
                 <a:srgbClr val="000000"/>
               </a:solidFill>
@@ -11045,14 +11125,14 @@
               </a:defRPr>
             </a:pPr>
             <a:r>
-              <a:rPr lang="fr-FR" sz="1000" b="1" i="0" u="none" strike="noStrike" kern="1200" cap="none" spc="0" baseline="0">
+              <a:rPr lang="fr-FR" sz="1000" b="1" i="0" u="none" strike="noStrike" kern="1200" cap="none" spc="0" baseline="0" dirty="0">
                 <a:solidFill>
                   <a:srgbClr val="FFFFFF"/>
                 </a:solidFill>
                 <a:uFillTx/>
                 <a:latin typeface="Aptos"/>
               </a:rPr>
-              <a:t>BUILD STEP 4</a:t>
+              <a:t>BUILD STEP 3</a:t>
             </a:r>
           </a:p>
         </p:txBody>
@@ -12074,25 +12154,8 @@
                 <a:uFillTx/>
                 <a:latin typeface="Consolas" pitchFamily="49"/>
               </a:rPr>
-              <a:t> Heavy Industries Co. </a:t>
-            </a:r>
-            <a:r>
-              <a:rPr lang="fr-FR" sz="1000" b="0" i="0" u="none" strike="noStrike" kern="1200" cap="none" spc="0" baseline="0">
-                <a:solidFill>
-                  <a:srgbClr val="FFFFFF"/>
-                </a:solidFill>
-                <a:uFillTx/>
-                <a:latin typeface="Consolas" pitchFamily="49"/>
-              </a:rPr>
-              <a:t>Ltd« ,</a:t>
-            </a:r>
-            <a:endParaRPr lang="fr-FR" sz="1000" b="0" i="0" u="none" strike="noStrike" kern="1200" cap="none" spc="0" baseline="0" dirty="0">
-              <a:solidFill>
-                <a:srgbClr val="FFFFFF"/>
-              </a:solidFill>
-              <a:uFillTx/>
-              <a:latin typeface="Consolas" pitchFamily="49"/>
-            </a:endParaRPr>
+              <a:t> Heavy Industries Co. Ltd« ,</a:t>
+            </a:r>
           </a:p>
           <a:p>
             <a:pPr marL="0" marR="0" lvl="0" indent="0" algn="l" defTabSz="914400" rtl="0" fontAlgn="auto" hangingPunct="1">
@@ -14129,7 +14192,7 @@
                 <a:uFillTx/>
               </a:defRPr>
             </a:pPr>
-            <a:endParaRPr lang="fr-FR" sz="1800" b="0" i="0" u="none" strike="noStrike" kern="1200" cap="none" spc="0" baseline="0">
+            <a:endParaRPr lang="fr-FR" sz="1800" b="0" i="0" u="none" strike="noStrike" kern="1200" cap="none" spc="0" baseline="0" dirty="0">
               <a:solidFill>
                 <a:srgbClr val="FFFFFF"/>
               </a:solidFill>
@@ -15826,7 +15889,7 @@
 </p:sld>
 </file>
 
-<file path=ppt/slides/slide7.xml><?xml version="1.0" encoding="utf-8"?>
+<file path=ppt/slides/slide6.xml><?xml version="1.0" encoding="utf-8"?>
 <p:sld xmlns:a="http://schemas.openxmlformats.org/drawingml/2006/main" xmlns:r="http://schemas.openxmlformats.org/officeDocument/2006/relationships" xmlns:p="http://schemas.openxmlformats.org/presentationml/2006/main">
   <p:cSld>
     <p:spTree>
@@ -16113,14 +16176,14 @@
               </a:defRPr>
             </a:pPr>
             <a:r>
-              <a:rPr lang="fr-FR" sz="1000" b="1" i="0" u="none" strike="noStrike" kern="1200" cap="none" spc="0" baseline="0">
+              <a:rPr lang="fr-FR" sz="1000" b="1" i="0" u="none" strike="noStrike" kern="1200" cap="none" spc="0" baseline="0" dirty="0">
                 <a:solidFill>
                   <a:srgbClr val="FFFFFF"/>
                 </a:solidFill>
                 <a:uFillTx/>
                 <a:latin typeface="Aptos"/>
               </a:rPr>
-              <a:t>BUILD STEP 4</a:t>
+              <a:t>BUILD STEP 3</a:t>
             </a:r>
           </a:p>
         </p:txBody>
@@ -17577,7 +17640,7 @@
 </p:sld>
 </file>
 
-<file path=ppt/slides/slide8.xml><?xml version="1.0" encoding="utf-8"?>
+<file path=ppt/slides/slide7.xml><?xml version="1.0" encoding="utf-8"?>
 <p:sld xmlns:a="http://schemas.openxmlformats.org/drawingml/2006/main" xmlns:r="http://schemas.openxmlformats.org/officeDocument/2006/relationships" xmlns:p="http://schemas.openxmlformats.org/presentationml/2006/main">
   <p:cSld>
     <p:spTree>
@@ -17802,7 +17865,7 @@
                 <a:uFillTx/>
               </a:defRPr>
             </a:pPr>
-            <a:endParaRPr lang="fr-FR" sz="1800" b="0" i="0" u="none" strike="noStrike" kern="1200" cap="none" spc="0" baseline="0">
+            <a:endParaRPr lang="fr-FR" sz="1800" b="0" i="0" u="none" strike="noStrike" kern="1200" cap="none" spc="0" baseline="0" dirty="0">
               <a:solidFill>
                 <a:srgbClr val="000000"/>
               </a:solidFill>
@@ -17864,14 +17927,14 @@
               </a:defRPr>
             </a:pPr>
             <a:r>
-              <a:rPr lang="fr-FR" sz="1000" b="1" i="0" u="none" strike="noStrike" kern="1200" cap="none" spc="0" baseline="0">
+              <a:rPr lang="fr-FR" sz="1000" b="1" i="0" u="none" strike="noStrike" kern="1200" cap="none" spc="0" baseline="0" dirty="0">
                 <a:solidFill>
                   <a:srgbClr val="FFFFFF"/>
                 </a:solidFill>
                 <a:uFillTx/>
                 <a:latin typeface="Aptos"/>
               </a:rPr>
-              <a:t>BUILD STEP 4</a:t>
+              <a:t>BUILD STEP 3</a:t>
             </a:r>
           </a:p>
         </p:txBody>
@@ -20299,7 +20362,7 @@
 </p:sld>
 </file>
 
-<file path=ppt/slides/slide9.xml><?xml version="1.0" encoding="utf-8"?>
+<file path=ppt/slides/slide8.xml><?xml version="1.0" encoding="utf-8"?>
 <p:sld xmlns:a="http://schemas.openxmlformats.org/drawingml/2006/main" xmlns:r="http://schemas.openxmlformats.org/officeDocument/2006/relationships" xmlns:p="http://schemas.openxmlformats.org/presentationml/2006/main">
   <p:cSld>
     <p:bg>
@@ -20326,10 +20389,10 @@
       </p:grpSpPr>
       <p:sp>
         <p:nvSpPr>
-          <p:cNvPr id="6" name="Rectangle : coins arrondis 5">
-            <a:extLst>
-              <a:ext uri="{FF2B5EF4-FFF2-40B4-BE49-F238E27FC236}">
-                <a16:creationId xmlns:a16="http://schemas.microsoft.com/office/drawing/2014/main" id="{8632CCF5-8DD9-45C1-B944-8E9FB7AF9785}"/>
+          <p:cNvPr id="33" name="Rectangle : coins arrondis 32">
+            <a:extLst>
+              <a:ext uri="{FF2B5EF4-FFF2-40B4-BE49-F238E27FC236}">
+                <a16:creationId xmlns:a16="http://schemas.microsoft.com/office/drawing/2014/main" id="{C282679E-D6E3-4F3C-8AD5-CC8D1FBA7A57}"/>
               </a:ext>
             </a:extLst>
           </p:cNvPr>
@@ -20340,8 +20403,1146 @@
         </p:nvSpPr>
         <p:spPr>
           <a:xfrm>
-            <a:off x="571500" y="361950"/>
+            <a:off x="571500" y="425958"/>
             <a:ext cx="1619250" cy="285750"/>
+          </a:xfrm>
+          <a:prstGeom prst="roundRect">
+            <a:avLst>
+              <a:gd name="adj" fmla="val 50000"/>
+            </a:avLst>
+          </a:prstGeom>
+          <a:solidFill>
+            <a:srgbClr val="2553D6"/>
+          </a:solidFill>
+          <a:ln w="0">
+            <a:solidFill>
+              <a:srgbClr val="2553D6"/>
+            </a:solidFill>
+            <a:prstDash val="solid"/>
+          </a:ln>
+        </p:spPr>
+        <p:txBody>
+          <a:bodyPr/>
+          <a:lstStyle/>
+          <a:p>
+            <a:endParaRPr lang="fr-FR"/>
+          </a:p>
+        </p:txBody>
+      </p:sp>
+      <p:sp>
+        <p:nvSpPr>
+          <p:cNvPr id="2" name="Rectangle 1">
+            <a:extLst>
+              <a:ext uri="{FF2B5EF4-FFF2-40B4-BE49-F238E27FC236}">
+                <a16:creationId xmlns:a16="http://schemas.microsoft.com/office/drawing/2014/main" id="{42692C5F-7834-44D9-AB53-E31D041B1143}"/>
+              </a:ext>
+            </a:extLst>
+          </p:cNvPr>
+          <p:cNvSpPr>
+            <a:spLocks noGrp="1"/>
+          </p:cNvSpPr>
+          <p:nvPr/>
+        </p:nvSpPr>
+        <p:spPr>
+          <a:xfrm>
+            <a:off x="571500" y="444246"/>
+            <a:ext cx="1619250" cy="285750"/>
+          </a:xfrm>
+          <a:prstGeom prst="rect">
+            <a:avLst/>
+          </a:prstGeom>
+          <a:noFill/>
+          <a:ln w="0">
+            <a:noFill/>
+            <a:prstDash val="solid"/>
+          </a:ln>
+        </p:spPr>
+        <p:txBody>
+          <a:bodyPr wrap="square" lIns="76200" tIns="76200" rIns="76200" bIns="76200" anchor="ctr">
+            <a:normAutofit fontScale="90833" lnSpcReduction="20000"/>
+          </a:bodyPr>
+          <a:lstStyle/>
+          <a:p>
+            <a:pPr algn="ctr">
+              <a:defRPr sz="1050" b="1">
+                <a:solidFill>
+                  <a:srgbClr val="FFFFFF"/>
+                </a:solidFill>
+              </a:defRPr>
+            </a:pPr>
+            <a:r>
+              <a:rPr sz="1050" b="1" dirty="0">
+                <a:solidFill>
+                  <a:srgbClr val="FFFFFF"/>
+                </a:solidFill>
+              </a:rPr>
+              <a:t>BUILD STEP </a:t>
+            </a:r>
+            <a:r>
+              <a:rPr lang="fr-FR" sz="1050" b="1" dirty="0">
+                <a:solidFill>
+                  <a:srgbClr val="FFFFFF"/>
+                </a:solidFill>
+              </a:rPr>
+              <a:t>4</a:t>
+            </a:r>
+            <a:endParaRPr sz="1050" b="1" dirty="0">
+              <a:solidFill>
+                <a:srgbClr val="FFFFFF"/>
+              </a:solidFill>
+            </a:endParaRPr>
+          </a:p>
+        </p:txBody>
+      </p:sp>
+      <p:sp>
+        <p:nvSpPr>
+          <p:cNvPr id="3" name="Rectangle 2">
+            <a:extLst>
+              <a:ext uri="{FF2B5EF4-FFF2-40B4-BE49-F238E27FC236}">
+                <a16:creationId xmlns:a16="http://schemas.microsoft.com/office/drawing/2014/main" id="{90BC87C7-DDBC-44A5-89FD-D5A9E2F1357F}"/>
+              </a:ext>
+            </a:extLst>
+          </p:cNvPr>
+          <p:cNvSpPr>
+            <a:spLocks noGrp="1"/>
+          </p:cNvSpPr>
+          <p:nvPr/>
+        </p:nvSpPr>
+        <p:spPr>
+          <a:xfrm>
+            <a:off x="571500" y="862584"/>
+            <a:ext cx="11049000" cy="476250"/>
+          </a:xfrm>
+          <a:prstGeom prst="rect">
+            <a:avLst/>
+          </a:prstGeom>
+          <a:noFill/>
+          <a:ln w="0">
+            <a:noFill/>
+            <a:prstDash val="solid"/>
+          </a:ln>
+        </p:spPr>
+        <p:txBody>
+          <a:bodyPr wrap="square" lIns="0" tIns="0" rIns="0" bIns="0" anchor="t">
+            <a:normAutofit/>
+          </a:bodyPr>
+          <a:lstStyle/>
+          <a:p>
+            <a:pPr algn="l">
+              <a:defRPr sz="3000" b="1">
+                <a:solidFill>
+                  <a:srgbClr val="0F172A"/>
+                </a:solidFill>
+              </a:defRPr>
+            </a:pPr>
+            <a:r>
+              <a:rPr sz="3000" b="1" dirty="0">
+                <a:solidFill>
+                  <a:srgbClr val="0F172A"/>
+                </a:solidFill>
+              </a:rPr>
+              <a:t>Register the project once in project-config.js</a:t>
+            </a:r>
+          </a:p>
+        </p:txBody>
+      </p:sp>
+      <p:sp>
+        <p:nvSpPr>
+          <p:cNvPr id="4" name="Rectangle 3">
+            <a:extLst>
+              <a:ext uri="{FF2B5EF4-FFF2-40B4-BE49-F238E27FC236}">
+                <a16:creationId xmlns:a16="http://schemas.microsoft.com/office/drawing/2014/main" id="{4A759C8F-6AFF-4C64-BBB1-7A250DF5D613}"/>
+              </a:ext>
+            </a:extLst>
+          </p:cNvPr>
+          <p:cNvSpPr>
+            <a:spLocks noGrp="1"/>
+          </p:cNvSpPr>
+          <p:nvPr/>
+        </p:nvSpPr>
+        <p:spPr>
+          <a:xfrm>
+            <a:off x="571500" y="1400556"/>
+            <a:ext cx="11049000" cy="323850"/>
+          </a:xfrm>
+          <a:prstGeom prst="rect">
+            <a:avLst/>
+          </a:prstGeom>
+          <a:noFill/>
+          <a:ln w="0">
+            <a:noFill/>
+            <a:prstDash val="solid"/>
+          </a:ln>
+        </p:spPr>
+        <p:txBody>
+          <a:bodyPr wrap="square" lIns="0" tIns="0" rIns="0" bIns="0" anchor="t">
+            <a:normAutofit/>
+          </a:bodyPr>
+          <a:lstStyle/>
+          <a:p>
+            <a:pPr algn="l">
+              <a:defRPr sz="1350" b="0">
+                <a:solidFill>
+                  <a:srgbClr val="475569"/>
+                </a:solidFill>
+              </a:defRPr>
+            </a:pPr>
+            <a:r>
+              <a:rPr sz="1350" b="0" dirty="0">
+                <a:solidFill>
+                  <a:srgbClr val="475569"/>
+                </a:solidFill>
+              </a:rPr>
+              <a:t>This is the bridge between the dashboard block, the page URL, and the main JSON file.</a:t>
+            </a:r>
+          </a:p>
+        </p:txBody>
+      </p:sp>
+      <p:sp>
+        <p:nvSpPr>
+          <p:cNvPr id="5" name="Rectangle : coins arrondis 4">
+            <a:extLst>
+              <a:ext uri="{FF2B5EF4-FFF2-40B4-BE49-F238E27FC236}">
+                <a16:creationId xmlns:a16="http://schemas.microsoft.com/office/drawing/2014/main" id="{C197C6ED-5835-4687-A6B0-FD7DF04B089A}"/>
+              </a:ext>
+            </a:extLst>
+          </p:cNvPr>
+          <p:cNvSpPr>
+            <a:spLocks noGrp="1"/>
+          </p:cNvSpPr>
+          <p:nvPr/>
+        </p:nvSpPr>
+        <p:spPr>
+          <a:xfrm>
+            <a:off x="571500" y="2258568"/>
+            <a:ext cx="4476750" cy="3086100"/>
+          </a:xfrm>
+          <a:prstGeom prst="roundRect">
+            <a:avLst>
+              <a:gd name="adj" fmla="val 4938"/>
+            </a:avLst>
+          </a:prstGeom>
+          <a:solidFill>
+            <a:srgbClr val="0B1220"/>
+          </a:solidFill>
+          <a:ln w="9525">
+            <a:solidFill>
+              <a:srgbClr val="1E293B"/>
+            </a:solidFill>
+            <a:prstDash val="solid"/>
+          </a:ln>
+        </p:spPr>
+        <p:style>
+          <a:lnRef idx="0">
+            <a:scrgbClr r="0" g="0" b="0"/>
+          </a:lnRef>
+          <a:fillRef idx="0">
+            <a:scrgbClr r="0" g="0" b="0"/>
+          </a:fillRef>
+          <a:effectRef idx="4">
+            <a:scrgbClr r="0" g="0" b="0"/>
+          </a:effectRef>
+          <a:fontRef idx="major"/>
+        </p:style>
+        <p:txBody>
+          <a:bodyPr/>
+          <a:lstStyle/>
+          <a:p>
+            <a:endParaRPr lang="fr-FR"/>
+          </a:p>
+        </p:txBody>
+      </p:sp>
+      <p:sp>
+        <p:nvSpPr>
+          <p:cNvPr id="6" name="Rectangle 5">
+            <a:extLst>
+              <a:ext uri="{FF2B5EF4-FFF2-40B4-BE49-F238E27FC236}">
+                <a16:creationId xmlns:a16="http://schemas.microsoft.com/office/drawing/2014/main" id="{C022F649-5821-44FA-95DA-2AEB10DB7F39}"/>
+              </a:ext>
+            </a:extLst>
+          </p:cNvPr>
+          <p:cNvSpPr>
+            <a:spLocks noGrp="1"/>
+          </p:cNvSpPr>
+          <p:nvPr/>
+        </p:nvSpPr>
+        <p:spPr>
+          <a:xfrm>
+            <a:off x="742950" y="2410968"/>
+            <a:ext cx="4133850" cy="2781300"/>
+          </a:xfrm>
+          <a:prstGeom prst="rect">
+            <a:avLst/>
+          </a:prstGeom>
+          <a:noFill/>
+          <a:ln w="0">
+            <a:noFill/>
+            <a:prstDash val="solid"/>
+          </a:ln>
+        </p:spPr>
+        <p:txBody>
+          <a:bodyPr wrap="square" lIns="0" tIns="0" rIns="0" bIns="0" anchor="t">
+            <a:normAutofit/>
+          </a:bodyPr>
+          <a:lstStyle/>
+          <a:p>
+            <a:pPr algn="l">
+              <a:defRPr sz="1500" b="0">
+                <a:solidFill>
+                  <a:srgbClr val="E2E8F0"/>
+                </a:solidFill>
+                <a:latin typeface="Consolas"/>
+                <a:ea typeface="Consolas"/>
+                <a:cs typeface="Consolas"/>
+              </a:defRPr>
+            </a:pPr>
+            <a:r>
+              <a:rPr sz="1500" b="0" dirty="0">
+                <a:solidFill>
+                  <a:srgbClr val="E2E8F0"/>
+                </a:solidFill>
+                <a:latin typeface="Consolas"/>
+                <a:ea typeface="Consolas"/>
+                <a:cs typeface="Consolas"/>
+              </a:rPr>
+              <a:t>{</a:t>
+            </a:r>
+          </a:p>
+          <a:p>
+            <a:pPr algn="l">
+              <a:defRPr sz="1500" b="0">
+                <a:solidFill>
+                  <a:srgbClr val="E2E8F0"/>
+                </a:solidFill>
+                <a:latin typeface="Consolas"/>
+                <a:ea typeface="Consolas"/>
+                <a:cs typeface="Consolas"/>
+              </a:defRPr>
+            </a:pPr>
+            <a:r>
+              <a:rPr sz="1500" b="0" dirty="0">
+                <a:solidFill>
+                  <a:srgbClr val="E2E8F0"/>
+                </a:solidFill>
+                <a:latin typeface="Consolas"/>
+                <a:ea typeface="Consolas"/>
+                <a:cs typeface="Consolas"/>
+              </a:rPr>
+              <a:t>  id: "</a:t>
+            </a:r>
+            <a:r>
+              <a:rPr lang="fr-FR" sz="1500" b="0" dirty="0" err="1">
+                <a:solidFill>
+                  <a:srgbClr val="E2E8F0"/>
+                </a:solidFill>
+                <a:latin typeface="Consolas"/>
+                <a:ea typeface="Consolas"/>
+                <a:cs typeface="Consolas"/>
+              </a:rPr>
+              <a:t>example_name</a:t>
+            </a:r>
+            <a:r>
+              <a:rPr sz="1500" b="0" dirty="0">
+                <a:solidFill>
+                  <a:srgbClr val="E2E8F0"/>
+                </a:solidFill>
+                <a:latin typeface="Consolas"/>
+                <a:ea typeface="Consolas"/>
+                <a:cs typeface="Consolas"/>
+              </a:rPr>
+              <a:t>",</a:t>
+            </a:r>
+          </a:p>
+          <a:p>
+            <a:pPr algn="l">
+              <a:defRPr sz="1500" b="0">
+                <a:solidFill>
+                  <a:srgbClr val="E2E8F0"/>
+                </a:solidFill>
+                <a:latin typeface="Consolas"/>
+                <a:ea typeface="Consolas"/>
+                <a:cs typeface="Consolas"/>
+              </a:defRPr>
+            </a:pPr>
+            <a:r>
+              <a:rPr sz="1500" b="0" dirty="0">
+                <a:solidFill>
+                  <a:srgbClr val="E2E8F0"/>
+                </a:solidFill>
+                <a:latin typeface="Consolas"/>
+                <a:ea typeface="Consolas"/>
+                <a:cs typeface="Consolas"/>
+              </a:rPr>
+              <a:t>  name: "</a:t>
+            </a:r>
+            <a:r>
+              <a:rPr lang="fr-FR" sz="1500" b="0" dirty="0">
+                <a:solidFill>
+                  <a:srgbClr val="E2E8F0"/>
+                </a:solidFill>
+                <a:latin typeface="Consolas"/>
+                <a:ea typeface="Consolas"/>
+                <a:cs typeface="Consolas"/>
+              </a:rPr>
+              <a:t>VESSEL_NAME</a:t>
+            </a:r>
+            <a:r>
+              <a:rPr sz="1500" b="0" dirty="0">
+                <a:solidFill>
+                  <a:srgbClr val="E2E8F0"/>
+                </a:solidFill>
+                <a:latin typeface="Consolas"/>
+                <a:ea typeface="Consolas"/>
+                <a:cs typeface="Consolas"/>
+              </a:rPr>
+              <a:t>",</a:t>
+            </a:r>
+          </a:p>
+          <a:p>
+            <a:pPr algn="l">
+              <a:defRPr sz="1500" b="0">
+                <a:solidFill>
+                  <a:srgbClr val="E2E8F0"/>
+                </a:solidFill>
+                <a:latin typeface="Consolas"/>
+                <a:ea typeface="Consolas"/>
+                <a:cs typeface="Consolas"/>
+              </a:defRPr>
+            </a:pPr>
+            <a:r>
+              <a:rPr sz="1500" b="0" dirty="0">
+                <a:solidFill>
+                  <a:srgbClr val="E2E8F0"/>
+                </a:solidFill>
+                <a:latin typeface="Consolas"/>
+                <a:ea typeface="Consolas"/>
+                <a:cs typeface="Consolas"/>
+              </a:rPr>
+              <a:t>  </a:t>
+            </a:r>
+            <a:r>
+              <a:rPr sz="1500" b="0" dirty="0" err="1">
+                <a:solidFill>
+                  <a:srgbClr val="E2E8F0"/>
+                </a:solidFill>
+                <a:latin typeface="Consolas"/>
+                <a:ea typeface="Consolas"/>
+                <a:cs typeface="Consolas"/>
+              </a:rPr>
+              <a:t>dashboardListId</a:t>
+            </a:r>
+            <a:r>
+              <a:rPr sz="1500" b="0" dirty="0">
+                <a:solidFill>
+                  <a:srgbClr val="E2E8F0"/>
+                </a:solidFill>
+                <a:latin typeface="Consolas"/>
+                <a:ea typeface="Consolas"/>
+                <a:cs typeface="Consolas"/>
+              </a:rPr>
+              <a:t>: </a:t>
+            </a:r>
+            <a:r>
+              <a:rPr sz="1500" b="0" dirty="0">
+                <a:solidFill>
+                  <a:srgbClr val="E2E8F0"/>
+                </a:solidFill>
+                <a:highlight>
+                  <a:srgbClr val="FF0000"/>
+                </a:highlight>
+                <a:latin typeface="Consolas"/>
+                <a:ea typeface="Consolas"/>
+                <a:cs typeface="Consolas"/>
+              </a:rPr>
+              <a:t>"</a:t>
+            </a:r>
+            <a:r>
+              <a:rPr lang="fr-FR" sz="1500" dirty="0" err="1">
+                <a:solidFill>
+                  <a:srgbClr val="E2E8F0"/>
+                </a:solidFill>
+                <a:highlight>
+                  <a:srgbClr val="FF0000"/>
+                </a:highlight>
+                <a:latin typeface="Consolas"/>
+                <a:ea typeface="Consolas"/>
+                <a:cs typeface="Consolas"/>
+              </a:rPr>
+              <a:t>example</a:t>
+            </a:r>
+            <a:r>
+              <a:rPr sz="1500" b="0" dirty="0">
+                <a:solidFill>
+                  <a:srgbClr val="E2E8F0"/>
+                </a:solidFill>
+                <a:highlight>
+                  <a:srgbClr val="FF0000"/>
+                </a:highlight>
+                <a:latin typeface="Consolas"/>
+                <a:ea typeface="Consolas"/>
+                <a:cs typeface="Consolas"/>
+              </a:rPr>
+              <a:t>-vessel-links"</a:t>
+            </a:r>
+            <a:r>
+              <a:rPr sz="1500" b="0" dirty="0">
+                <a:solidFill>
+                  <a:srgbClr val="E2E8F0"/>
+                </a:solidFill>
+                <a:latin typeface="Consolas"/>
+                <a:ea typeface="Consolas"/>
+                <a:cs typeface="Consolas"/>
+              </a:rPr>
+              <a:t>,</a:t>
+            </a:r>
+          </a:p>
+          <a:p>
+            <a:pPr algn="l">
+              <a:defRPr sz="1500" b="0">
+                <a:solidFill>
+                  <a:srgbClr val="E2E8F0"/>
+                </a:solidFill>
+                <a:latin typeface="Consolas"/>
+                <a:ea typeface="Consolas"/>
+                <a:cs typeface="Consolas"/>
+              </a:defRPr>
+            </a:pPr>
+            <a:r>
+              <a:rPr sz="1500" b="0" dirty="0">
+                <a:solidFill>
+                  <a:srgbClr val="E2E8F0"/>
+                </a:solidFill>
+                <a:latin typeface="Consolas"/>
+                <a:ea typeface="Consolas"/>
+                <a:cs typeface="Consolas"/>
+              </a:rPr>
+              <a:t>  </a:t>
+            </a:r>
+            <a:r>
+              <a:rPr sz="1500" b="0" dirty="0" err="1">
+                <a:solidFill>
+                  <a:srgbClr val="E2E8F0"/>
+                </a:solidFill>
+                <a:latin typeface="Consolas"/>
+                <a:ea typeface="Consolas"/>
+                <a:cs typeface="Consolas"/>
+              </a:rPr>
+              <a:t>jsonPath</a:t>
+            </a:r>
+            <a:r>
+              <a:rPr sz="1500" b="0" dirty="0">
+                <a:solidFill>
+                  <a:srgbClr val="E2E8F0"/>
+                </a:solidFill>
+                <a:latin typeface="Consolas"/>
+                <a:ea typeface="Consolas"/>
+                <a:cs typeface="Consolas"/>
+              </a:rPr>
+              <a:t>: "Projects/</a:t>
+            </a:r>
+            <a:r>
+              <a:rPr lang="fr-FR" sz="1500" dirty="0" err="1">
+                <a:solidFill>
+                  <a:srgbClr val="E2E8F0"/>
+                </a:solidFill>
+                <a:latin typeface="Consolas"/>
+                <a:ea typeface="Consolas"/>
+                <a:cs typeface="Consolas"/>
+              </a:rPr>
+              <a:t>project_Name</a:t>
+            </a:r>
+            <a:r>
+              <a:rPr sz="1500" b="0" dirty="0">
+                <a:solidFill>
+                  <a:srgbClr val="E2E8F0"/>
+                </a:solidFill>
+                <a:latin typeface="Consolas"/>
+                <a:ea typeface="Consolas"/>
+                <a:cs typeface="Consolas"/>
+              </a:rPr>
+              <a:t>/</a:t>
+            </a:r>
+            <a:r>
+              <a:rPr lang="fr-FR" sz="1500" b="0" dirty="0" err="1">
+                <a:solidFill>
+                  <a:srgbClr val="E2E8F0"/>
+                </a:solidFill>
+                <a:latin typeface="Consolas"/>
+                <a:ea typeface="Consolas"/>
+                <a:cs typeface="Consolas"/>
+              </a:rPr>
+              <a:t>vessel_Name</a:t>
+            </a:r>
+            <a:r>
+              <a:rPr sz="1500" b="0" dirty="0">
+                <a:solidFill>
+                  <a:srgbClr val="E2E8F0"/>
+                </a:solidFill>
+                <a:latin typeface="Consolas"/>
+                <a:ea typeface="Consolas"/>
+                <a:cs typeface="Consolas"/>
+              </a:rPr>
+              <a:t>/JSON/</a:t>
+            </a:r>
+            <a:r>
+              <a:rPr lang="fr-FR" sz="1500" b="0" dirty="0">
+                <a:solidFill>
+                  <a:srgbClr val="E2E8F0"/>
+                </a:solidFill>
+                <a:latin typeface="Consolas"/>
+                <a:ea typeface="Consolas"/>
+                <a:cs typeface="Consolas"/>
+              </a:rPr>
+              <a:t>EXAMPLE</a:t>
+            </a:r>
+            <a:r>
+              <a:rPr sz="1500" b="0" dirty="0">
+                <a:solidFill>
+                  <a:srgbClr val="E2E8F0"/>
+                </a:solidFill>
+                <a:latin typeface="Consolas"/>
+                <a:ea typeface="Consolas"/>
+                <a:cs typeface="Consolas"/>
+              </a:rPr>
+              <a:t>.</a:t>
+            </a:r>
+            <a:r>
+              <a:rPr sz="1500" b="0" dirty="0" err="1">
+                <a:solidFill>
+                  <a:srgbClr val="E2E8F0"/>
+                </a:solidFill>
+                <a:latin typeface="Consolas"/>
+                <a:ea typeface="Consolas"/>
+                <a:cs typeface="Consolas"/>
+              </a:rPr>
+              <a:t>json</a:t>
+            </a:r>
+            <a:r>
+              <a:rPr sz="1500" b="0" dirty="0">
+                <a:solidFill>
+                  <a:srgbClr val="E2E8F0"/>
+                </a:solidFill>
+                <a:latin typeface="Consolas"/>
+                <a:ea typeface="Consolas"/>
+                <a:cs typeface="Consolas"/>
+              </a:rPr>
+              <a:t>"</a:t>
+            </a:r>
+          </a:p>
+          <a:p>
+            <a:pPr algn="l">
+              <a:defRPr sz="1500" b="0">
+                <a:solidFill>
+                  <a:srgbClr val="E2E8F0"/>
+                </a:solidFill>
+                <a:latin typeface="Consolas"/>
+                <a:ea typeface="Consolas"/>
+                <a:cs typeface="Consolas"/>
+              </a:defRPr>
+            </a:pPr>
+            <a:r>
+              <a:rPr sz="1500" b="0" dirty="0">
+                <a:solidFill>
+                  <a:srgbClr val="E2E8F0"/>
+                </a:solidFill>
+                <a:latin typeface="Consolas"/>
+                <a:ea typeface="Consolas"/>
+                <a:cs typeface="Consolas"/>
+              </a:rPr>
+              <a:t>}</a:t>
+            </a:r>
+          </a:p>
+        </p:txBody>
+      </p:sp>
+      <p:sp>
+        <p:nvSpPr>
+          <p:cNvPr id="7" name="Rectangle : coins arrondis 6">
+            <a:extLst>
+              <a:ext uri="{FF2B5EF4-FFF2-40B4-BE49-F238E27FC236}">
+                <a16:creationId xmlns:a16="http://schemas.microsoft.com/office/drawing/2014/main" id="{49BE4D16-99C1-481C-B09F-F5784EF8BB16}"/>
+              </a:ext>
+            </a:extLst>
+          </p:cNvPr>
+          <p:cNvSpPr>
+            <a:spLocks noGrp="1"/>
+          </p:cNvSpPr>
+          <p:nvPr/>
+        </p:nvSpPr>
+        <p:spPr>
+          <a:xfrm>
+            <a:off x="5391150" y="2258568"/>
+            <a:ext cx="2724150" cy="1143000"/>
+          </a:xfrm>
+          <a:prstGeom prst="roundRect">
+            <a:avLst>
+              <a:gd name="adj" fmla="val 13333"/>
+            </a:avLst>
+          </a:prstGeom>
+          <a:solidFill>
+            <a:srgbClr val="FFFFFF"/>
+          </a:solidFill>
+          <a:ln w="9525">
+            <a:solidFill>
+              <a:srgbClr val="E2E8F0"/>
+            </a:solidFill>
+            <a:prstDash val="solid"/>
+          </a:ln>
+        </p:spPr>
+        <p:style>
+          <a:lnRef idx="0">
+            <a:scrgbClr r="0" g="0" b="0"/>
+          </a:lnRef>
+          <a:fillRef idx="0">
+            <a:scrgbClr r="0" g="0" b="0"/>
+          </a:fillRef>
+          <a:effectRef idx="4">
+            <a:scrgbClr r="0" g="0" b="0"/>
+          </a:effectRef>
+          <a:fontRef idx="major"/>
+        </p:style>
+        <p:txBody>
+          <a:bodyPr/>
+          <a:lstStyle/>
+          <a:p>
+            <a:endParaRPr lang="fr-FR"/>
+          </a:p>
+        </p:txBody>
+      </p:sp>
+      <p:sp>
+        <p:nvSpPr>
+          <p:cNvPr id="8" name="Rectangle : coins arrondis 7">
+            <a:extLst>
+              <a:ext uri="{FF2B5EF4-FFF2-40B4-BE49-F238E27FC236}">
+                <a16:creationId xmlns:a16="http://schemas.microsoft.com/office/drawing/2014/main" id="{BB2DA3EF-D615-4FA4-8711-FE6CAB004134}"/>
+              </a:ext>
+            </a:extLst>
+          </p:cNvPr>
+          <p:cNvSpPr>
+            <a:spLocks noGrp="1"/>
+          </p:cNvSpPr>
+          <p:nvPr/>
+        </p:nvSpPr>
+        <p:spPr>
+          <a:xfrm>
+            <a:off x="5543550" y="2410968"/>
+            <a:ext cx="1162050" cy="247650"/>
+          </a:xfrm>
+          <a:prstGeom prst="roundRect">
+            <a:avLst>
+              <a:gd name="adj" fmla="val 50000"/>
+            </a:avLst>
+          </a:prstGeom>
+          <a:solidFill>
+            <a:srgbClr val="2553D6"/>
+          </a:solidFill>
+          <a:ln w="0">
+            <a:solidFill>
+              <a:srgbClr val="2553D6"/>
+            </a:solidFill>
+            <a:prstDash val="solid"/>
+          </a:ln>
+        </p:spPr>
+        <p:txBody>
+          <a:bodyPr/>
+          <a:lstStyle/>
+          <a:p>
+            <a:endParaRPr lang="fr-FR"/>
+          </a:p>
+        </p:txBody>
+      </p:sp>
+      <p:sp>
+        <p:nvSpPr>
+          <p:cNvPr id="9" name="Rectangle 8">
+            <a:extLst>
+              <a:ext uri="{FF2B5EF4-FFF2-40B4-BE49-F238E27FC236}">
+                <a16:creationId xmlns:a16="http://schemas.microsoft.com/office/drawing/2014/main" id="{A52142E5-B6BA-4933-B827-BE38B048D188}"/>
+              </a:ext>
+            </a:extLst>
+          </p:cNvPr>
+          <p:cNvSpPr>
+            <a:spLocks noGrp="1"/>
+          </p:cNvSpPr>
+          <p:nvPr/>
+        </p:nvSpPr>
+        <p:spPr>
+          <a:xfrm>
+            <a:off x="5543550" y="2410968"/>
+            <a:ext cx="1162050" cy="247650"/>
+          </a:xfrm>
+          <a:prstGeom prst="rect">
+            <a:avLst/>
+          </a:prstGeom>
+          <a:noFill/>
+          <a:ln w="0">
+            <a:noFill/>
+            <a:prstDash val="solid"/>
+          </a:ln>
+        </p:spPr>
+        <p:txBody>
+          <a:bodyPr wrap="square" lIns="76200" tIns="76200" rIns="76200" bIns="76200" anchor="ctr">
+            <a:noAutofit/>
+          </a:bodyPr>
+          <a:lstStyle/>
+          <a:p>
+            <a:pPr algn="ctr">
+              <a:defRPr sz="1050" b="1">
+                <a:solidFill>
+                  <a:srgbClr val="FFFFFF"/>
+                </a:solidFill>
+              </a:defRPr>
+            </a:pPr>
+            <a:r>
+              <a:rPr sz="1200" b="1" dirty="0">
+                <a:solidFill>
+                  <a:srgbClr val="FFFFFF"/>
+                </a:solidFill>
+              </a:rPr>
+              <a:t>id</a:t>
+            </a:r>
+          </a:p>
+        </p:txBody>
+      </p:sp>
+      <p:sp>
+        <p:nvSpPr>
+          <p:cNvPr id="10" name="Rectangle 9">
+            <a:extLst>
+              <a:ext uri="{FF2B5EF4-FFF2-40B4-BE49-F238E27FC236}">
+                <a16:creationId xmlns:a16="http://schemas.microsoft.com/office/drawing/2014/main" id="{4F1652FE-DB40-45C2-B368-225D58FF8046}"/>
+              </a:ext>
+            </a:extLst>
+          </p:cNvPr>
+          <p:cNvSpPr>
+            <a:spLocks noGrp="1"/>
+          </p:cNvSpPr>
+          <p:nvPr/>
+        </p:nvSpPr>
+        <p:spPr>
+          <a:xfrm>
+            <a:off x="5543550" y="2772918"/>
+            <a:ext cx="2419350" cy="495300"/>
+          </a:xfrm>
+          <a:prstGeom prst="rect">
+            <a:avLst/>
+          </a:prstGeom>
+          <a:noFill/>
+          <a:ln w="0">
+            <a:noFill/>
+            <a:prstDash val="solid"/>
+          </a:ln>
+        </p:spPr>
+        <p:txBody>
+          <a:bodyPr wrap="square" lIns="0" tIns="0" rIns="0" bIns="0" anchor="t">
+            <a:normAutofit/>
+          </a:bodyPr>
+          <a:lstStyle/>
+          <a:p>
+            <a:pPr algn="l">
+              <a:defRPr sz="1200" b="0">
+                <a:solidFill>
+                  <a:srgbClr val="334155"/>
+                </a:solidFill>
+              </a:defRPr>
+            </a:pPr>
+            <a:r>
+              <a:rPr sz="1200" b="0" dirty="0">
+                <a:solidFill>
+                  <a:srgbClr val="334155"/>
+                </a:solidFill>
+              </a:rPr>
+              <a:t>Unique key used in the URL.</a:t>
+            </a:r>
+          </a:p>
+          <a:p>
+            <a:pPr algn="l">
+              <a:defRPr sz="1200" b="0">
+                <a:solidFill>
+                  <a:srgbClr val="334155"/>
+                </a:solidFill>
+              </a:defRPr>
+            </a:pPr>
+            <a:r>
+              <a:rPr sz="1200" b="0" dirty="0">
+                <a:solidFill>
+                  <a:srgbClr val="334155"/>
+                </a:solidFill>
+              </a:rPr>
+              <a:t>Example: project=atlas</a:t>
+            </a:r>
+          </a:p>
+        </p:txBody>
+      </p:sp>
+      <p:sp>
+        <p:nvSpPr>
+          <p:cNvPr id="11" name="Rectangle : coins arrondis 10">
+            <a:extLst>
+              <a:ext uri="{FF2B5EF4-FFF2-40B4-BE49-F238E27FC236}">
+                <a16:creationId xmlns:a16="http://schemas.microsoft.com/office/drawing/2014/main" id="{575B6E37-095D-4C9B-ABF6-53B06A9290BE}"/>
+              </a:ext>
+            </a:extLst>
+          </p:cNvPr>
+          <p:cNvSpPr>
+            <a:spLocks noGrp="1"/>
+          </p:cNvSpPr>
+          <p:nvPr/>
+        </p:nvSpPr>
+        <p:spPr>
+          <a:xfrm>
+            <a:off x="8420100" y="2258568"/>
+            <a:ext cx="3105150" cy="1143000"/>
+          </a:xfrm>
+          <a:prstGeom prst="roundRect">
+            <a:avLst>
+              <a:gd name="adj" fmla="val 13333"/>
+            </a:avLst>
+          </a:prstGeom>
+          <a:solidFill>
+            <a:srgbClr val="FFFFFF"/>
+          </a:solidFill>
+          <a:ln w="9525">
+            <a:solidFill>
+              <a:srgbClr val="E2E8F0"/>
+            </a:solidFill>
+            <a:prstDash val="solid"/>
+          </a:ln>
+        </p:spPr>
+        <p:style>
+          <a:lnRef idx="0">
+            <a:scrgbClr r="0" g="0" b="0"/>
+          </a:lnRef>
+          <a:fillRef idx="0">
+            <a:scrgbClr r="0" g="0" b="0"/>
+          </a:fillRef>
+          <a:effectRef idx="4">
+            <a:scrgbClr r="0" g="0" b="0"/>
+          </a:effectRef>
+          <a:fontRef idx="major"/>
+        </p:style>
+        <p:txBody>
+          <a:bodyPr/>
+          <a:lstStyle/>
+          <a:p>
+            <a:endParaRPr lang="fr-FR"/>
+          </a:p>
+        </p:txBody>
+      </p:sp>
+      <p:sp>
+        <p:nvSpPr>
+          <p:cNvPr id="12" name="Rectangle : coins arrondis 11">
+            <a:extLst>
+              <a:ext uri="{FF2B5EF4-FFF2-40B4-BE49-F238E27FC236}">
+                <a16:creationId xmlns:a16="http://schemas.microsoft.com/office/drawing/2014/main" id="{01B5D687-48AB-4D74-966D-2815FC55ECFD}"/>
+              </a:ext>
+            </a:extLst>
+          </p:cNvPr>
+          <p:cNvSpPr>
+            <a:spLocks noGrp="1"/>
+          </p:cNvSpPr>
+          <p:nvPr/>
+        </p:nvSpPr>
+        <p:spPr>
+          <a:xfrm>
+            <a:off x="8572500" y="2410968"/>
+            <a:ext cx="1162050" cy="247650"/>
+          </a:xfrm>
+          <a:prstGeom prst="roundRect">
+            <a:avLst>
+              <a:gd name="adj" fmla="val 50000"/>
+            </a:avLst>
+          </a:prstGeom>
+          <a:solidFill>
+            <a:srgbClr val="0F766E"/>
+          </a:solidFill>
+          <a:ln w="0">
+            <a:solidFill>
+              <a:srgbClr val="0F766E"/>
+            </a:solidFill>
+            <a:prstDash val="solid"/>
+          </a:ln>
+        </p:spPr>
+        <p:txBody>
+          <a:bodyPr/>
+          <a:lstStyle/>
+          <a:p>
+            <a:endParaRPr lang="fr-FR"/>
+          </a:p>
+        </p:txBody>
+      </p:sp>
+      <p:sp>
+        <p:nvSpPr>
+          <p:cNvPr id="13" name="Rectangle 12">
+            <a:extLst>
+              <a:ext uri="{FF2B5EF4-FFF2-40B4-BE49-F238E27FC236}">
+                <a16:creationId xmlns:a16="http://schemas.microsoft.com/office/drawing/2014/main" id="{D039E889-660D-4CF8-898D-EE7ACDE9BB41}"/>
+              </a:ext>
+            </a:extLst>
+          </p:cNvPr>
+          <p:cNvSpPr>
+            <a:spLocks noGrp="1"/>
+          </p:cNvSpPr>
+          <p:nvPr/>
+        </p:nvSpPr>
+        <p:spPr>
+          <a:xfrm>
+            <a:off x="8572500" y="2410968"/>
+            <a:ext cx="1162050" cy="247650"/>
+          </a:xfrm>
+          <a:prstGeom prst="rect">
+            <a:avLst/>
+          </a:prstGeom>
+          <a:noFill/>
+          <a:ln w="0">
+            <a:noFill/>
+            <a:prstDash val="solid"/>
+          </a:ln>
+        </p:spPr>
+        <p:txBody>
+          <a:bodyPr wrap="square" lIns="76200" tIns="76200" rIns="76200" bIns="76200" anchor="ctr">
+            <a:noAutofit/>
+          </a:bodyPr>
+          <a:lstStyle/>
+          <a:p>
+            <a:pPr algn="ctr">
+              <a:defRPr sz="1050" b="1">
+                <a:solidFill>
+                  <a:srgbClr val="FFFFFF"/>
+                </a:solidFill>
+              </a:defRPr>
+            </a:pPr>
+            <a:r>
+              <a:rPr sz="1200" b="1" dirty="0">
+                <a:solidFill>
+                  <a:srgbClr val="FFFFFF"/>
+                </a:solidFill>
+              </a:rPr>
+              <a:t>name</a:t>
+            </a:r>
+          </a:p>
+        </p:txBody>
+      </p:sp>
+      <p:sp>
+        <p:nvSpPr>
+          <p:cNvPr id="14" name="Rectangle 13">
+            <a:extLst>
+              <a:ext uri="{FF2B5EF4-FFF2-40B4-BE49-F238E27FC236}">
+                <a16:creationId xmlns:a16="http://schemas.microsoft.com/office/drawing/2014/main" id="{1C050138-AAC8-46B8-9A90-FBFA7284F043}"/>
+              </a:ext>
+            </a:extLst>
+          </p:cNvPr>
+          <p:cNvSpPr>
+            <a:spLocks noGrp="1"/>
+          </p:cNvSpPr>
+          <p:nvPr/>
+        </p:nvSpPr>
+        <p:spPr>
+          <a:xfrm>
+            <a:off x="8572500" y="2772918"/>
+            <a:ext cx="2800350" cy="495300"/>
+          </a:xfrm>
+          <a:prstGeom prst="rect">
+            <a:avLst/>
+          </a:prstGeom>
+          <a:noFill/>
+          <a:ln w="0">
+            <a:noFill/>
+            <a:prstDash val="solid"/>
+          </a:ln>
+        </p:spPr>
+        <p:txBody>
+          <a:bodyPr wrap="square" lIns="0" tIns="0" rIns="0" bIns="0" anchor="t">
+            <a:normAutofit/>
+          </a:bodyPr>
+          <a:lstStyle/>
+          <a:p>
+            <a:pPr algn="l">
+              <a:defRPr sz="1200" b="0">
+                <a:solidFill>
+                  <a:srgbClr val="334155"/>
+                </a:solidFill>
+              </a:defRPr>
+            </a:pPr>
+            <a:r>
+              <a:rPr sz="1200" b="0">
+                <a:solidFill>
+                  <a:srgbClr val="334155"/>
+                </a:solidFill>
+              </a:rPr>
+              <a:t>Visible name shown in the dashboard and in the details page header.</a:t>
+            </a:r>
+          </a:p>
+        </p:txBody>
+      </p:sp>
+      <p:sp>
+        <p:nvSpPr>
+          <p:cNvPr id="15" name="Rectangle : coins arrondis 14">
+            <a:extLst>
+              <a:ext uri="{FF2B5EF4-FFF2-40B4-BE49-F238E27FC236}">
+                <a16:creationId xmlns:a16="http://schemas.microsoft.com/office/drawing/2014/main" id="{6B02FE4E-1A81-4988-AED8-C7B93572FF47}"/>
+              </a:ext>
+            </a:extLst>
+          </p:cNvPr>
+          <p:cNvSpPr>
+            <a:spLocks noGrp="1"/>
+          </p:cNvSpPr>
+          <p:nvPr/>
+        </p:nvSpPr>
+        <p:spPr>
+          <a:xfrm>
+            <a:off x="5391150" y="4177284"/>
+            <a:ext cx="2724150" cy="1143000"/>
+          </a:xfrm>
+          <a:prstGeom prst="roundRect">
+            <a:avLst>
+              <a:gd name="adj" fmla="val 13333"/>
+            </a:avLst>
+          </a:prstGeom>
+          <a:solidFill>
+            <a:srgbClr val="FFFFFF"/>
+          </a:solidFill>
+          <a:ln w="9525">
+            <a:solidFill>
+              <a:srgbClr val="E2E8F0"/>
+            </a:solidFill>
+            <a:prstDash val="solid"/>
+          </a:ln>
+        </p:spPr>
+        <p:style>
+          <a:lnRef idx="0">
+            <a:scrgbClr r="0" g="0" b="0"/>
+          </a:lnRef>
+          <a:fillRef idx="0">
+            <a:scrgbClr r="0" g="0" b="0"/>
+          </a:fillRef>
+          <a:effectRef idx="4">
+            <a:scrgbClr r="0" g="0" b="0"/>
+          </a:effectRef>
+          <a:fontRef idx="major"/>
+        </p:style>
+        <p:txBody>
+          <a:bodyPr/>
+          <a:lstStyle/>
+          <a:p>
+            <a:endParaRPr lang="fr-FR"/>
+          </a:p>
+        </p:txBody>
+      </p:sp>
+      <p:sp>
+        <p:nvSpPr>
+          <p:cNvPr id="16" name="Rectangle : coins arrondis 15">
+            <a:extLst>
+              <a:ext uri="{FF2B5EF4-FFF2-40B4-BE49-F238E27FC236}">
+                <a16:creationId xmlns:a16="http://schemas.microsoft.com/office/drawing/2014/main" id="{BECEBF19-FB5E-4A33-9301-6F340CB25B35}"/>
+              </a:ext>
+            </a:extLst>
+          </p:cNvPr>
+          <p:cNvSpPr>
+            <a:spLocks noGrp="1"/>
+          </p:cNvSpPr>
+          <p:nvPr/>
+        </p:nvSpPr>
+        <p:spPr>
+          <a:xfrm>
+            <a:off x="5543550" y="4329684"/>
+            <a:ext cx="1238250" cy="247650"/>
           </a:xfrm>
           <a:prstGeom prst="roundRect">
             <a:avLst>
@@ -20368,10 +21569,10 @@
       </p:sp>
       <p:sp>
         <p:nvSpPr>
-          <p:cNvPr id="2" name="Rectangle 1">
-            <a:extLst>
-              <a:ext uri="{FF2B5EF4-FFF2-40B4-BE49-F238E27FC236}">
-                <a16:creationId xmlns:a16="http://schemas.microsoft.com/office/drawing/2014/main" id="{45596445-8715-4F87-BAA7-753D327F4124}"/>
+          <p:cNvPr id="17" name="Rectangle 16">
+            <a:extLst>
+              <a:ext uri="{FF2B5EF4-FFF2-40B4-BE49-F238E27FC236}">
+                <a16:creationId xmlns:a16="http://schemas.microsoft.com/office/drawing/2014/main" id="{5FCC21A4-047B-4FF0-8E9C-0A7E64E21499}"/>
               </a:ext>
             </a:extLst>
           </p:cNvPr>
@@ -20382,8 +21583,8 @@
         </p:nvSpPr>
         <p:spPr>
           <a:xfrm>
-            <a:off x="571500" y="361950"/>
-            <a:ext cx="1619250" cy="285750"/>
+            <a:off x="5543550" y="4329684"/>
+            <a:ext cx="1238250" cy="247650"/>
           </a:xfrm>
           <a:prstGeom prst="rect">
             <a:avLst/>
@@ -20396,7 +21597,7 @@
         </p:spPr>
         <p:txBody>
           <a:bodyPr wrap="square" lIns="76200" tIns="76200" rIns="76200" bIns="76200" anchor="ctr">
-            <a:normAutofit fontScale="90833" lnSpcReduction="20000"/>
+            <a:noAutofit/>
           </a:bodyPr>
           <a:lstStyle/>
           <a:p>
@@ -20408,22 +21609,27 @@
               </a:defRPr>
             </a:pPr>
             <a:r>
-              <a:rPr sz="1050" b="1">
+              <a:rPr sz="1200" b="1" dirty="0" err="1">
                 <a:solidFill>
                   <a:srgbClr val="FFFFFF"/>
                 </a:solidFill>
               </a:rPr>
-              <a:t>REFERENCE</a:t>
-            </a:r>
-          </a:p>
-        </p:txBody>
-      </p:sp>
-      <p:sp>
-        <p:nvSpPr>
-          <p:cNvPr id="3" name="Rectangle 2">
-            <a:extLst>
-              <a:ext uri="{FF2B5EF4-FFF2-40B4-BE49-F238E27FC236}">
-                <a16:creationId xmlns:a16="http://schemas.microsoft.com/office/drawing/2014/main" id="{B49B2C93-F1A3-4330-93DD-98A1F4870E1C}"/>
+              <a:t>dashboardListId</a:t>
+            </a:r>
+            <a:endParaRPr sz="1200" b="1" dirty="0">
+              <a:solidFill>
+                <a:srgbClr val="FFFFFF"/>
+              </a:solidFill>
+            </a:endParaRPr>
+          </a:p>
+        </p:txBody>
+      </p:sp>
+      <p:sp>
+        <p:nvSpPr>
+          <p:cNvPr id="18" name="Rectangle 17">
+            <a:extLst>
+              <a:ext uri="{FF2B5EF4-FFF2-40B4-BE49-F238E27FC236}">
+                <a16:creationId xmlns:a16="http://schemas.microsoft.com/office/drawing/2014/main" id="{6BC423AF-FEB6-4CE1-B234-25AFF543E89E}"/>
               </a:ext>
             </a:extLst>
           </p:cNvPr>
@@ -20434,8 +21640,8 @@
         </p:nvSpPr>
         <p:spPr>
           <a:xfrm>
-            <a:off x="571500" y="762000"/>
-            <a:ext cx="11049000" cy="476250"/>
+            <a:off x="5543550" y="4691634"/>
+            <a:ext cx="2419350" cy="495300"/>
           </a:xfrm>
           <a:prstGeom prst="rect">
             <a:avLst/>
@@ -20453,29 +21659,29 @@
           <a:lstStyle/>
           <a:p>
             <a:pPr algn="l">
-              <a:defRPr sz="3000" b="1">
-                <a:solidFill>
-                  <a:srgbClr val="0F172A"/>
-                </a:solidFill>
-              </a:defRPr>
-            </a:pPr>
-            <a:r>
-              <a:rPr sz="3000" b="1">
-                <a:solidFill>
-                  <a:srgbClr val="0F172A"/>
-                </a:solidFill>
-              </a:rPr>
-              <a:t>DNV_path controls the right side and location controls the left side</a:t>
-            </a:r>
-          </a:p>
-        </p:txBody>
-      </p:sp>
-      <p:sp>
-        <p:nvSpPr>
-          <p:cNvPr id="4" name="Rectangle 3">
-            <a:extLst>
-              <a:ext uri="{FF2B5EF4-FFF2-40B4-BE49-F238E27FC236}">
-                <a16:creationId xmlns:a16="http://schemas.microsoft.com/office/drawing/2014/main" id="{B67EAF97-FA5C-47B0-87FC-DCB7A037B1D4}"/>
+              <a:defRPr sz="1200" b="0">
+                <a:solidFill>
+                  <a:srgbClr val="334155"/>
+                </a:solidFill>
+              </a:defRPr>
+            </a:pPr>
+            <a:r>
+              <a:rPr sz="1200" b="0" dirty="0">
+                <a:solidFill>
+                  <a:srgbClr val="334155"/>
+                </a:solidFill>
+              </a:rPr>
+              <a:t>Must match the empty list container id inside the dashboard block.</a:t>
+            </a:r>
+          </a:p>
+        </p:txBody>
+      </p:sp>
+      <p:sp>
+        <p:nvSpPr>
+          <p:cNvPr id="19" name="Rectangle : coins arrondis 18">
+            <a:extLst>
+              <a:ext uri="{FF2B5EF4-FFF2-40B4-BE49-F238E27FC236}">
+                <a16:creationId xmlns:a16="http://schemas.microsoft.com/office/drawing/2014/main" id="{76ECA61B-8C67-4A40-97F3-30625F914414}"/>
               </a:ext>
             </a:extLst>
           </p:cNvPr>
@@ -20486,64 +21692,12 @@
         </p:nvSpPr>
         <p:spPr>
           <a:xfrm>
-            <a:off x="571500" y="1235964"/>
-            <a:ext cx="11049000" cy="323850"/>
-          </a:xfrm>
-          <a:prstGeom prst="rect">
-            <a:avLst/>
-          </a:prstGeom>
-          <a:noFill/>
-          <a:ln w="0">
-            <a:noFill/>
-            <a:prstDash val="solid"/>
-          </a:ln>
-        </p:spPr>
-        <p:txBody>
-          <a:bodyPr wrap="square" lIns="0" tIns="0" rIns="0" bIns="0" anchor="t">
-            <a:normAutofit/>
-          </a:bodyPr>
-          <a:lstStyle/>
-          <a:p>
-            <a:pPr algn="l">
-              <a:defRPr sz="1350" b="0">
-                <a:solidFill>
-                  <a:srgbClr val="475569"/>
-                </a:solidFill>
-              </a:defRPr>
-            </a:pPr>
-            <a:r>
-              <a:rPr sz="1350" b="0" dirty="0">
-                <a:solidFill>
-                  <a:srgbClr val="475569"/>
-                </a:solidFill>
-              </a:rPr>
-              <a:t>These two fields connect one JSON object to both parts of the page.</a:t>
-            </a:r>
-          </a:p>
-        </p:txBody>
-      </p:sp>
-      <p:sp>
-        <p:nvSpPr>
-          <p:cNvPr id="5" name="Rectangle : coins arrondis 4">
-            <a:extLst>
-              <a:ext uri="{FF2B5EF4-FFF2-40B4-BE49-F238E27FC236}">
-                <a16:creationId xmlns:a16="http://schemas.microsoft.com/office/drawing/2014/main" id="{EA819926-948A-4865-8E6F-6DFBAD5E4688}"/>
-              </a:ext>
-            </a:extLst>
-          </p:cNvPr>
-          <p:cNvSpPr>
-            <a:spLocks noGrp="1"/>
-          </p:cNvSpPr>
-          <p:nvPr/>
-        </p:nvSpPr>
-        <p:spPr>
-          <a:xfrm>
-            <a:off x="571500" y="1973580"/>
-            <a:ext cx="7239000" cy="3733800"/>
+            <a:off x="8420100" y="4177284"/>
+            <a:ext cx="3105150" cy="1143000"/>
           </a:xfrm>
           <a:prstGeom prst="roundRect">
             <a:avLst>
-              <a:gd name="adj" fmla="val 4082"/>
+              <a:gd name="adj" fmla="val 13333"/>
             </a:avLst>
           </a:prstGeom>
           <a:solidFill>
@@ -20576,39 +21730,12 @@
           </a:p>
         </p:txBody>
       </p:sp>
-      <p:pic>
-        <p:nvPicPr>
-          <p:cNvPr id="30" name="Image 29"/>
-          <p:cNvPicPr>
-            <a:picLocks noChangeAspect="1"/>
-          </p:cNvPicPr>
-          <p:nvPr/>
-        </p:nvPicPr>
-        <p:blipFill>
-          <a:blip r:embed="rId3"/>
-          <a:srcRect t="6292" b="6292"/>
-          <a:stretch>
-            <a:fillRect/>
-          </a:stretch>
-        </p:blipFill>
-        <p:spPr>
-          <a:xfrm>
-            <a:off x="742950" y="2145030"/>
-            <a:ext cx="6896100" cy="3390900"/>
-          </a:xfrm>
-          <a:prstGeom prst="roundRect">
-            <a:avLst>
-              <a:gd name="adj" fmla="val 4494"/>
-            </a:avLst>
-          </a:prstGeom>
-        </p:spPr>
-      </p:pic>
-      <p:sp>
-        <p:nvSpPr>
-          <p:cNvPr id="7" name="Rectangle : coins arrondis 6">
-            <a:extLst>
-              <a:ext uri="{FF2B5EF4-FFF2-40B4-BE49-F238E27FC236}">
-                <a16:creationId xmlns:a16="http://schemas.microsoft.com/office/drawing/2014/main" id="{97F68AD6-2AAE-4526-BDB9-7FB6824AB04A}"/>
+      <p:sp>
+        <p:nvSpPr>
+          <p:cNvPr id="20" name="Rectangle : coins arrondis 19">
+            <a:extLst>
+              <a:ext uri="{FF2B5EF4-FFF2-40B4-BE49-F238E27FC236}">
+                <a16:creationId xmlns:a16="http://schemas.microsoft.com/office/drawing/2014/main" id="{0D33EF37-1F16-4DF9-9402-5627511565AB}"/>
               </a:ext>
             </a:extLst>
           </p:cNvPr>
@@ -20619,20 +21746,171 @@
         </p:nvSpPr>
         <p:spPr>
           <a:xfrm>
-            <a:off x="8096250" y="1790700"/>
-            <a:ext cx="3429000" cy="895350"/>
+            <a:off x="8572500" y="4329684"/>
+            <a:ext cx="1162050" cy="247650"/>
           </a:xfrm>
           <a:prstGeom prst="roundRect">
             <a:avLst>
-              <a:gd name="adj" fmla="val 17021"/>
+              <a:gd name="adj" fmla="val 50000"/>
             </a:avLst>
           </a:prstGeom>
           <a:solidFill>
-            <a:srgbClr val="FFFFFF"/>
+            <a:srgbClr val="D97706"/>
+          </a:solidFill>
+          <a:ln w="0">
+            <a:solidFill>
+              <a:srgbClr val="D97706"/>
+            </a:solidFill>
+            <a:prstDash val="solid"/>
+          </a:ln>
+        </p:spPr>
+        <p:txBody>
+          <a:bodyPr/>
+          <a:lstStyle/>
+          <a:p>
+            <a:endParaRPr lang="fr-FR" dirty="0"/>
+          </a:p>
+        </p:txBody>
+      </p:sp>
+      <p:sp>
+        <p:nvSpPr>
+          <p:cNvPr id="21" name="Rectangle 20">
+            <a:extLst>
+              <a:ext uri="{FF2B5EF4-FFF2-40B4-BE49-F238E27FC236}">
+                <a16:creationId xmlns:a16="http://schemas.microsoft.com/office/drawing/2014/main" id="{38A2B9FB-69AF-4A0B-843C-4E9CDE5DA358}"/>
+              </a:ext>
+            </a:extLst>
+          </p:cNvPr>
+          <p:cNvSpPr>
+            <a:spLocks noGrp="1"/>
+          </p:cNvSpPr>
+          <p:nvPr/>
+        </p:nvSpPr>
+        <p:spPr>
+          <a:xfrm>
+            <a:off x="8572500" y="4329684"/>
+            <a:ext cx="1162050" cy="247650"/>
+          </a:xfrm>
+          <a:prstGeom prst="rect">
+            <a:avLst/>
+          </a:prstGeom>
+          <a:noFill/>
+          <a:ln w="0">
+            <a:noFill/>
+            <a:prstDash val="solid"/>
+          </a:ln>
+        </p:spPr>
+        <p:txBody>
+          <a:bodyPr wrap="square" lIns="76200" tIns="76200" rIns="76200" bIns="76200" anchor="ctr">
+            <a:noAutofit/>
+          </a:bodyPr>
+          <a:lstStyle/>
+          <a:p>
+            <a:pPr algn="ctr">
+              <a:defRPr sz="1050" b="1">
+                <a:solidFill>
+                  <a:srgbClr val="FFFFFF"/>
+                </a:solidFill>
+              </a:defRPr>
+            </a:pPr>
+            <a:r>
+              <a:rPr sz="1200" b="1" dirty="0" err="1">
+                <a:solidFill>
+                  <a:srgbClr val="FFFFFF"/>
+                </a:solidFill>
+              </a:rPr>
+              <a:t>jsonPath</a:t>
+            </a:r>
+            <a:endParaRPr sz="1200" b="1" dirty="0">
+              <a:solidFill>
+                <a:srgbClr val="FFFFFF"/>
+              </a:solidFill>
+            </a:endParaRPr>
+          </a:p>
+        </p:txBody>
+      </p:sp>
+      <p:sp>
+        <p:nvSpPr>
+          <p:cNvPr id="22" name="Rectangle 21">
+            <a:extLst>
+              <a:ext uri="{FF2B5EF4-FFF2-40B4-BE49-F238E27FC236}">
+                <a16:creationId xmlns:a16="http://schemas.microsoft.com/office/drawing/2014/main" id="{EA26F69E-37AA-491D-8C75-FE16A0F15306}"/>
+              </a:ext>
+            </a:extLst>
+          </p:cNvPr>
+          <p:cNvSpPr>
+            <a:spLocks noGrp="1"/>
+          </p:cNvSpPr>
+          <p:nvPr/>
+        </p:nvSpPr>
+        <p:spPr>
+          <a:xfrm>
+            <a:off x="8572500" y="4691634"/>
+            <a:ext cx="2800350" cy="495300"/>
+          </a:xfrm>
+          <a:prstGeom prst="rect">
+            <a:avLst/>
+          </a:prstGeom>
+          <a:noFill/>
+          <a:ln w="0">
+            <a:noFill/>
+            <a:prstDash val="solid"/>
+          </a:ln>
+        </p:spPr>
+        <p:txBody>
+          <a:bodyPr wrap="square" lIns="0" tIns="0" rIns="0" bIns="0" anchor="t">
+            <a:normAutofit/>
+          </a:bodyPr>
+          <a:lstStyle/>
+          <a:p>
+            <a:pPr algn="l">
+              <a:defRPr sz="1200" b="0">
+                <a:solidFill>
+                  <a:srgbClr val="334155"/>
+                </a:solidFill>
+              </a:defRPr>
+            </a:pPr>
+            <a:r>
+              <a:rPr sz="1200" b="0">
+                <a:solidFill>
+                  <a:srgbClr val="334155"/>
+                </a:solidFill>
+              </a:rPr>
+              <a:t>Path to the single main JSON file for this project.</a:t>
+            </a:r>
+          </a:p>
+        </p:txBody>
+      </p:sp>
+      <p:sp>
+        <p:nvSpPr>
+          <p:cNvPr id="23" name="Rectangle : coins arrondis 22">
+            <a:extLst>
+              <a:ext uri="{FF2B5EF4-FFF2-40B4-BE49-F238E27FC236}">
+                <a16:creationId xmlns:a16="http://schemas.microsoft.com/office/drawing/2014/main" id="{C56F445E-6F04-4A0F-9143-2540B8764046}"/>
+              </a:ext>
+            </a:extLst>
+          </p:cNvPr>
+          <p:cNvSpPr>
+            <a:spLocks noGrp="1"/>
+          </p:cNvSpPr>
+          <p:nvPr/>
+        </p:nvSpPr>
+        <p:spPr>
+          <a:xfrm>
+            <a:off x="3031998" y="5971794"/>
+            <a:ext cx="6305550" cy="381000"/>
+          </a:xfrm>
+          <a:prstGeom prst="roundRect">
+            <a:avLst>
+              <a:gd name="adj" fmla="val 18182"/>
+            </a:avLst>
+          </a:prstGeom>
+          <a:solidFill>
+            <a:srgbClr val="EBFBF1"/>
           </a:solidFill>
           <a:ln w="9525">
             <a:solidFill>
-              <a:srgbClr val="E2E8F0"/>
+              <a:srgbClr val="A7F3D0"/>
             </a:solidFill>
             <a:prstDash val="solid"/>
           </a:ln>
@@ -20659,10 +21937,10 @@
       </p:sp>
       <p:sp>
         <p:nvSpPr>
-          <p:cNvPr id="8" name="Rectangle : coins arrondis 7">
-            <a:extLst>
-              <a:ext uri="{FF2B5EF4-FFF2-40B4-BE49-F238E27FC236}">
-                <a16:creationId xmlns:a16="http://schemas.microsoft.com/office/drawing/2014/main" id="{0E21E4F4-12E6-47C4-98DC-CEB6BEB7D4BF}"/>
+          <p:cNvPr id="25" name="Rectangle 24">
+            <a:extLst>
+              <a:ext uri="{FF2B5EF4-FFF2-40B4-BE49-F238E27FC236}">
+                <a16:creationId xmlns:a16="http://schemas.microsoft.com/office/drawing/2014/main" id="{BBF803A6-21E9-4065-B274-D6316EEAF4FC}"/>
               </a:ext>
             </a:extLst>
           </p:cNvPr>
@@ -20673,8 +21951,257 @@
         </p:nvSpPr>
         <p:spPr>
           <a:xfrm>
-            <a:off x="8248650" y="1943100"/>
-            <a:ext cx="1162050" cy="247650"/>
+            <a:off x="3355848" y="6105144"/>
+            <a:ext cx="400050" cy="228600"/>
+          </a:xfrm>
+          <a:prstGeom prst="rect">
+            <a:avLst/>
+          </a:prstGeom>
+          <a:noFill/>
+          <a:ln w="0">
+            <a:noFill/>
+            <a:prstDash val="solid"/>
+          </a:ln>
+        </p:spPr>
+        <p:txBody>
+          <a:bodyPr wrap="square" lIns="76200" tIns="76200" rIns="76200" bIns="76200" anchor="ctr">
+            <a:normAutofit fontScale="55119" lnSpcReduction="20000"/>
+          </a:bodyPr>
+          <a:lstStyle/>
+          <a:p>
+            <a:pPr algn="ctr">
+              <a:defRPr sz="1050" b="1">
+                <a:solidFill>
+                  <a:srgbClr val="FFFFFF"/>
+                </a:solidFill>
+              </a:defRPr>
+            </a:pPr>
+            <a:endParaRPr sz="1050" b="1" dirty="0">
+              <a:solidFill>
+                <a:srgbClr val="FFFFFF"/>
+              </a:solidFill>
+            </a:endParaRPr>
+          </a:p>
+        </p:txBody>
+      </p:sp>
+      <p:sp>
+        <p:nvSpPr>
+          <p:cNvPr id="26" name="Rectangle 25">
+            <a:extLst>
+              <a:ext uri="{FF2B5EF4-FFF2-40B4-BE49-F238E27FC236}">
+                <a16:creationId xmlns:a16="http://schemas.microsoft.com/office/drawing/2014/main" id="{D5BA3CAA-7629-4200-B7E9-806124B38E43}"/>
+              </a:ext>
+            </a:extLst>
+          </p:cNvPr>
+          <p:cNvSpPr>
+            <a:spLocks noGrp="1"/>
+          </p:cNvSpPr>
+          <p:nvPr/>
+        </p:nvSpPr>
+        <p:spPr>
+          <a:xfrm>
+            <a:off x="3143250" y="6076950"/>
+            <a:ext cx="6087618" cy="647700"/>
+          </a:xfrm>
+          <a:prstGeom prst="rect">
+            <a:avLst/>
+          </a:prstGeom>
+          <a:noFill/>
+          <a:ln w="0">
+            <a:noFill/>
+            <a:prstDash val="solid"/>
+          </a:ln>
+        </p:spPr>
+        <p:txBody>
+          <a:bodyPr wrap="square" lIns="0" tIns="0" rIns="0" bIns="0" anchor="t">
+            <a:normAutofit/>
+          </a:bodyPr>
+          <a:lstStyle/>
+          <a:p>
+            <a:pPr algn="l">
+              <a:defRPr sz="1200" b="0">
+                <a:solidFill>
+                  <a:srgbClr val="1E293B"/>
+                </a:solidFill>
+              </a:defRPr>
+            </a:pPr>
+            <a:r>
+              <a:rPr sz="1200" b="0" dirty="0">
+                <a:solidFill>
+                  <a:srgbClr val="1E293B"/>
+                </a:solidFill>
+              </a:rPr>
+              <a:t>When you add a new vessel or project later, this is usually the only JavaScript file you need to edit.</a:t>
+            </a:r>
+          </a:p>
+        </p:txBody>
+      </p:sp>
+      <p:sp>
+        <p:nvSpPr>
+          <p:cNvPr id="31" name="Rectangle 30">
+            <a:extLst>
+              <a:ext uri="{FF2B5EF4-FFF2-40B4-BE49-F238E27FC236}">
+                <a16:creationId xmlns:a16="http://schemas.microsoft.com/office/drawing/2014/main" id="{1E5D556A-C9AC-4B59-9486-6D63B475C9D2}"/>
+              </a:ext>
+            </a:extLst>
+          </p:cNvPr>
+          <p:cNvSpPr>
+            <a:spLocks noGrp="1"/>
+          </p:cNvSpPr>
+          <p:nvPr/>
+        </p:nvSpPr>
+        <p:spPr>
+          <a:xfrm>
+            <a:off x="571500" y="6534150"/>
+            <a:ext cx="3048000" cy="190500"/>
+          </a:xfrm>
+          <a:prstGeom prst="rect">
+            <a:avLst/>
+          </a:prstGeom>
+          <a:noFill/>
+          <a:ln w="0">
+            <a:noFill/>
+            <a:prstDash val="solid"/>
+          </a:ln>
+        </p:spPr>
+        <p:txBody>
+          <a:bodyPr wrap="square" lIns="0" tIns="0" rIns="0" bIns="0" anchor="t">
+            <a:normAutofit/>
+          </a:bodyPr>
+          <a:lstStyle/>
+          <a:p>
+            <a:pPr algn="l">
+              <a:defRPr sz="825" b="0">
+                <a:solidFill>
+                  <a:srgbClr val="64748B"/>
+                </a:solidFill>
+              </a:defRPr>
+            </a:pPr>
+            <a:r>
+              <a:rPr sz="825" b="0">
+                <a:solidFill>
+                  <a:srgbClr val="64748B"/>
+                </a:solidFill>
+              </a:rPr>
+              <a:t>Data Hub guide - new vessel workflow</a:t>
+            </a:r>
+          </a:p>
+        </p:txBody>
+      </p:sp>
+      <p:sp>
+        <p:nvSpPr>
+          <p:cNvPr id="32" name="Rectangle 31">
+            <a:extLst>
+              <a:ext uri="{FF2B5EF4-FFF2-40B4-BE49-F238E27FC236}">
+                <a16:creationId xmlns:a16="http://schemas.microsoft.com/office/drawing/2014/main" id="{84469773-1725-4EFF-A9FB-A2BF1EFABAFD}"/>
+              </a:ext>
+            </a:extLst>
+          </p:cNvPr>
+          <p:cNvSpPr>
+            <a:spLocks noGrp="1"/>
+          </p:cNvSpPr>
+          <p:nvPr/>
+        </p:nvSpPr>
+        <p:spPr>
+          <a:xfrm>
+            <a:off x="11144250" y="6496050"/>
+            <a:ext cx="381000" cy="228600"/>
+          </a:xfrm>
+          <a:prstGeom prst="rect">
+            <a:avLst/>
+          </a:prstGeom>
+          <a:noFill/>
+          <a:ln w="0">
+            <a:noFill/>
+            <a:prstDash val="solid"/>
+          </a:ln>
+        </p:spPr>
+        <p:txBody>
+          <a:bodyPr wrap="square" lIns="0" tIns="0" rIns="0" bIns="0" anchor="t">
+            <a:normAutofit/>
+          </a:bodyPr>
+          <a:lstStyle/>
+          <a:p>
+            <a:pPr algn="r">
+              <a:defRPr sz="900" b="1">
+                <a:solidFill>
+                  <a:srgbClr val="64748B"/>
+                </a:solidFill>
+              </a:defRPr>
+            </a:pPr>
+            <a:r>
+              <a:rPr sz="900" b="1">
+                <a:solidFill>
+                  <a:srgbClr val="64748B"/>
+                </a:solidFill>
+              </a:rPr>
+              <a:t>5</a:t>
+            </a:r>
+          </a:p>
+        </p:txBody>
+      </p:sp>
+    </p:spTree>
+    <p:extLst>
+      <p:ext uri="{BB962C8B-B14F-4D97-AF65-F5344CB8AC3E}">
+        <p14:creationId xmlns:p14="http://schemas.microsoft.com/office/powerpoint/2010/main" val="1473021361"/>
+      </p:ext>
+    </p:extLst>
+  </p:cSld>
+  <p:clrMapOvr>
+    <a:masterClrMapping/>
+  </p:clrMapOvr>
+</p:sld>
+</file>
+
+<file path=ppt/slides/slide9.xml><?xml version="1.0" encoding="utf-8"?>
+<p:sld xmlns:a="http://schemas.openxmlformats.org/drawingml/2006/main" xmlns:r="http://schemas.openxmlformats.org/officeDocument/2006/relationships" xmlns:p="http://schemas.openxmlformats.org/presentationml/2006/main">
+  <p:cSld>
+    <p:bg>
+      <p:bgPr>
+        <a:solidFill>
+          <a:srgbClr val="F4F8FB"/>
+        </a:solidFill>
+        <a:effectLst/>
+      </p:bgPr>
+    </p:bg>
+    <p:spTree>
+      <p:nvGrpSpPr>
+        <p:cNvPr id="1" name="">
+          <a:extLst>
+            <a:ext uri="{FF2B5EF4-FFF2-40B4-BE49-F238E27FC236}">
+              <a16:creationId xmlns:a16="http://schemas.microsoft.com/office/drawing/2014/main" id="{42E3B439-DA13-C7D9-1390-6976E20D7612}"/>
+            </a:ext>
+          </a:extLst>
+        </p:cNvPr>
+        <p:cNvGrpSpPr/>
+        <p:nvPr/>
+      </p:nvGrpSpPr>
+      <p:grpSpPr>
+        <a:xfrm>
+          <a:off x="0" y="0"/>
+          <a:ext cx="0" cy="0"/>
+          <a:chOff x="0" y="0"/>
+          <a:chExt cx="0" cy="0"/>
+        </a:xfrm>
+      </p:grpSpPr>
+      <p:sp>
+        <p:nvSpPr>
+          <p:cNvPr id="33" name="Rectangle : coins arrondis 32">
+            <a:extLst>
+              <a:ext uri="{FF2B5EF4-FFF2-40B4-BE49-F238E27FC236}">
+                <a16:creationId xmlns:a16="http://schemas.microsoft.com/office/drawing/2014/main" id="{6284C0D8-9569-6B92-3C4E-1CA94E5F0531}"/>
+              </a:ext>
+            </a:extLst>
+          </p:cNvPr>
+          <p:cNvSpPr>
+            <a:spLocks noGrp="1"/>
+          </p:cNvSpPr>
+          <p:nvPr/>
+        </p:nvSpPr>
+        <p:spPr>
+          <a:xfrm>
+            <a:off x="571500" y="425958"/>
+            <a:ext cx="1619250" cy="285750"/>
           </a:xfrm>
           <a:prstGeom prst="roundRect">
             <a:avLst>
@@ -20701,10 +22228,10 @@
       </p:sp>
       <p:sp>
         <p:nvSpPr>
-          <p:cNvPr id="9" name="Rectangle 8">
-            <a:extLst>
-              <a:ext uri="{FF2B5EF4-FFF2-40B4-BE49-F238E27FC236}">
-                <a16:creationId xmlns:a16="http://schemas.microsoft.com/office/drawing/2014/main" id="{7FE76EDB-78DB-4BA2-894B-A21024DCBF12}"/>
+          <p:cNvPr id="2" name="Rectangle 1">
+            <a:extLst>
+              <a:ext uri="{FF2B5EF4-FFF2-40B4-BE49-F238E27FC236}">
+                <a16:creationId xmlns:a16="http://schemas.microsoft.com/office/drawing/2014/main" id="{ECE0F281-E10E-DED8-6897-CA5BCED9B344}"/>
               </a:ext>
             </a:extLst>
           </p:cNvPr>
@@ -20715,8 +22242,8 @@
         </p:nvSpPr>
         <p:spPr>
           <a:xfrm>
-            <a:off x="8248650" y="1943100"/>
-            <a:ext cx="1162050" cy="247650"/>
+            <a:off x="571500" y="444246"/>
+            <a:ext cx="1619250" cy="285750"/>
           </a:xfrm>
           <a:prstGeom prst="rect">
             <a:avLst/>
@@ -20729,7 +22256,7 @@
         </p:spPr>
         <p:txBody>
           <a:bodyPr wrap="square" lIns="76200" tIns="76200" rIns="76200" bIns="76200" anchor="ctr">
-            <a:noAutofit/>
+            <a:normAutofit fontScale="90833" lnSpcReduction="20000"/>
           </a:bodyPr>
           <a:lstStyle/>
           <a:p>
@@ -20741,22 +22268,35 @@
               </a:defRPr>
             </a:pPr>
             <a:r>
-              <a:rPr sz="1000" b="1" dirty="0">
+              <a:rPr sz="1050" b="1" dirty="0">
                 <a:solidFill>
                   <a:srgbClr val="FFFFFF"/>
                 </a:solidFill>
               </a:rPr>
-              <a:t>location</a:t>
-            </a:r>
-          </a:p>
-        </p:txBody>
-      </p:sp>
-      <p:sp>
-        <p:nvSpPr>
-          <p:cNvPr id="10" name="Rectangle 9">
-            <a:extLst>
-              <a:ext uri="{FF2B5EF4-FFF2-40B4-BE49-F238E27FC236}">
-                <a16:creationId xmlns:a16="http://schemas.microsoft.com/office/drawing/2014/main" id="{4EBCBCCD-C76D-4EEF-86BE-DFC1AC4331E3}"/>
+              <a:t>BUILD STEP </a:t>
+            </a:r>
+            <a:r>
+              <a:rPr lang="fr-FR" sz="1050" b="1" dirty="0">
+                <a:solidFill>
+                  <a:srgbClr val="FFFFFF"/>
+                </a:solidFill>
+              </a:rPr>
+              <a:t>5</a:t>
+            </a:r>
+            <a:endParaRPr sz="1050" b="1" dirty="0">
+              <a:solidFill>
+                <a:srgbClr val="FFFFFF"/>
+              </a:solidFill>
+            </a:endParaRPr>
+          </a:p>
+        </p:txBody>
+      </p:sp>
+      <p:sp>
+        <p:nvSpPr>
+          <p:cNvPr id="3" name="Rectangle 2">
+            <a:extLst>
+              <a:ext uri="{FF2B5EF4-FFF2-40B4-BE49-F238E27FC236}">
+                <a16:creationId xmlns:a16="http://schemas.microsoft.com/office/drawing/2014/main" id="{7D90E3D4-4318-2BFB-DFAC-C426879BD41A}"/>
               </a:ext>
             </a:extLst>
           </p:cNvPr>
@@ -20767,8 +22307,8 @@
         </p:nvSpPr>
         <p:spPr>
           <a:xfrm>
-            <a:off x="8248650" y="2305050"/>
-            <a:ext cx="3124200" cy="247650"/>
+            <a:off x="571500" y="862584"/>
+            <a:ext cx="11049000" cy="476250"/>
           </a:xfrm>
           <a:prstGeom prst="rect">
             <a:avLst/>
@@ -20781,34 +22321,66 @@
         </p:spPr>
         <p:txBody>
           <a:bodyPr wrap="square" lIns="0" tIns="0" rIns="0" bIns="0" anchor="t">
-            <a:normAutofit fontScale="83734" lnSpcReduction="20000"/>
+            <a:normAutofit/>
           </a:bodyPr>
           <a:lstStyle/>
           <a:p>
             <a:pPr algn="l">
-              <a:defRPr sz="1200" b="0">
-                <a:solidFill>
-                  <a:srgbClr val="334155"/>
-                </a:solidFill>
-              </a:defRPr>
-            </a:pPr>
-            <a:r>
-              <a:rPr sz="1200" b="0">
-                <a:solidFill>
-                  <a:srgbClr val="334155"/>
-                </a:solidFill>
-              </a:rPr>
-              <a:t>Groups the entry in the left accordion. Example: hull, engine, crane, wind.</a:t>
-            </a:r>
-          </a:p>
-        </p:txBody>
-      </p:sp>
-      <p:sp>
-        <p:nvSpPr>
-          <p:cNvPr id="11" name="Rectangle : coins arrondis 10">
-            <a:extLst>
-              <a:ext uri="{FF2B5EF4-FFF2-40B4-BE49-F238E27FC236}">
-                <a16:creationId xmlns:a16="http://schemas.microsoft.com/office/drawing/2014/main" id="{E96E2973-D54E-428A-8F3F-237384BD90C9}"/>
+              <a:defRPr sz="3000" b="1">
+                <a:solidFill>
+                  <a:srgbClr val="0F172A"/>
+                </a:solidFill>
+              </a:defRPr>
+            </a:pPr>
+            <a:r>
+              <a:rPr sz="3000" b="1" dirty="0">
+                <a:solidFill>
+                  <a:srgbClr val="0F172A"/>
+                </a:solidFill>
+              </a:rPr>
+              <a:t>Register the </a:t>
+            </a:r>
+            <a:r>
+              <a:rPr lang="fr-FR" sz="3000" b="1" dirty="0">
+                <a:solidFill>
+                  <a:srgbClr val="0F172A"/>
+                </a:solidFill>
+              </a:rPr>
+              <a:t>block</a:t>
+            </a:r>
+            <a:r>
+              <a:rPr sz="3000" b="1" dirty="0">
+                <a:solidFill>
+                  <a:srgbClr val="0F172A"/>
+                </a:solidFill>
+              </a:rPr>
+              <a:t> once in </a:t>
+            </a:r>
+            <a:r>
+              <a:rPr lang="fr-FR" sz="3000" b="1" dirty="0" err="1">
+                <a:solidFill>
+                  <a:srgbClr val="0F172A"/>
+                </a:solidFill>
+              </a:rPr>
+              <a:t>dashboard-projects</a:t>
+            </a:r>
+            <a:r>
+              <a:rPr sz="3000" b="1" dirty="0">
+                <a:solidFill>
+                  <a:srgbClr val="0F172A"/>
+                </a:solidFill>
+              </a:rPr>
+              <a:t>.js</a:t>
+            </a:r>
+          </a:p>
+        </p:txBody>
+      </p:sp>
+      <p:sp>
+        <p:nvSpPr>
+          <p:cNvPr id="4" name="Rectangle 3">
+            <a:extLst>
+              <a:ext uri="{FF2B5EF4-FFF2-40B4-BE49-F238E27FC236}">
+                <a16:creationId xmlns:a16="http://schemas.microsoft.com/office/drawing/2014/main" id="{58F4CFB5-8B17-B5FF-214A-F5FBF2DA9B25}"/>
               </a:ext>
             </a:extLst>
           </p:cNvPr>
@@ -20819,20 +22391,85 @@
         </p:nvSpPr>
         <p:spPr>
           <a:xfrm>
-            <a:off x="8096250" y="2857500"/>
-            <a:ext cx="3429000" cy="895350"/>
+            <a:off x="571500" y="1400556"/>
+            <a:ext cx="11049000" cy="323850"/>
+          </a:xfrm>
+          <a:prstGeom prst="rect">
+            <a:avLst/>
+          </a:prstGeom>
+          <a:noFill/>
+          <a:ln w="0">
+            <a:noFill/>
+            <a:prstDash val="solid"/>
+          </a:ln>
+        </p:spPr>
+        <p:txBody>
+          <a:bodyPr wrap="square" lIns="0" tIns="0" rIns="0" bIns="0" anchor="t">
+            <a:normAutofit/>
+          </a:bodyPr>
+          <a:lstStyle/>
+          <a:p>
+            <a:pPr algn="l">
+              <a:defRPr sz="1350" b="0">
+                <a:solidFill>
+                  <a:srgbClr val="475569"/>
+                </a:solidFill>
+              </a:defRPr>
+            </a:pPr>
+            <a:r>
+              <a:rPr sz="1350" b="0" dirty="0">
+                <a:solidFill>
+                  <a:srgbClr val="475569"/>
+                </a:solidFill>
+              </a:rPr>
+              <a:t>This is</a:t>
+            </a:r>
+            <a:r>
+              <a:rPr lang="fr-FR" sz="1350" b="0" dirty="0">
+                <a:solidFill>
+                  <a:srgbClr val="475569"/>
+                </a:solidFill>
+              </a:rPr>
+              <a:t> to show the block in the main index.html</a:t>
+            </a:r>
+            <a:endParaRPr sz="1350" b="0" dirty="0">
+              <a:solidFill>
+                <a:srgbClr val="475569"/>
+              </a:solidFill>
+            </a:endParaRPr>
+          </a:p>
+        </p:txBody>
+      </p:sp>
+      <p:sp>
+        <p:nvSpPr>
+          <p:cNvPr id="5" name="Rectangle : coins arrondis 4">
+            <a:extLst>
+              <a:ext uri="{FF2B5EF4-FFF2-40B4-BE49-F238E27FC236}">
+                <a16:creationId xmlns:a16="http://schemas.microsoft.com/office/drawing/2014/main" id="{5077405A-F235-4C4C-D75F-D31E1D199366}"/>
+              </a:ext>
+            </a:extLst>
+          </p:cNvPr>
+          <p:cNvSpPr>
+            <a:spLocks noGrp="1"/>
+          </p:cNvSpPr>
+          <p:nvPr/>
+        </p:nvSpPr>
+        <p:spPr>
+          <a:xfrm>
+            <a:off x="745671" y="2258568"/>
+            <a:ext cx="4476750" cy="3086100"/>
           </a:xfrm>
           <a:prstGeom prst="roundRect">
             <a:avLst>
-              <a:gd name="adj" fmla="val 17021"/>
+              <a:gd name="adj" fmla="val 4938"/>
             </a:avLst>
           </a:prstGeom>
           <a:solidFill>
-            <a:srgbClr val="FFFFFF"/>
+            <a:srgbClr val="0B1220"/>
           </a:solidFill>
           <a:ln w="9525">
             <a:solidFill>
-              <a:srgbClr val="E2E8F0"/>
+              <a:srgbClr val="1E293B"/>
             </a:solidFill>
             <a:prstDash val="solid"/>
           </a:ln>
@@ -20859,10 +22496,10 @@
       </p:sp>
       <p:sp>
         <p:nvSpPr>
-          <p:cNvPr id="12" name="Rectangle : coins arrondis 11">
-            <a:extLst>
-              <a:ext uri="{FF2B5EF4-FFF2-40B4-BE49-F238E27FC236}">
-                <a16:creationId xmlns:a16="http://schemas.microsoft.com/office/drawing/2014/main" id="{AFC47360-E945-4433-99B0-6F953EF34E30}"/>
+          <p:cNvPr id="6" name="Rectangle 5">
+            <a:extLst>
+              <a:ext uri="{FF2B5EF4-FFF2-40B4-BE49-F238E27FC236}">
+                <a16:creationId xmlns:a16="http://schemas.microsoft.com/office/drawing/2014/main" id="{1D96AF3E-F8A4-3D1D-6BDE-18AA1A6D066F}"/>
               </a:ext>
             </a:extLst>
           </p:cNvPr>
@@ -20873,50 +22510,8 @@
         </p:nvSpPr>
         <p:spPr>
           <a:xfrm>
-            <a:off x="8248650" y="3009900"/>
-            <a:ext cx="1162050" cy="247650"/>
-          </a:xfrm>
-          <a:prstGeom prst="roundRect">
-            <a:avLst>
-              <a:gd name="adj" fmla="val 50000"/>
-            </a:avLst>
-          </a:prstGeom>
-          <a:solidFill>
-            <a:srgbClr val="16803C"/>
-          </a:solidFill>
-          <a:ln w="0">
-            <a:solidFill>
-              <a:srgbClr val="16803C"/>
-            </a:solidFill>
-            <a:prstDash val="solid"/>
-          </a:ln>
-        </p:spPr>
-        <p:txBody>
-          <a:bodyPr/>
-          <a:lstStyle/>
-          <a:p>
-            <a:endParaRPr lang="fr-FR"/>
-          </a:p>
-        </p:txBody>
-      </p:sp>
-      <p:sp>
-        <p:nvSpPr>
-          <p:cNvPr id="13" name="Rectangle 12">
-            <a:extLst>
-              <a:ext uri="{FF2B5EF4-FFF2-40B4-BE49-F238E27FC236}">
-                <a16:creationId xmlns:a16="http://schemas.microsoft.com/office/drawing/2014/main" id="{22FC4ED7-8786-415D-91A6-09E5C235F7A2}"/>
-              </a:ext>
-            </a:extLst>
-          </p:cNvPr>
-          <p:cNvSpPr>
-            <a:spLocks noGrp="1"/>
-          </p:cNvSpPr>
-          <p:nvPr/>
-        </p:nvSpPr>
-        <p:spPr>
-          <a:xfrm>
-            <a:off x="8248650" y="3009900"/>
-            <a:ext cx="1162050" cy="247650"/>
+            <a:off x="917121" y="2410968"/>
+            <a:ext cx="4133850" cy="2781300"/>
           </a:xfrm>
           <a:prstGeom prst="rect">
             <a:avLst/>
@@ -20928,40 +22523,110 @@
           </a:ln>
         </p:spPr>
         <p:txBody>
-          <a:bodyPr wrap="square" lIns="76200" tIns="76200" rIns="76200" bIns="76200" anchor="ctr">
-            <a:noAutofit/>
+          <a:bodyPr wrap="square" lIns="0" tIns="0" rIns="0" bIns="0" anchor="t">
+            <a:normAutofit/>
           </a:bodyPr>
           <a:lstStyle/>
           <a:p>
-            <a:pPr algn="ctr">
-              <a:defRPr sz="1050" b="1">
-                <a:solidFill>
-                  <a:srgbClr val="FFFFFF"/>
-                </a:solidFill>
-              </a:defRPr>
-            </a:pPr>
-            <a:r>
-              <a:rPr sz="1000" b="1" dirty="0" err="1">
-                <a:solidFill>
-                  <a:srgbClr val="FFFFFF"/>
-                </a:solidFill>
-              </a:rPr>
-              <a:t>DNV_path</a:t>
-            </a:r>
-            <a:endParaRPr sz="1000" b="1" dirty="0">
-              <a:solidFill>
-                <a:srgbClr val="FFFFFF"/>
-              </a:solidFill>
-            </a:endParaRPr>
-          </a:p>
-        </p:txBody>
-      </p:sp>
-      <p:sp>
-        <p:nvSpPr>
-          <p:cNvPr id="14" name="Rectangle 13">
-            <a:extLst>
-              <a:ext uri="{FF2B5EF4-FFF2-40B4-BE49-F238E27FC236}">
-                <a16:creationId xmlns:a16="http://schemas.microsoft.com/office/drawing/2014/main" id="{87C1F6F8-CDAF-46E6-92BE-933D43972144}"/>
+            <a:r>
+              <a:rPr lang="fr-FR" dirty="0">
+                <a:solidFill>
+                  <a:schemeClr val="bg1"/>
+                </a:solidFill>
+              </a:rPr>
+              <a:t>(</a:t>
+            </a:r>
+            <a:r>
+              <a:rPr lang="fr-FR" dirty="0" err="1">
+                <a:solidFill>
+                  <a:schemeClr val="bg1"/>
+                </a:solidFill>
+              </a:rPr>
+              <a:t>function</a:t>
+            </a:r>
+            <a:r>
+              <a:rPr lang="fr-FR" dirty="0">
+                <a:solidFill>
+                  <a:schemeClr val="bg1"/>
+                </a:solidFill>
+              </a:rPr>
+              <a:t> () {</a:t>
+            </a:r>
+          </a:p>
+          <a:p>
+            <a:r>
+              <a:rPr lang="fr-FR" dirty="0">
+                <a:solidFill>
+                  <a:schemeClr val="bg1"/>
+                </a:solidFill>
+              </a:rPr>
+              <a:t>  </a:t>
+            </a:r>
+            <a:r>
+              <a:rPr lang="fr-FR" dirty="0" err="1">
+                <a:solidFill>
+                  <a:schemeClr val="bg1"/>
+                </a:solidFill>
+              </a:rPr>
+              <a:t>const</a:t>
+            </a:r>
+            <a:r>
+              <a:rPr lang="fr-FR" dirty="0">
+                <a:solidFill>
+                  <a:schemeClr val="bg1"/>
+                </a:solidFill>
+              </a:rPr>
+              <a:t> BLOCK_FILES = [</a:t>
+            </a:r>
+          </a:p>
+          <a:p>
+            <a:r>
+              <a:rPr lang="fr-FR" dirty="0">
+                <a:solidFill>
+                  <a:schemeClr val="bg1"/>
+                </a:solidFill>
+              </a:rPr>
+              <a:t>    "Blocs/Rina_blocs.html",</a:t>
+            </a:r>
+          </a:p>
+          <a:p>
+            <a:r>
+              <a:rPr lang="fr-FR" dirty="0">
+                <a:solidFill>
+                  <a:schemeClr val="bg1"/>
+                </a:solidFill>
+              </a:rPr>
+              <a:t>    "Blocs/Gunnerus_blocs.html",</a:t>
+            </a:r>
+          </a:p>
+          <a:p>
+            <a:r>
+              <a:rPr lang="fr-FR" dirty="0">
+                <a:solidFill>
+                  <a:schemeClr val="bg1"/>
+                </a:solidFill>
+              </a:rPr>
+              <a:t>    "Blocs/Exemple_bloc.html"</a:t>
+            </a:r>
+          </a:p>
+          <a:p>
+            <a:r>
+              <a:rPr lang="fr-FR" dirty="0">
+                <a:solidFill>
+                  <a:schemeClr val="bg1"/>
+                </a:solidFill>
+              </a:rPr>
+              <a:t>  ];</a:t>
+            </a:r>
+          </a:p>
+        </p:txBody>
+      </p:sp>
+      <p:sp>
+        <p:nvSpPr>
+          <p:cNvPr id="7" name="Rectangle : coins arrondis 6">
+            <a:extLst>
+              <a:ext uri="{FF2B5EF4-FFF2-40B4-BE49-F238E27FC236}">
+                <a16:creationId xmlns:a16="http://schemas.microsoft.com/office/drawing/2014/main" id="{1C58CCD1-7ED9-B481-A54E-A7C774D9E4F3}"/>
               </a:ext>
             </a:extLst>
           </p:cNvPr>
@@ -20972,64 +22637,12 @@
         </p:nvSpPr>
         <p:spPr>
           <a:xfrm>
-            <a:off x="8248650" y="3371850"/>
-            <a:ext cx="3124200" cy="247650"/>
-          </a:xfrm>
-          <a:prstGeom prst="rect">
-            <a:avLst/>
-          </a:prstGeom>
-          <a:noFill/>
-          <a:ln w="0">
-            <a:noFill/>
-            <a:prstDash val="solid"/>
-          </a:ln>
-        </p:spPr>
-        <p:txBody>
-          <a:bodyPr wrap="square" lIns="0" tIns="0" rIns="0" bIns="0" anchor="t">
-            <a:normAutofit fontScale="95216"/>
-          </a:bodyPr>
-          <a:lstStyle/>
-          <a:p>
-            <a:pPr algn="l">
-              <a:defRPr sz="1200" b="0">
-                <a:solidFill>
-                  <a:srgbClr val="334155"/>
-                </a:solidFill>
-              </a:defRPr>
-            </a:pPr>
-            <a:r>
-              <a:rPr sz="1200" b="0">
-                <a:solidFill>
-                  <a:srgbClr val="334155"/>
-                </a:solidFill>
-              </a:rPr>
-              <a:t>Places the same entry on the right if the path is valid.</a:t>
-            </a:r>
-          </a:p>
-        </p:txBody>
-      </p:sp>
-      <p:sp>
-        <p:nvSpPr>
-          <p:cNvPr id="15" name="Rectangle : coins arrondis 14">
-            <a:extLst>
-              <a:ext uri="{FF2B5EF4-FFF2-40B4-BE49-F238E27FC236}">
-                <a16:creationId xmlns:a16="http://schemas.microsoft.com/office/drawing/2014/main" id="{C14AA3B5-5657-46B5-AC8A-E16B4DB67649}"/>
-              </a:ext>
-            </a:extLst>
-          </p:cNvPr>
-          <p:cNvSpPr>
-            <a:spLocks noGrp="1"/>
-          </p:cNvSpPr>
-          <p:nvPr/>
-        </p:nvSpPr>
-        <p:spPr>
-          <a:xfrm>
-            <a:off x="8096250" y="3924300"/>
-            <a:ext cx="3429000" cy="895350"/>
+            <a:off x="6465207" y="2693198"/>
+            <a:ext cx="4853214" cy="2182803"/>
           </a:xfrm>
           <a:prstGeom prst="roundRect">
             <a:avLst>
-              <a:gd name="adj" fmla="val 17021"/>
+              <a:gd name="adj" fmla="val 13333"/>
             </a:avLst>
           </a:prstGeom>
           <a:solidFill>
@@ -21064,10 +22677,10 @@
       </p:sp>
       <p:sp>
         <p:nvSpPr>
-          <p:cNvPr id="16" name="Rectangle : coins arrondis 15">
-            <a:extLst>
-              <a:ext uri="{FF2B5EF4-FFF2-40B4-BE49-F238E27FC236}">
-                <a16:creationId xmlns:a16="http://schemas.microsoft.com/office/drawing/2014/main" id="{E2DC61A9-1E1D-447B-88D0-C6011616ECCC}"/>
+          <p:cNvPr id="8" name="Rectangle : coins arrondis 7">
+            <a:extLst>
+              <a:ext uri="{FF2B5EF4-FFF2-40B4-BE49-F238E27FC236}">
+                <a16:creationId xmlns:a16="http://schemas.microsoft.com/office/drawing/2014/main" id="{8D9CE0B7-147A-4DC2-2215-608B0DE3295B}"/>
               </a:ext>
             </a:extLst>
           </p:cNvPr>
@@ -21078,8 +22691,8 @@
         </p:nvSpPr>
         <p:spPr>
           <a:xfrm>
-            <a:off x="8248650" y="4076700"/>
-            <a:ext cx="1162050" cy="247650"/>
+            <a:off x="6617606" y="2845598"/>
+            <a:ext cx="2070252" cy="582381"/>
           </a:xfrm>
           <a:prstGeom prst="roundRect">
             <a:avLst>
@@ -21087,11 +22700,11 @@
             </a:avLst>
           </a:prstGeom>
           <a:solidFill>
-            <a:srgbClr val="0F766E"/>
+            <a:srgbClr val="2553D6"/>
           </a:solidFill>
           <a:ln w="0">
             <a:solidFill>
-              <a:srgbClr val="0F766E"/>
+              <a:srgbClr val="2553D6"/>
             </a:solidFill>
             <a:prstDash val="solid"/>
           </a:ln>
@@ -21100,16 +22713,16 @@
           <a:bodyPr/>
           <a:lstStyle/>
           <a:p>
-            <a:endParaRPr lang="fr-FR"/>
-          </a:p>
-        </p:txBody>
-      </p:sp>
-      <p:sp>
-        <p:nvSpPr>
-          <p:cNvPr id="17" name="Rectangle 16">
-            <a:extLst>
-              <a:ext uri="{FF2B5EF4-FFF2-40B4-BE49-F238E27FC236}">
-                <a16:creationId xmlns:a16="http://schemas.microsoft.com/office/drawing/2014/main" id="{5F165BF1-D566-4079-BDAC-43DA080AB27E}"/>
+            <a:endParaRPr lang="fr-FR" dirty="0"/>
+          </a:p>
+        </p:txBody>
+      </p:sp>
+      <p:sp>
+        <p:nvSpPr>
+          <p:cNvPr id="9" name="Rectangle 8">
+            <a:extLst>
+              <a:ext uri="{FF2B5EF4-FFF2-40B4-BE49-F238E27FC236}">
+                <a16:creationId xmlns:a16="http://schemas.microsoft.com/office/drawing/2014/main" id="{EC71C816-6A70-9881-3DD0-3412AE988BE5}"/>
               </a:ext>
             </a:extLst>
           </p:cNvPr>
@@ -21120,8 +22733,8 @@
         </p:nvSpPr>
         <p:spPr>
           <a:xfrm>
-            <a:off x="8248650" y="4076700"/>
-            <a:ext cx="1162050" cy="247650"/>
+            <a:off x="6617606" y="2845598"/>
+            <a:ext cx="2070252" cy="582381"/>
           </a:xfrm>
           <a:prstGeom prst="rect">
             <a:avLst/>
@@ -21146,22 +22759,35 @@
               </a:defRPr>
             </a:pPr>
             <a:r>
-              <a:rPr sz="1000" b="1" dirty="0">
+              <a:rPr lang="fr-FR" sz="2000" b="1" dirty="0">
                 <a:solidFill>
                   <a:srgbClr val="FFFFFF"/>
                 </a:solidFill>
               </a:rPr>
-              <a:t>Green tag</a:t>
-            </a:r>
-          </a:p>
-        </p:txBody>
-      </p:sp>
-      <p:sp>
-        <p:nvSpPr>
-          <p:cNvPr id="18" name="Rectangle 17">
-            <a:extLst>
-              <a:ext uri="{FF2B5EF4-FFF2-40B4-BE49-F238E27FC236}">
-                <a16:creationId xmlns:a16="http://schemas.microsoft.com/office/drawing/2014/main" id="{C2DA188F-C095-4062-8E05-A1B5452A0091}"/>
+              <a:t>Path</a:t>
+            </a:r>
+            <a:r>
+              <a:rPr lang="fr-FR" sz="1200" b="1" dirty="0">
+                <a:solidFill>
+                  <a:srgbClr val="FFFFFF"/>
+                </a:solidFill>
+              </a:rPr>
+              <a:t> </a:t>
+            </a:r>
+            <a:endParaRPr sz="1200" b="1" dirty="0">
+              <a:solidFill>
+                <a:srgbClr val="FFFFFF"/>
+              </a:solidFill>
+            </a:endParaRPr>
+          </a:p>
+        </p:txBody>
+      </p:sp>
+      <p:sp>
+        <p:nvSpPr>
+          <p:cNvPr id="10" name="Rectangle 9">
+            <a:extLst>
+              <a:ext uri="{FF2B5EF4-FFF2-40B4-BE49-F238E27FC236}">
+                <a16:creationId xmlns:a16="http://schemas.microsoft.com/office/drawing/2014/main" id="{721E1B31-7947-C061-9DF6-47B3D23BBA20}"/>
               </a:ext>
             </a:extLst>
           </p:cNvPr>
@@ -21172,8 +22798,8 @@
         </p:nvSpPr>
         <p:spPr>
           <a:xfrm>
-            <a:off x="8248650" y="4438650"/>
-            <a:ext cx="3124200" cy="247650"/>
+            <a:off x="6850743" y="3516081"/>
+            <a:ext cx="4310197" cy="1164763"/>
           </a:xfrm>
           <a:prstGeom prst="rect">
             <a:avLst/>
@@ -21186,7 +22812,7 @@
         </p:spPr>
         <p:txBody>
           <a:bodyPr wrap="square" lIns="0" tIns="0" rIns="0" bIns="0" anchor="t">
-            <a:normAutofit fontScale="81897" lnSpcReduction="10000"/>
+            <a:normAutofit/>
           </a:bodyPr>
           <a:lstStyle/>
           <a:p>
@@ -21198,22 +22824,83 @@
               </a:defRPr>
             </a:pPr>
             <a:r>
-              <a:rPr sz="1200" b="0">
+              <a:rPr lang="fr-FR" sz="1500" b="0" dirty="0">
                 <a:solidFill>
                   <a:srgbClr val="334155"/>
                 </a:solidFill>
               </a:rPr>
-              <a:t>Shows the mapped value and keeps the source clickable.</a:t>
-            </a:r>
-          </a:p>
-        </p:txBody>
-      </p:sp>
-      <p:sp>
-        <p:nvSpPr>
-          <p:cNvPr id="19" name="Rectangle : coins arrondis 18">
-            <a:extLst>
-              <a:ext uri="{FF2B5EF4-FFF2-40B4-BE49-F238E27FC236}">
-                <a16:creationId xmlns:a16="http://schemas.microsoft.com/office/drawing/2014/main" id="{CD093144-676C-4EE4-A7D5-C0E64958D416}"/>
+              <a:t>Just </a:t>
+            </a:r>
+            <a:r>
+              <a:rPr lang="fr-FR" sz="1500" b="0" dirty="0" err="1">
+                <a:solidFill>
+                  <a:srgbClr val="334155"/>
+                </a:solidFill>
+              </a:rPr>
+              <a:t>add</a:t>
+            </a:r>
+            <a:r>
+              <a:rPr lang="fr-FR" sz="1500" b="0" dirty="0">
+                <a:solidFill>
+                  <a:srgbClr val="334155"/>
+                </a:solidFill>
+              </a:rPr>
+              <a:t> the </a:t>
+            </a:r>
+            <a:r>
+              <a:rPr lang="fr-FR" sz="1500" b="0" dirty="0" err="1">
+                <a:solidFill>
+                  <a:srgbClr val="334155"/>
+                </a:solidFill>
+              </a:rPr>
+              <a:t>path</a:t>
+            </a:r>
+            <a:r>
+              <a:rPr lang="fr-FR" sz="1500" b="0" dirty="0">
+                <a:solidFill>
+                  <a:srgbClr val="334155"/>
+                </a:solidFill>
+              </a:rPr>
+              <a:t> to </a:t>
+            </a:r>
+            <a:r>
+              <a:rPr lang="fr-FR" sz="1500" b="0" dirty="0" err="1">
+                <a:solidFill>
+                  <a:srgbClr val="334155"/>
+                </a:solidFill>
+              </a:rPr>
+              <a:t>you</a:t>
+            </a:r>
+            <a:r>
+              <a:rPr lang="fr-FR" sz="1500" dirty="0" err="1">
+                <a:solidFill>
+                  <a:srgbClr val="334155"/>
+                </a:solidFill>
+              </a:rPr>
+              <a:t>r</a:t>
+            </a:r>
+            <a:r>
+              <a:rPr lang="fr-FR" sz="1500" dirty="0">
+                <a:solidFill>
+                  <a:srgbClr val="334155"/>
+                </a:solidFill>
+              </a:rPr>
+              <a:t> html bloc. </a:t>
+            </a:r>
+            <a:endParaRPr sz="1500" b="0" dirty="0">
+              <a:solidFill>
+                <a:srgbClr val="334155"/>
+              </a:solidFill>
+            </a:endParaRPr>
+          </a:p>
+        </p:txBody>
+      </p:sp>
+      <p:sp>
+        <p:nvSpPr>
+          <p:cNvPr id="31" name="Rectangle 30">
+            <a:extLst>
+              <a:ext uri="{FF2B5EF4-FFF2-40B4-BE49-F238E27FC236}">
+                <a16:creationId xmlns:a16="http://schemas.microsoft.com/office/drawing/2014/main" id="{76089AE1-4189-9F62-146A-248AD3F93B5B}"/>
               </a:ext>
             </a:extLst>
           </p:cNvPr>
@@ -21224,22 +22911,123 @@
         </p:nvSpPr>
         <p:spPr>
           <a:xfrm>
-            <a:off x="8096250" y="4991100"/>
-            <a:ext cx="3429000" cy="895350"/>
-          </a:xfrm>
-          <a:prstGeom prst="roundRect">
-            <a:avLst>
-              <a:gd name="adj" fmla="val 17021"/>
-            </a:avLst>
+            <a:off x="571500" y="6534150"/>
+            <a:ext cx="3048000" cy="190500"/>
+          </a:xfrm>
+          <a:prstGeom prst="rect">
+            <a:avLst/>
           </a:prstGeom>
-          <a:solidFill>
-            <a:srgbClr val="FFFFFF"/>
-          </a:solidFill>
-          <a:ln w="9525">
+          <a:noFill/>
+          <a:ln w="0">
+            <a:noFill/>
+            <a:prstDash val="solid"/>
+          </a:ln>
+        </p:spPr>
+        <p:txBody>
+          <a:bodyPr wrap="square" lIns="0" tIns="0" rIns="0" bIns="0" anchor="t">
+            <a:normAutofit/>
+          </a:bodyPr>
+          <a:lstStyle/>
+          <a:p>
+            <a:pPr algn="l">
+              <a:defRPr sz="825" b="0">
+                <a:solidFill>
+                  <a:srgbClr val="64748B"/>
+                </a:solidFill>
+              </a:defRPr>
+            </a:pPr>
+            <a:r>
+              <a:rPr sz="825" b="0">
+                <a:solidFill>
+                  <a:srgbClr val="64748B"/>
+                </a:solidFill>
+              </a:rPr>
+              <a:t>Data Hub guide - new vessel workflow</a:t>
+            </a:r>
+          </a:p>
+        </p:txBody>
+      </p:sp>
+      <p:sp>
+        <p:nvSpPr>
+          <p:cNvPr id="32" name="Rectangle 31">
+            <a:extLst>
+              <a:ext uri="{FF2B5EF4-FFF2-40B4-BE49-F238E27FC236}">
+                <a16:creationId xmlns:a16="http://schemas.microsoft.com/office/drawing/2014/main" id="{A8F6DD1F-D81D-913C-165B-6BB8D1F41D74}"/>
+              </a:ext>
+            </a:extLst>
+          </p:cNvPr>
+          <p:cNvSpPr>
+            <a:spLocks noGrp="1"/>
+          </p:cNvSpPr>
+          <p:nvPr/>
+        </p:nvSpPr>
+        <p:spPr>
+          <a:xfrm>
+            <a:off x="11144250" y="6496050"/>
+            <a:ext cx="381000" cy="228600"/>
+          </a:xfrm>
+          <a:prstGeom prst="rect">
+            <a:avLst/>
+          </a:prstGeom>
+          <a:noFill/>
+          <a:ln w="0">
+            <a:noFill/>
+            <a:prstDash val="solid"/>
+          </a:ln>
+        </p:spPr>
+        <p:txBody>
+          <a:bodyPr wrap="square" lIns="0" tIns="0" rIns="0" bIns="0" anchor="t">
+            <a:normAutofit/>
+          </a:bodyPr>
+          <a:lstStyle/>
+          <a:p>
+            <a:pPr algn="r">
+              <a:defRPr sz="900" b="1">
+                <a:solidFill>
+                  <a:srgbClr val="64748B"/>
+                </a:solidFill>
+              </a:defRPr>
+            </a:pPr>
+            <a:r>
+              <a:rPr sz="900" b="1">
+                <a:solidFill>
+                  <a:srgbClr val="64748B"/>
+                </a:solidFill>
+              </a:rPr>
+              <a:t>5</a:t>
+            </a:r>
+          </a:p>
+        </p:txBody>
+      </p:sp>
+      <p:sp>
+        <p:nvSpPr>
+          <p:cNvPr id="27" name="Rectangle 26">
+            <a:extLst>
+              <a:ext uri="{FF2B5EF4-FFF2-40B4-BE49-F238E27FC236}">
+                <a16:creationId xmlns:a16="http://schemas.microsoft.com/office/drawing/2014/main" id="{1702BEFE-8DE0-29C6-0E3F-0D4FFD1F1685}"/>
+              </a:ext>
+            </a:extLst>
+          </p:cNvPr>
+          <p:cNvSpPr/>
+          <p:nvPr/>
+        </p:nvSpPr>
+        <p:spPr>
+          <a:xfrm>
+            <a:off x="898071" y="3543300"/>
+            <a:ext cx="2895600" cy="241300"/>
+          </a:xfrm>
+          <a:prstGeom prst="rect">
+            <a:avLst/>
+          </a:prstGeom>
+          <a:noFill/>
+          <a:ln w="9525" cap="flat" cmpd="sng" algn="ctr">
             <a:solidFill>
-              <a:srgbClr val="E2E8F0"/>
+              <a:srgbClr val="FF0000"/>
             </a:solidFill>
             <a:prstDash val="solid"/>
+            <a:round/>
+            <a:headEnd type="none" w="med" len="med"/>
+            <a:tailEnd type="none" w="med" len="med"/>
           </a:ln>
         </p:spPr>
         <p:style>
@@ -21249,278 +23037,26 @@
           <a:fillRef idx="0">
             <a:scrgbClr r="0" g="0" b="0"/>
           </a:fillRef>
-          <a:effectRef idx="4">
+          <a:effectRef idx="0">
             <a:scrgbClr r="0" g="0" b="0"/>
           </a:effectRef>
-          <a:fontRef idx="major"/>
+          <a:fontRef idx="minor">
+            <a:schemeClr val="accent2"/>
+          </a:fontRef>
         </p:style>
         <p:txBody>
-          <a:bodyPr/>
-          <a:lstStyle/>
-          <a:p>
+          <a:bodyPr rtlCol="0" anchor="ctr"/>
+          <a:lstStyle/>
+          <a:p>
+            <a:pPr algn="ctr"/>
             <a:endParaRPr lang="fr-FR"/>
-          </a:p>
-        </p:txBody>
-      </p:sp>
-      <p:sp>
-        <p:nvSpPr>
-          <p:cNvPr id="20" name="Rectangle : coins arrondis 19">
-            <a:extLst>
-              <a:ext uri="{FF2B5EF4-FFF2-40B4-BE49-F238E27FC236}">
-                <a16:creationId xmlns:a16="http://schemas.microsoft.com/office/drawing/2014/main" id="{8668711C-3D66-4D32-8181-97BA72184FFA}"/>
-              </a:ext>
-            </a:extLst>
-          </p:cNvPr>
-          <p:cNvSpPr>
-            <a:spLocks noGrp="1"/>
-          </p:cNvSpPr>
-          <p:nvPr/>
-        </p:nvSpPr>
-        <p:spPr>
-          <a:xfrm>
-            <a:off x="8248650" y="5143500"/>
-            <a:ext cx="1162050" cy="247650"/>
-          </a:xfrm>
-          <a:prstGeom prst="roundRect">
-            <a:avLst>
-              <a:gd name="adj" fmla="val 50000"/>
-            </a:avLst>
-          </a:prstGeom>
-          <a:solidFill>
-            <a:srgbClr val="D97706"/>
-          </a:solidFill>
-          <a:ln w="0">
-            <a:solidFill>
-              <a:srgbClr val="D97706"/>
-            </a:solidFill>
-            <a:prstDash val="solid"/>
-          </a:ln>
-        </p:spPr>
-        <p:txBody>
-          <a:bodyPr/>
-          <a:lstStyle/>
-          <a:p>
-            <a:endParaRPr lang="fr-FR"/>
-          </a:p>
-        </p:txBody>
-      </p:sp>
-      <p:sp>
-        <p:nvSpPr>
-          <p:cNvPr id="21" name="Rectangle 20">
-            <a:extLst>
-              <a:ext uri="{FF2B5EF4-FFF2-40B4-BE49-F238E27FC236}">
-                <a16:creationId xmlns:a16="http://schemas.microsoft.com/office/drawing/2014/main" id="{D2BD0899-5269-4BCD-8D32-1A719A8CC67A}"/>
-              </a:ext>
-            </a:extLst>
-          </p:cNvPr>
-          <p:cNvSpPr>
-            <a:spLocks noGrp="1"/>
-          </p:cNvSpPr>
-          <p:nvPr/>
-        </p:nvSpPr>
-        <p:spPr>
-          <a:xfrm>
-            <a:off x="8248650" y="5143500"/>
-            <a:ext cx="1162050" cy="247650"/>
-          </a:xfrm>
-          <a:prstGeom prst="rect">
-            <a:avLst/>
-          </a:prstGeom>
-          <a:noFill/>
-          <a:ln w="0">
-            <a:noFill/>
-            <a:prstDash val="solid"/>
-          </a:ln>
-        </p:spPr>
-        <p:txBody>
-          <a:bodyPr wrap="square" lIns="76200" tIns="76200" rIns="76200" bIns="76200" anchor="ctr">
-            <a:noAutofit/>
-          </a:bodyPr>
-          <a:lstStyle/>
-          <a:p>
-            <a:pPr algn="ctr">
-              <a:defRPr sz="1050" b="1">
-                <a:solidFill>
-                  <a:srgbClr val="FFFFFF"/>
-                </a:solidFill>
-              </a:defRPr>
-            </a:pPr>
-            <a:r>
-              <a:rPr sz="1000" b="1" dirty="0">
-                <a:solidFill>
-                  <a:srgbClr val="FFFFFF"/>
-                </a:solidFill>
-              </a:rPr>
-              <a:t>Show in DNV</a:t>
-            </a:r>
-          </a:p>
-        </p:txBody>
-      </p:sp>
-      <p:sp>
-        <p:nvSpPr>
-          <p:cNvPr id="22" name="Rectangle 21">
-            <a:extLst>
-              <a:ext uri="{FF2B5EF4-FFF2-40B4-BE49-F238E27FC236}">
-                <a16:creationId xmlns:a16="http://schemas.microsoft.com/office/drawing/2014/main" id="{FD5E09B8-D770-464D-ADED-A068C0093D7D}"/>
-              </a:ext>
-            </a:extLst>
-          </p:cNvPr>
-          <p:cNvSpPr>
-            <a:spLocks noGrp="1"/>
-          </p:cNvSpPr>
-          <p:nvPr/>
-        </p:nvSpPr>
-        <p:spPr>
-          <a:xfrm>
-            <a:off x="8248650" y="5505450"/>
-            <a:ext cx="3124200" cy="247650"/>
-          </a:xfrm>
-          <a:prstGeom prst="rect">
-            <a:avLst/>
-          </a:prstGeom>
-          <a:noFill/>
-          <a:ln w="0">
-            <a:noFill/>
-            <a:prstDash val="solid"/>
-          </a:ln>
-        </p:spPr>
-        <p:txBody>
-          <a:bodyPr wrap="square" lIns="0" tIns="0" rIns="0" bIns="0" anchor="t">
-            <a:normAutofit fontScale="81122" lnSpcReduction="20000"/>
-          </a:bodyPr>
-          <a:lstStyle/>
-          <a:p>
-            <a:pPr algn="l">
-              <a:defRPr sz="1200" b="0">
-                <a:solidFill>
-                  <a:srgbClr val="334155"/>
-                </a:solidFill>
-              </a:defRPr>
-            </a:pPr>
-            <a:r>
-              <a:rPr sz="1200" b="0">
-                <a:solidFill>
-                  <a:srgbClr val="334155"/>
-                </a:solidFill>
-              </a:rPr>
-              <a:t>Scrolls the user to the correct mapped node from the left side.</a:t>
-            </a:r>
-          </a:p>
-        </p:txBody>
-      </p:sp>
-      <p:sp>
-        <p:nvSpPr>
-          <p:cNvPr id="23" name="Rectangle 22">
-            <a:extLst>
-              <a:ext uri="{FF2B5EF4-FFF2-40B4-BE49-F238E27FC236}">
-                <a16:creationId xmlns:a16="http://schemas.microsoft.com/office/drawing/2014/main" id="{11C2A300-0428-49F0-975D-71FB989F8603}"/>
-              </a:ext>
-            </a:extLst>
-          </p:cNvPr>
-          <p:cNvSpPr>
-            <a:spLocks noGrp="1"/>
-          </p:cNvSpPr>
-          <p:nvPr/>
-        </p:nvSpPr>
-        <p:spPr>
-          <a:xfrm>
-            <a:off x="571500" y="6534150"/>
-            <a:ext cx="3048000" cy="190500"/>
-          </a:xfrm>
-          <a:prstGeom prst="rect">
-            <a:avLst/>
-          </a:prstGeom>
-          <a:noFill/>
-          <a:ln w="0">
-            <a:noFill/>
-            <a:prstDash val="solid"/>
-          </a:ln>
-        </p:spPr>
-        <p:txBody>
-          <a:bodyPr wrap="square" lIns="0" tIns="0" rIns="0" bIns="0" anchor="t">
-            <a:normAutofit/>
-          </a:bodyPr>
-          <a:lstStyle/>
-          <a:p>
-            <a:pPr algn="l">
-              <a:defRPr sz="825" b="0">
-                <a:solidFill>
-                  <a:srgbClr val="64748B"/>
-                </a:solidFill>
-              </a:defRPr>
-            </a:pPr>
-            <a:r>
-              <a:rPr sz="825" b="0">
-                <a:solidFill>
-                  <a:srgbClr val="64748B"/>
-                </a:solidFill>
-              </a:rPr>
-              <a:t>Data Hub guide - new vessel workflow</a:t>
-            </a:r>
-          </a:p>
-        </p:txBody>
-      </p:sp>
-      <p:sp>
-        <p:nvSpPr>
-          <p:cNvPr id="24" name="Rectangle 23">
-            <a:extLst>
-              <a:ext uri="{FF2B5EF4-FFF2-40B4-BE49-F238E27FC236}">
-                <a16:creationId xmlns:a16="http://schemas.microsoft.com/office/drawing/2014/main" id="{DB659BFC-BABA-42A4-ACF0-05A0112D3DBC}"/>
-              </a:ext>
-            </a:extLst>
-          </p:cNvPr>
-          <p:cNvSpPr>
-            <a:spLocks noGrp="1"/>
-          </p:cNvSpPr>
-          <p:nvPr/>
-        </p:nvSpPr>
-        <p:spPr>
-          <a:xfrm>
-            <a:off x="11144250" y="6496050"/>
-            <a:ext cx="381000" cy="228600"/>
-          </a:xfrm>
-          <a:prstGeom prst="rect">
-            <a:avLst/>
-          </a:prstGeom>
-          <a:noFill/>
-          <a:ln w="0">
-            <a:noFill/>
-            <a:prstDash val="solid"/>
-          </a:ln>
-        </p:spPr>
-        <p:txBody>
-          <a:bodyPr wrap="square" lIns="0" tIns="0" rIns="0" bIns="0" anchor="t">
-            <a:normAutofit/>
-          </a:bodyPr>
-          <a:lstStyle/>
-          <a:p>
-            <a:pPr algn="r">
-              <a:defRPr sz="900" b="1">
-                <a:solidFill>
-                  <a:srgbClr val="64748B"/>
-                </a:solidFill>
-              </a:defRPr>
-            </a:pPr>
-            <a:r>
-              <a:rPr lang="fr-FR" sz="900" b="1" dirty="0">
-                <a:solidFill>
-                  <a:srgbClr val="64748B"/>
-                </a:solidFill>
-              </a:rPr>
-              <a:t>9</a:t>
-            </a:r>
-            <a:endParaRPr sz="900" b="1" dirty="0">
-              <a:solidFill>
-                <a:srgbClr val="64748B"/>
-              </a:solidFill>
-            </a:endParaRPr>
           </a:p>
         </p:txBody>
       </p:sp>
     </p:spTree>
     <p:extLst>
       <p:ext uri="{BB962C8B-B14F-4D97-AF65-F5344CB8AC3E}">
-        <p14:creationId xmlns:p14="http://schemas.microsoft.com/office/powerpoint/2010/main" val="429278651"/>
+        <p14:creationId xmlns:p14="http://schemas.microsoft.com/office/powerpoint/2010/main" val="3690625882"/>
       </p:ext>
     </p:extLst>
   </p:cSld>
